--- a/source/Instructor Progress Test 4 Grams/Instructor Progress Test 4 Grams.pptx
+++ b/source/Instructor Progress Test 4 Grams/Instructor Progress Test 4 Grams.pptx
@@ -3142,11 +3142,11 @@
       </p:sp>
       <p:sp>
         <p:nvSpPr>
-          <p:cNvPr id="3" name="Rounded Rectangle 2"/>
+          <p:cNvPr id="3" name="Rounded Rectangle 2">
+            <a:hlinkClick r:id="rId2"/>
+          </p:cNvPr>
           <p:cNvSpPr/>
-          <p:nvPr>
-            <a:hlinkClick r:id="rId2"/>
-          </p:nvPr>
+          <p:nvPr/>
         </p:nvSpPr>
         <p:spPr>
           <a:xfrm>
@@ -3244,11 +3244,11 @@
       </p:sp>
       <p:sp>
         <p:nvSpPr>
-          <p:cNvPr id="5" name="Rounded Rectangle 4"/>
+          <p:cNvPr id="5" name="Rounded Rectangle 4">
+            <a:hlinkClick r:id="rId6"/>
+          </p:cNvPr>
           <p:cNvSpPr/>
-          <p:nvPr>
-            <a:hlinkClick r:id="rId6"/>
-          </p:nvPr>
+          <p:nvPr/>
         </p:nvSpPr>
         <p:spPr>
           <a:xfrm>
@@ -3330,11 +3330,11 @@
       </p:sp>
       <p:sp>
         <p:nvSpPr>
-          <p:cNvPr id="7" name="Rounded Rectangle 6"/>
+          <p:cNvPr id="7" name="Rounded Rectangle 6">
+            <a:hlinkClick r:id="rId8"/>
+          </p:cNvPr>
           <p:cNvSpPr/>
-          <p:nvPr>
-            <a:hlinkClick r:id="rId8"/>
-          </p:nvPr>
+          <p:nvPr/>
         </p:nvSpPr>
         <p:spPr>
           <a:xfrm>
@@ -3424,11 +3424,11 @@
       </p:sp>
       <p:sp>
         <p:nvSpPr>
-          <p:cNvPr id="9" name="Rounded Rectangle 8"/>
+          <p:cNvPr id="9" name="Rounded Rectangle 8">
+            <a:hlinkClick r:id="rId11"/>
+          </p:cNvPr>
           <p:cNvSpPr/>
-          <p:nvPr>
-            <a:hlinkClick r:id="rId11"/>
-          </p:nvPr>
+          <p:nvPr/>
         </p:nvSpPr>
         <p:spPr>
           <a:xfrm>
@@ -3526,11 +3526,11 @@
       </p:sp>
       <p:sp>
         <p:nvSpPr>
-          <p:cNvPr id="11" name="Rounded Rectangle 10"/>
+          <p:cNvPr id="11" name="Rounded Rectangle 10">
+            <a:hlinkClick r:id="rId15"/>
+          </p:cNvPr>
           <p:cNvSpPr/>
-          <p:nvPr>
-            <a:hlinkClick r:id="rId15"/>
-          </p:nvPr>
+          <p:nvPr/>
         </p:nvSpPr>
         <p:spPr>
           <a:xfrm>
@@ -3620,11 +3620,11 @@
       </p:sp>
       <p:sp>
         <p:nvSpPr>
-          <p:cNvPr id="13" name="Rounded Rectangle 12"/>
+          <p:cNvPr id="13" name="Rounded Rectangle 12">
+            <a:hlinkClick r:id="rId18"/>
+          </p:cNvPr>
           <p:cNvSpPr/>
-          <p:nvPr>
-            <a:hlinkClick r:id="rId18"/>
-          </p:nvPr>
+          <p:nvPr/>
         </p:nvSpPr>
         <p:spPr>
           <a:xfrm>
@@ -3722,11 +3722,11 @@
       </p:sp>
       <p:sp>
         <p:nvSpPr>
-          <p:cNvPr id="15" name="Rounded Rectangle 14"/>
+          <p:cNvPr id="15" name="Rounded Rectangle 14">
+            <a:hlinkClick r:id="rId22"/>
+          </p:cNvPr>
           <p:cNvSpPr/>
-          <p:nvPr>
-            <a:hlinkClick r:id="rId22"/>
-          </p:nvPr>
+          <p:nvPr/>
         </p:nvSpPr>
         <p:spPr>
           <a:xfrm>
@@ -3808,11 +3808,11 @@
       </p:sp>
       <p:sp>
         <p:nvSpPr>
-          <p:cNvPr id="17" name="Rounded Rectangle 16"/>
+          <p:cNvPr id="17" name="Rounded Rectangle 16">
+            <a:hlinkClick r:id="rId24"/>
+          </p:cNvPr>
           <p:cNvSpPr/>
-          <p:nvPr>
-            <a:hlinkClick r:id="rId24"/>
-          </p:nvPr>
+          <p:nvPr/>
         </p:nvSpPr>
         <p:spPr>
           <a:xfrm>
@@ -3894,11 +3894,11 @@
       </p:sp>
       <p:sp>
         <p:nvSpPr>
-          <p:cNvPr id="19" name="Rounded Rectangle 18"/>
+          <p:cNvPr id="19" name="Rounded Rectangle 18">
+            <a:hlinkClick r:id="rId26"/>
+          </p:cNvPr>
           <p:cNvSpPr/>
-          <p:nvPr>
-            <a:hlinkClick r:id="rId26"/>
-          </p:nvPr>
+          <p:nvPr/>
         </p:nvSpPr>
         <p:spPr>
           <a:xfrm>
@@ -3980,11 +3980,11 @@
       </p:sp>
       <p:sp>
         <p:nvSpPr>
-          <p:cNvPr id="21" name="Rounded Rectangle 20"/>
+          <p:cNvPr id="21" name="Rounded Rectangle 20">
+            <a:hlinkClick r:id="rId28"/>
+          </p:cNvPr>
           <p:cNvSpPr/>
-          <p:nvPr>
-            <a:hlinkClick r:id="rId28"/>
-          </p:nvPr>
+          <p:nvPr/>
         </p:nvSpPr>
         <p:spPr>
           <a:xfrm>
@@ -4074,11 +4074,11 @@
       </p:sp>
       <p:sp>
         <p:nvSpPr>
-          <p:cNvPr id="23" name="Rounded Rectangle 22"/>
+          <p:cNvPr id="23" name="Rounded Rectangle 22">
+            <a:hlinkClick r:id="rId31"/>
+          </p:cNvPr>
           <p:cNvSpPr/>
-          <p:nvPr>
-            <a:hlinkClick r:id="rId31"/>
-          </p:nvPr>
+          <p:nvPr/>
         </p:nvSpPr>
         <p:spPr>
           <a:xfrm>
@@ -4160,11 +4160,11 @@
       </p:sp>
       <p:sp>
         <p:nvSpPr>
-          <p:cNvPr id="25" name="Rounded Rectangle 24"/>
+          <p:cNvPr id="25" name="Rounded Rectangle 24">
+            <a:hlinkClick r:id="rId33"/>
+          </p:cNvPr>
           <p:cNvSpPr/>
-          <p:nvPr>
-            <a:hlinkClick r:id="rId33"/>
-          </p:nvPr>
+          <p:nvPr/>
         </p:nvSpPr>
         <p:spPr>
           <a:xfrm>
@@ -4270,11 +4270,11 @@
       </p:sp>
       <p:sp>
         <p:nvSpPr>
-          <p:cNvPr id="27" name="Rounded Rectangle 26"/>
+          <p:cNvPr id="27" name="Rounded Rectangle 26">
+            <a:hlinkClick r:id="rId38"/>
+          </p:cNvPr>
           <p:cNvSpPr/>
-          <p:nvPr>
-            <a:hlinkClick r:id="rId38"/>
-          </p:nvPr>
+          <p:nvPr/>
         </p:nvSpPr>
         <p:spPr>
           <a:xfrm>
@@ -4372,11 +4372,11 @@
       </p:sp>
       <p:sp>
         <p:nvSpPr>
-          <p:cNvPr id="29" name="Rounded Rectangle 28"/>
+          <p:cNvPr id="29" name="Rounded Rectangle 28">
+            <a:hlinkClick r:id="rId42"/>
+          </p:cNvPr>
           <p:cNvSpPr/>
-          <p:nvPr>
-            <a:hlinkClick r:id="rId42"/>
-          </p:nvPr>
+          <p:nvPr/>
         </p:nvSpPr>
         <p:spPr>
           <a:xfrm>
@@ -4466,11 +4466,11 @@
       </p:sp>
       <p:sp>
         <p:nvSpPr>
-          <p:cNvPr id="31" name="Rounded Rectangle 30"/>
+          <p:cNvPr id="31" name="Rounded Rectangle 30">
+            <a:hlinkClick r:id="rId45"/>
+          </p:cNvPr>
           <p:cNvSpPr/>
-          <p:nvPr>
-            <a:hlinkClick r:id="rId45"/>
-          </p:nvPr>
+          <p:nvPr/>
         </p:nvSpPr>
         <p:spPr>
           <a:xfrm>
@@ -4637,11 +4637,11 @@
       </p:sp>
       <p:sp>
         <p:nvSpPr>
-          <p:cNvPr id="3" name="Rounded Rectangle 2"/>
+          <p:cNvPr id="3" name="Rounded Rectangle 2">
+            <a:hlinkClick r:id="rId2"/>
+          </p:cNvPr>
           <p:cNvSpPr/>
-          <p:nvPr>
-            <a:hlinkClick r:id="rId2"/>
-          </p:nvPr>
+          <p:nvPr/>
         </p:nvSpPr>
         <p:spPr>
           <a:xfrm>
@@ -4739,11 +4739,11 @@
       </p:sp>
       <p:sp>
         <p:nvSpPr>
-          <p:cNvPr id="5" name="Rounded Rectangle 4"/>
+          <p:cNvPr id="5" name="Rounded Rectangle 4">
+            <a:hlinkClick r:id="rId6"/>
+          </p:cNvPr>
           <p:cNvSpPr/>
-          <p:nvPr>
-            <a:hlinkClick r:id="rId6"/>
-          </p:nvPr>
+          <p:nvPr/>
         </p:nvSpPr>
         <p:spPr>
           <a:xfrm>
@@ -4825,11 +4825,11 @@
       </p:sp>
       <p:sp>
         <p:nvSpPr>
-          <p:cNvPr id="7" name="Rounded Rectangle 6"/>
+          <p:cNvPr id="7" name="Rounded Rectangle 6">
+            <a:hlinkClick r:id="rId8"/>
+          </p:cNvPr>
           <p:cNvSpPr/>
-          <p:nvPr>
-            <a:hlinkClick r:id="rId8"/>
-          </p:nvPr>
+          <p:nvPr/>
         </p:nvSpPr>
         <p:spPr>
           <a:xfrm>
@@ -4911,11 +4911,11 @@
       </p:sp>
       <p:sp>
         <p:nvSpPr>
-          <p:cNvPr id="9" name="Rounded Rectangle 8"/>
+          <p:cNvPr id="9" name="Rounded Rectangle 8">
+            <a:hlinkClick r:id="rId10"/>
+          </p:cNvPr>
           <p:cNvSpPr/>
-          <p:nvPr>
-            <a:hlinkClick r:id="rId10"/>
-          </p:nvPr>
+          <p:nvPr/>
         </p:nvSpPr>
         <p:spPr>
           <a:xfrm>
@@ -5013,11 +5013,11 @@
       </p:sp>
       <p:sp>
         <p:nvSpPr>
-          <p:cNvPr id="11" name="Rounded Rectangle 10"/>
+          <p:cNvPr id="11" name="Rounded Rectangle 10">
+            <a:hlinkClick r:id="rId14"/>
+          </p:cNvPr>
           <p:cNvSpPr/>
-          <p:nvPr>
-            <a:hlinkClick r:id="rId14"/>
-          </p:nvPr>
+          <p:nvPr/>
         </p:nvSpPr>
         <p:spPr>
           <a:xfrm>
@@ -5107,11 +5107,11 @@
       </p:sp>
       <p:sp>
         <p:nvSpPr>
-          <p:cNvPr id="13" name="Rounded Rectangle 12"/>
+          <p:cNvPr id="13" name="Rounded Rectangle 12">
+            <a:hlinkClick r:id="rId17"/>
+          </p:cNvPr>
           <p:cNvSpPr/>
-          <p:nvPr>
-            <a:hlinkClick r:id="rId17"/>
-          </p:nvPr>
+          <p:nvPr/>
         </p:nvSpPr>
         <p:spPr>
           <a:xfrm>
@@ -5201,11 +5201,11 @@
       </p:sp>
       <p:sp>
         <p:nvSpPr>
-          <p:cNvPr id="15" name="Rounded Rectangle 14"/>
+          <p:cNvPr id="15" name="Rounded Rectangle 14">
+            <a:hlinkClick r:id="rId20"/>
+          </p:cNvPr>
           <p:cNvSpPr/>
-          <p:nvPr>
-            <a:hlinkClick r:id="rId20"/>
-          </p:nvPr>
+          <p:nvPr/>
         </p:nvSpPr>
         <p:spPr>
           <a:xfrm>
@@ -5311,11 +5311,11 @@
       </p:sp>
       <p:sp>
         <p:nvSpPr>
-          <p:cNvPr id="17" name="Rounded Rectangle 16"/>
+          <p:cNvPr id="17" name="Rounded Rectangle 16">
+            <a:hlinkClick r:id="rId25"/>
+          </p:cNvPr>
           <p:cNvSpPr/>
-          <p:nvPr>
-            <a:hlinkClick r:id="rId25"/>
-          </p:nvPr>
+          <p:nvPr/>
         </p:nvSpPr>
         <p:spPr>
           <a:xfrm>
@@ -5421,11 +5421,11 @@
       </p:sp>
       <p:sp>
         <p:nvSpPr>
-          <p:cNvPr id="19" name="Rounded Rectangle 18"/>
+          <p:cNvPr id="19" name="Rounded Rectangle 18">
+            <a:hlinkClick r:id="rId30"/>
+          </p:cNvPr>
           <p:cNvSpPr/>
-          <p:nvPr>
-            <a:hlinkClick r:id="rId30"/>
-          </p:nvPr>
+          <p:nvPr/>
         </p:nvSpPr>
         <p:spPr>
           <a:xfrm>
@@ -5523,11 +5523,11 @@
       </p:sp>
       <p:sp>
         <p:nvSpPr>
-          <p:cNvPr id="21" name="Rounded Rectangle 20"/>
+          <p:cNvPr id="21" name="Rounded Rectangle 20">
+            <a:hlinkClick r:id="rId34"/>
+          </p:cNvPr>
           <p:cNvSpPr/>
-          <p:nvPr>
-            <a:hlinkClick r:id="rId34"/>
-          </p:nvPr>
+          <p:nvPr/>
         </p:nvSpPr>
         <p:spPr>
           <a:xfrm>
@@ -5609,11 +5609,11 @@
       </p:sp>
       <p:sp>
         <p:nvSpPr>
-          <p:cNvPr id="23" name="Rounded Rectangle 22"/>
+          <p:cNvPr id="23" name="Rounded Rectangle 22">
+            <a:hlinkClick r:id="rId36"/>
+          </p:cNvPr>
           <p:cNvSpPr/>
-          <p:nvPr>
-            <a:hlinkClick r:id="rId36"/>
-          </p:nvPr>
+          <p:nvPr/>
         </p:nvSpPr>
         <p:spPr>
           <a:xfrm>
@@ -5695,11 +5695,11 @@
       </p:sp>
       <p:sp>
         <p:nvSpPr>
-          <p:cNvPr id="25" name="Rounded Rectangle 24"/>
+          <p:cNvPr id="25" name="Rounded Rectangle 24">
+            <a:hlinkClick r:id="rId38"/>
+          </p:cNvPr>
           <p:cNvSpPr/>
-          <p:nvPr>
-            <a:hlinkClick r:id="rId38"/>
-          </p:nvPr>
+          <p:nvPr/>
         </p:nvSpPr>
         <p:spPr>
           <a:xfrm>
@@ -5805,11 +5805,11 @@
       </p:sp>
       <p:sp>
         <p:nvSpPr>
-          <p:cNvPr id="27" name="Rounded Rectangle 26"/>
+          <p:cNvPr id="27" name="Rounded Rectangle 26">
+            <a:hlinkClick r:id="rId43"/>
+          </p:cNvPr>
           <p:cNvSpPr/>
-          <p:nvPr>
-            <a:hlinkClick r:id="rId43"/>
-          </p:nvPr>
+          <p:nvPr/>
         </p:nvSpPr>
         <p:spPr>
           <a:xfrm>
@@ -5915,11 +5915,11 @@
       </p:sp>
       <p:sp>
         <p:nvSpPr>
-          <p:cNvPr id="29" name="Rounded Rectangle 28"/>
+          <p:cNvPr id="29" name="Rounded Rectangle 28">
+            <a:hlinkClick r:id="rId48"/>
+          </p:cNvPr>
           <p:cNvSpPr/>
-          <p:nvPr>
-            <a:hlinkClick r:id="rId48"/>
-          </p:nvPr>
+          <p:nvPr/>
         </p:nvSpPr>
         <p:spPr>
           <a:xfrm>
@@ -6001,11 +6001,11 @@
       </p:sp>
       <p:sp>
         <p:nvSpPr>
-          <p:cNvPr id="31" name="Rounded Rectangle 30"/>
+          <p:cNvPr id="31" name="Rounded Rectangle 30">
+            <a:hlinkClick r:id="rId50"/>
+          </p:cNvPr>
           <p:cNvSpPr/>
-          <p:nvPr>
-            <a:hlinkClick r:id="rId50"/>
-          </p:nvPr>
+          <p:nvPr/>
         </p:nvSpPr>
         <p:spPr>
           <a:xfrm>

--- a/source/Instructor Progress Test 4 Grams/Instructor Progress Test 4 Grams.pptx
+++ b/source/Instructor Progress Test 4 Grams/Instructor Progress Test 4 Grams.pptx
@@ -7,6 +7,8 @@
   <p:sldIdLst>
     <p:sldId id="256" r:id="rId7"/>
     <p:sldId id="257" r:id="rId8"/>
+    <p:sldId id="258" r:id="rId9"/>
+    <p:sldId id="259" r:id="rId10"/>
   </p:sldIdLst>
   <p:sldSz cx="12188952" cy="6858000" type="screen4x3"/>
   <p:notesSz cx="6858000" cy="9144000"/>
@@ -3091,120 +3093,48 @@
       <p:grpSpPr/>
       <p:sp>
         <p:nvSpPr>
-          <p:cNvPr id="2" name="Rectangle 1"/>
-          <p:cNvSpPr/>
+          <p:cNvPr id="2" name="TextBox 1"/>
+          <p:cNvSpPr txBox="1"/>
           <p:nvPr/>
         </p:nvSpPr>
         <p:spPr>
           <a:xfrm>
-            <a:off x="0" y="0"/>
-            <a:ext cx="12188952" cy="548640"/>
+            <a:off x="914400" y="2377440"/>
+            <a:ext cx="10360152" cy="1280160"/>
           </a:xfrm>
           <a:prstGeom prst="rect">
             <a:avLst/>
           </a:prstGeom>
-          <a:solidFill>
-            <a:srgbClr val="1F3A5F"/>
-          </a:solidFill>
-          <a:ln>
-            <a:noFill/>
-          </a:ln>
-        </p:spPr>
-        <p:style>
-          <a:lnRef idx="1">
-            <a:schemeClr val="accent1"/>
-          </a:lnRef>
-          <a:fillRef idx="3">
-            <a:schemeClr val="accent1"/>
-          </a:fillRef>
-          <a:effectRef idx="2">
-            <a:schemeClr val="accent1"/>
-          </a:effectRef>
-          <a:fontRef idx="minor">
-            <a:schemeClr val="lt1"/>
-          </a:fontRef>
-        </p:style>
-        <p:txBody>
-          <a:bodyPr rtlCol="0" anchor="ctr" lIns="182880" rIns="182880"/>
+          <a:noFill/>
+        </p:spPr>
+        <p:txBody>
+          <a:bodyPr wrap="square">
+            <a:spAutoFit/>
+          </a:bodyPr>
           <a:lstStyle/>
           <a:p>
             <a:pPr algn="ctr"/>
             <a:r>
-              <a:rPr sz="2000" b="1">
-                <a:solidFill>
-                  <a:srgbClr val="FFFFFF"/>
-                </a:solidFill>
-              </a:rPr>
-              <a:t>Instructor Progress Test 4 Grams — Page 1 of 2</a:t>
-            </a:r>
-          </a:p>
-        </p:txBody>
-      </p:sp>
-      <p:sp>
-        <p:nvSpPr>
-          <p:cNvPr id="3" name="Rounded Rectangle 2"/>
-          <p:cNvSpPr/>
-          <p:nvPr>
-            <a:hlinkClick r:id="rId2"/>
-          </p:nvPr>
-        </p:nvSpPr>
-        <p:spPr>
-          <a:xfrm>
-            <a:off x="365760" y="731520"/>
-            <a:ext cx="2200046" cy="365760"/>
-          </a:xfrm>
-          <a:prstGeom prst="roundRect">
-            <a:avLst/>
-          </a:prstGeom>
-          <a:solidFill>
-            <a:srgbClr val="E8EEF7"/>
-          </a:solidFill>
-          <a:ln>
-            <a:solidFill>
-              <a:srgbClr val="1F3A5F"/>
-            </a:solidFill>
-          </a:ln>
-        </p:spPr>
-        <p:style>
-          <a:lnRef idx="1">
-            <a:schemeClr val="accent1"/>
-          </a:lnRef>
-          <a:fillRef idx="3">
-            <a:schemeClr val="accent1"/>
-          </a:fillRef>
-          <a:effectRef idx="2">
-            <a:schemeClr val="accent1"/>
-          </a:effectRef>
-          <a:fontRef idx="minor">
-            <a:schemeClr val="lt1"/>
-          </a:fontRef>
-        </p:style>
-        <p:txBody>
-          <a:bodyPr rtlCol="0" anchor="ctr" lIns="45720" rIns="45720"/>
-          <a:lstStyle/>
-          <a:p>
-            <a:pPr algn="ctr"/>
-            <a:r>
-              <a:rPr sz="900">
+              <a:rPr sz="4000" b="1">
                 <a:solidFill>
                   <a:srgbClr val="1F3A5F"/>
                 </a:solidFill>
               </a:rPr>
-              <a:t>Gram 1: FR A-wing, Category 2, Bespin</a:t>
-            </a:r>
-          </a:p>
-        </p:txBody>
-      </p:sp>
-      <p:sp>
-        <p:nvSpPr>
-          <p:cNvPr id="4" name="TextBox 3"/>
+              <a:t>Welcome to Instructor Progress Test 4 Grams</a:t>
+            </a:r>
+          </a:p>
+        </p:txBody>
+      </p:sp>
+      <p:sp>
+        <p:nvSpPr>
+          <p:cNvPr id="3" name="TextBox 2"/>
           <p:cNvSpPr txBox="1"/>
           <p:nvPr/>
         </p:nvSpPr>
         <p:spPr>
           <a:xfrm>
-            <a:off x="365760" y="1115568"/>
-            <a:ext cx="2200046" cy="1447800"/>
+            <a:off x="914400" y="3840480"/>
+            <a:ext cx="10360152" cy="731520"/>
           </a:xfrm>
           <a:prstGeom prst="rect">
             <a:avLst/>
@@ -3212,1356 +3142,19 @@
           <a:noFill/>
         </p:spPr>
         <p:txBody>
-          <a:bodyPr wrap="square">
+          <a:bodyPr wrap="none">
             <a:spAutoFit/>
           </a:bodyPr>
           <a:lstStyle/>
           <a:p>
-            <a:r>
-              <a:rPr sz="800">
-                <a:hlinkClick r:id="rId3"/>
-              </a:rPr>
-              <a:t>Lofar 1</a:t>
-            </a:r>
-          </a:p>
-          <a:p>
-            <a:r>
-              <a:rPr sz="800">
-                <a:hlinkClick r:id="rId4"/>
-              </a:rPr>
-              <a:t>Lofar 2</a:t>
-            </a:r>
-          </a:p>
-          <a:p>
-            <a:r>
-              <a:rPr sz="800">
-                <a:hlinkClick r:id="rId5"/>
-              </a:rPr>
-              <a:t>Lofar 3</a:t>
-            </a:r>
-          </a:p>
-        </p:txBody>
-      </p:sp>
-      <p:sp>
-        <p:nvSpPr>
-          <p:cNvPr id="5" name="Rounded Rectangle 4"/>
-          <p:cNvSpPr/>
-          <p:nvPr>
-            <a:hlinkClick r:id="rId6"/>
-          </p:nvPr>
-        </p:nvSpPr>
-        <p:spPr>
-          <a:xfrm>
-            <a:off x="2657246" y="731520"/>
-            <a:ext cx="2200046" cy="365760"/>
-          </a:xfrm>
-          <a:prstGeom prst="roundRect">
-            <a:avLst/>
-          </a:prstGeom>
-          <a:solidFill>
-            <a:srgbClr val="E8EEF7"/>
-          </a:solidFill>
-          <a:ln>
-            <a:solidFill>
-              <a:srgbClr val="1F3A5F"/>
-            </a:solidFill>
-          </a:ln>
-        </p:spPr>
-        <p:style>
-          <a:lnRef idx="1">
-            <a:schemeClr val="accent1"/>
-          </a:lnRef>
-          <a:fillRef idx="3">
-            <a:schemeClr val="accent1"/>
-          </a:fillRef>
-          <a:effectRef idx="2">
-            <a:schemeClr val="accent1"/>
-          </a:effectRef>
-          <a:fontRef idx="minor">
-            <a:schemeClr val="lt1"/>
-          </a:fontRef>
-        </p:style>
-        <p:txBody>
-          <a:bodyPr rtlCol="0" anchor="ctr" lIns="45720" rIns="45720"/>
-          <a:lstStyle/>
-          <a:p>
             <a:pPr algn="ctr"/>
             <a:r>
-              <a:rPr sz="900">
+              <a:rPr sz="2400">
                 <a:solidFill>
                   <a:srgbClr val="1F3A5F"/>
                 </a:solidFill>
               </a:rPr>
-              <a:t>Gram 2: Lambda Shuttle contact bearing 219, codename Cardassia</a:t>
-            </a:r>
-          </a:p>
-        </p:txBody>
-      </p:sp>
-      <p:sp>
-        <p:nvSpPr>
-          <p:cNvPr id="6" name="TextBox 5"/>
-          <p:cNvSpPr txBox="1"/>
-          <p:nvPr/>
-        </p:nvSpPr>
-        <p:spPr>
-          <a:xfrm>
-            <a:off x="2657246" y="1115568"/>
-            <a:ext cx="2200046" cy="1447800"/>
-          </a:xfrm>
-          <a:prstGeom prst="rect">
-            <a:avLst/>
-          </a:prstGeom>
-          <a:noFill/>
-        </p:spPr>
-        <p:txBody>
-          <a:bodyPr wrap="square">
-            <a:spAutoFit/>
-          </a:bodyPr>
-          <a:lstStyle/>
-          <a:p>
-            <a:r>
-              <a:rPr sz="800">
-                <a:hlinkClick r:id="rId7"/>
-              </a:rPr>
-              <a:t>Lofar 1</a:t>
-            </a:r>
-          </a:p>
-        </p:txBody>
-      </p:sp>
-      <p:sp>
-        <p:nvSpPr>
-          <p:cNvPr id="7" name="Rounded Rectangle 6"/>
-          <p:cNvSpPr/>
-          <p:nvPr>
-            <a:hlinkClick r:id="rId8"/>
-          </p:nvPr>
-        </p:nvSpPr>
-        <p:spPr>
-          <a:xfrm>
-            <a:off x="4948732" y="731520"/>
-            <a:ext cx="2200046" cy="365760"/>
-          </a:xfrm>
-          <a:prstGeom prst="roundRect">
-            <a:avLst/>
-          </a:prstGeom>
-          <a:solidFill>
-            <a:srgbClr val="E8EEF7"/>
-          </a:solidFill>
-          <a:ln>
-            <a:solidFill>
-              <a:srgbClr val="1F3A5F"/>
-            </a:solidFill>
-          </a:ln>
-        </p:spPr>
-        <p:style>
-          <a:lnRef idx="1">
-            <a:schemeClr val="accent1"/>
-          </a:lnRef>
-          <a:fillRef idx="3">
-            <a:schemeClr val="accent1"/>
-          </a:fillRef>
-          <a:effectRef idx="2">
-            <a:schemeClr val="accent1"/>
-          </a:effectRef>
-          <a:fontRef idx="minor">
-            <a:schemeClr val="lt1"/>
-          </a:fontRef>
-        </p:style>
-        <p:txBody>
-          <a:bodyPr rtlCol="0" anchor="ctr" lIns="45720" rIns="45720"/>
-          <a:lstStyle/>
-          <a:p>
-            <a:pPr algn="ctr"/>
-            <a:r>
-              <a:rPr sz="900">
-                <a:solidFill>
-                  <a:srgbClr val="1F3A5F"/>
-                </a:solidFill>
-              </a:rPr>
-              <a:t>Gram 4: FR Acclamator-class, Category 1, Trill</a:t>
-            </a:r>
-          </a:p>
-        </p:txBody>
-      </p:sp>
-      <p:sp>
-        <p:nvSpPr>
-          <p:cNvPr id="8" name="TextBox 7"/>
-          <p:cNvSpPr txBox="1"/>
-          <p:nvPr/>
-        </p:nvSpPr>
-        <p:spPr>
-          <a:xfrm>
-            <a:off x="4948732" y="1115568"/>
-            <a:ext cx="2200046" cy="1447800"/>
-          </a:xfrm>
-          <a:prstGeom prst="rect">
-            <a:avLst/>
-          </a:prstGeom>
-          <a:noFill/>
-        </p:spPr>
-        <p:txBody>
-          <a:bodyPr wrap="square">
-            <a:spAutoFit/>
-          </a:bodyPr>
-          <a:lstStyle/>
-          <a:p>
-            <a:r>
-              <a:rPr sz="800">
-                <a:hlinkClick r:id="rId9"/>
-              </a:rPr>
-              <a:t>Lofar 1</a:t>
-            </a:r>
-          </a:p>
-          <a:p>
-            <a:r>
-              <a:rPr sz="800">
-                <a:hlinkClick r:id="rId10"/>
-              </a:rPr>
-              <a:t>Lofar 2</a:t>
-            </a:r>
-          </a:p>
-        </p:txBody>
-      </p:sp>
-      <p:sp>
-        <p:nvSpPr>
-          <p:cNvPr id="9" name="Rounded Rectangle 8"/>
-          <p:cNvSpPr/>
-          <p:nvPr>
-            <a:hlinkClick r:id="rId11"/>
-          </p:nvPr>
-        </p:nvSpPr>
-        <p:spPr>
-          <a:xfrm>
-            <a:off x="7240219" y="731520"/>
-            <a:ext cx="2200046" cy="365760"/>
-          </a:xfrm>
-          <a:prstGeom prst="roundRect">
-            <a:avLst/>
-          </a:prstGeom>
-          <a:solidFill>
-            <a:srgbClr val="E8EEF7"/>
-          </a:solidFill>
-          <a:ln>
-            <a:solidFill>
-              <a:srgbClr val="1F3A5F"/>
-            </a:solidFill>
-          </a:ln>
-        </p:spPr>
-        <p:style>
-          <a:lnRef idx="1">
-            <a:schemeClr val="accent1"/>
-          </a:lnRef>
-          <a:fillRef idx="3">
-            <a:schemeClr val="accent1"/>
-          </a:fillRef>
-          <a:effectRef idx="2">
-            <a:schemeClr val="accent1"/>
-          </a:effectRef>
-          <a:fontRef idx="minor">
-            <a:schemeClr val="lt1"/>
-          </a:fontRef>
-        </p:style>
-        <p:txBody>
-          <a:bodyPr rtlCol="0" anchor="ctr" lIns="45720" rIns="45720"/>
-          <a:lstStyle/>
-          <a:p>
-            <a:pPr algn="ctr"/>
-            <a:r>
-              <a:rPr sz="900">
-                <a:solidFill>
-                  <a:srgbClr val="1F3A5F"/>
-                </a:solidFill>
-              </a:rPr>
-              <a:t>Gram 5: Nebulon-B contact bearing 084, codename Risa</a:t>
-            </a:r>
-          </a:p>
-        </p:txBody>
-      </p:sp>
-      <p:sp>
-        <p:nvSpPr>
-          <p:cNvPr id="10" name="TextBox 9"/>
-          <p:cNvSpPr txBox="1"/>
-          <p:nvPr/>
-        </p:nvSpPr>
-        <p:spPr>
-          <a:xfrm>
-            <a:off x="7240219" y="1115568"/>
-            <a:ext cx="2200046" cy="1447800"/>
-          </a:xfrm>
-          <a:prstGeom prst="rect">
-            <a:avLst/>
-          </a:prstGeom>
-          <a:noFill/>
-        </p:spPr>
-        <p:txBody>
-          <a:bodyPr wrap="square">
-            <a:spAutoFit/>
-          </a:bodyPr>
-          <a:lstStyle/>
-          <a:p>
-            <a:r>
-              <a:rPr sz="800">
-                <a:hlinkClick r:id="rId12"/>
-              </a:rPr>
-              <a:t>Lofar 1</a:t>
-            </a:r>
-          </a:p>
-          <a:p>
-            <a:r>
-              <a:rPr sz="800">
-                <a:hlinkClick r:id="rId13"/>
-              </a:rPr>
-              <a:t>Lofar 2</a:t>
-            </a:r>
-          </a:p>
-          <a:p>
-            <a:r>
-              <a:rPr sz="800">
-                <a:hlinkClick r:id="rId14"/>
-              </a:rPr>
-              <a:t>Lofar 3</a:t>
-            </a:r>
-          </a:p>
-        </p:txBody>
-      </p:sp>
-      <p:sp>
-        <p:nvSpPr>
-          <p:cNvPr id="11" name="Rounded Rectangle 10"/>
-          <p:cNvSpPr/>
-          <p:nvPr>
-            <a:hlinkClick r:id="rId15"/>
-          </p:nvPr>
-        </p:nvSpPr>
-        <p:spPr>
-          <a:xfrm>
-            <a:off x="9531705" y="731520"/>
-            <a:ext cx="2200046" cy="365760"/>
-          </a:xfrm>
-          <a:prstGeom prst="roundRect">
-            <a:avLst/>
-          </a:prstGeom>
-          <a:solidFill>
-            <a:srgbClr val="E8EEF7"/>
-          </a:solidFill>
-          <a:ln>
-            <a:solidFill>
-              <a:srgbClr val="1F3A5F"/>
-            </a:solidFill>
-          </a:ln>
-        </p:spPr>
-        <p:style>
-          <a:lnRef idx="1">
-            <a:schemeClr val="accent1"/>
-          </a:lnRef>
-          <a:fillRef idx="3">
-            <a:schemeClr val="accent1"/>
-          </a:fillRef>
-          <a:effectRef idx="2">
-            <a:schemeClr val="accent1"/>
-          </a:effectRef>
-          <a:fontRef idx="minor">
-            <a:schemeClr val="lt1"/>
-          </a:fontRef>
-        </p:style>
-        <p:txBody>
-          <a:bodyPr rtlCol="0" anchor="ctr" lIns="45720" rIns="45720"/>
-          <a:lstStyle/>
-          <a:p>
-            <a:pPr algn="ctr"/>
-            <a:r>
-              <a:rPr sz="900">
-                <a:solidFill>
-                  <a:srgbClr val="1F3A5F"/>
-                </a:solidFill>
-              </a:rPr>
-              <a:t>Gram 6: Discovery contact bearing 136, codename Tantive</a:t>
-            </a:r>
-          </a:p>
-        </p:txBody>
-      </p:sp>
-      <p:sp>
-        <p:nvSpPr>
-          <p:cNvPr id="12" name="TextBox 11"/>
-          <p:cNvSpPr txBox="1"/>
-          <p:nvPr/>
-        </p:nvSpPr>
-        <p:spPr>
-          <a:xfrm>
-            <a:off x="9531705" y="1115568"/>
-            <a:ext cx="2200046" cy="1447800"/>
-          </a:xfrm>
-          <a:prstGeom prst="rect">
-            <a:avLst/>
-          </a:prstGeom>
-          <a:noFill/>
-        </p:spPr>
-        <p:txBody>
-          <a:bodyPr wrap="square">
-            <a:spAutoFit/>
-          </a:bodyPr>
-          <a:lstStyle/>
-          <a:p>
-            <a:r>
-              <a:rPr sz="800">
-                <a:hlinkClick r:id="rId16"/>
-              </a:rPr>
-              <a:t>Lofar 1</a:t>
-            </a:r>
-          </a:p>
-          <a:p>
-            <a:r>
-              <a:rPr sz="800">
-                <a:hlinkClick r:id="rId17"/>
-              </a:rPr>
-              <a:t>Lofar 2</a:t>
-            </a:r>
-          </a:p>
-        </p:txBody>
-      </p:sp>
-      <p:sp>
-        <p:nvSpPr>
-          <p:cNvPr id="13" name="Rounded Rectangle 12"/>
-          <p:cNvSpPr/>
-          <p:nvPr>
-            <a:hlinkClick r:id="rId18"/>
-          </p:nvPr>
-        </p:nvSpPr>
-        <p:spPr>
-          <a:xfrm>
-            <a:off x="365760" y="2682240"/>
-            <a:ext cx="2200046" cy="365760"/>
-          </a:xfrm>
-          <a:prstGeom prst="roundRect">
-            <a:avLst/>
-          </a:prstGeom>
-          <a:solidFill>
-            <a:srgbClr val="E8EEF7"/>
-          </a:solidFill>
-          <a:ln>
-            <a:solidFill>
-              <a:srgbClr val="1F3A5F"/>
-            </a:solidFill>
-          </a:ln>
-        </p:spPr>
-        <p:style>
-          <a:lnRef idx="1">
-            <a:schemeClr val="accent1"/>
-          </a:lnRef>
-          <a:fillRef idx="3">
-            <a:schemeClr val="accent1"/>
-          </a:fillRef>
-          <a:effectRef idx="2">
-            <a:schemeClr val="accent1"/>
-          </a:effectRef>
-          <a:fontRef idx="minor">
-            <a:schemeClr val="lt1"/>
-          </a:fontRef>
-        </p:style>
-        <p:txBody>
-          <a:bodyPr rtlCol="0" anchor="ctr" lIns="45720" rIns="45720"/>
-          <a:lstStyle/>
-          <a:p>
-            <a:pPr algn="ctr"/>
-            <a:r>
-              <a:rPr sz="900">
-                <a:solidFill>
-                  <a:srgbClr val="1F3A5F"/>
-                </a:solidFill>
-              </a:rPr>
-              <a:t>Gram 7: FR Tantive IV, Category 3, Vulcan</a:t>
-            </a:r>
-          </a:p>
-        </p:txBody>
-      </p:sp>
-      <p:sp>
-        <p:nvSpPr>
-          <p:cNvPr id="14" name="TextBox 13"/>
-          <p:cNvSpPr txBox="1"/>
-          <p:nvPr/>
-        </p:nvSpPr>
-        <p:spPr>
-          <a:xfrm>
-            <a:off x="365760" y="3066288"/>
-            <a:ext cx="2200046" cy="1447800"/>
-          </a:xfrm>
-          <a:prstGeom prst="rect">
-            <a:avLst/>
-          </a:prstGeom>
-          <a:noFill/>
-        </p:spPr>
-        <p:txBody>
-          <a:bodyPr wrap="square">
-            <a:spAutoFit/>
-          </a:bodyPr>
-          <a:lstStyle/>
-          <a:p>
-            <a:r>
-              <a:rPr sz="800">
-                <a:hlinkClick r:id="rId19"/>
-              </a:rPr>
-              <a:t>Lofar 1</a:t>
-            </a:r>
-          </a:p>
-          <a:p>
-            <a:r>
-              <a:rPr sz="800">
-                <a:hlinkClick r:id="rId20"/>
-              </a:rPr>
-              <a:t>Lofar 2</a:t>
-            </a:r>
-          </a:p>
-          <a:p>
-            <a:r>
-              <a:rPr sz="800">
-                <a:hlinkClick r:id="rId21"/>
-              </a:rPr>
-              <a:t>Lofar 3</a:t>
-            </a:r>
-          </a:p>
-        </p:txBody>
-      </p:sp>
-      <p:sp>
-        <p:nvSpPr>
-          <p:cNvPr id="15" name="Rounded Rectangle 14"/>
-          <p:cNvSpPr/>
-          <p:nvPr>
-            <a:hlinkClick r:id="rId22"/>
-          </p:nvPr>
-        </p:nvSpPr>
-        <p:spPr>
-          <a:xfrm>
-            <a:off x="2657246" y="2682240"/>
-            <a:ext cx="2200046" cy="365760"/>
-          </a:xfrm>
-          <a:prstGeom prst="roundRect">
-            <a:avLst/>
-          </a:prstGeom>
-          <a:solidFill>
-            <a:srgbClr val="E8EEF7"/>
-          </a:solidFill>
-          <a:ln>
-            <a:solidFill>
-              <a:srgbClr val="1F3A5F"/>
-            </a:solidFill>
-          </a:ln>
-        </p:spPr>
-        <p:style>
-          <a:lnRef idx="1">
-            <a:schemeClr val="accent1"/>
-          </a:lnRef>
-          <a:fillRef idx="3">
-            <a:schemeClr val="accent1"/>
-          </a:fillRef>
-          <a:effectRef idx="2">
-            <a:schemeClr val="accent1"/>
-          </a:effectRef>
-          <a:fontRef idx="minor">
-            <a:schemeClr val="lt1"/>
-          </a:fontRef>
-        </p:style>
-        <p:txBody>
-          <a:bodyPr rtlCol="0" anchor="ctr" lIns="45720" rIns="45720"/>
-          <a:lstStyle/>
-          <a:p>
-            <a:pPr algn="ctr"/>
-            <a:r>
-              <a:rPr sz="900">
-                <a:solidFill>
-                  <a:srgbClr val="1F3A5F"/>
-                </a:solidFill>
-              </a:rPr>
-              <a:t>Gram 8: FR Devastator, Category 3, Yavin</a:t>
-            </a:r>
-          </a:p>
-        </p:txBody>
-      </p:sp>
-      <p:sp>
-        <p:nvSpPr>
-          <p:cNvPr id="16" name="TextBox 15"/>
-          <p:cNvSpPr txBox="1"/>
-          <p:nvPr/>
-        </p:nvSpPr>
-        <p:spPr>
-          <a:xfrm>
-            <a:off x="2657246" y="3066288"/>
-            <a:ext cx="2200046" cy="1447800"/>
-          </a:xfrm>
-          <a:prstGeom prst="rect">
-            <a:avLst/>
-          </a:prstGeom>
-          <a:noFill/>
-        </p:spPr>
-        <p:txBody>
-          <a:bodyPr wrap="square">
-            <a:spAutoFit/>
-          </a:bodyPr>
-          <a:lstStyle/>
-          <a:p>
-            <a:r>
-              <a:rPr sz="800">
-                <a:hlinkClick r:id="rId23"/>
-              </a:rPr>
-              <a:t>Lofar 1</a:t>
-            </a:r>
-          </a:p>
-        </p:txBody>
-      </p:sp>
-      <p:sp>
-        <p:nvSpPr>
-          <p:cNvPr id="17" name="Rounded Rectangle 16"/>
-          <p:cNvSpPr/>
-          <p:nvPr>
-            <a:hlinkClick r:id="rId24"/>
-          </p:nvPr>
-        </p:nvSpPr>
-        <p:spPr>
-          <a:xfrm>
-            <a:off x="4948732" y="2682240"/>
-            <a:ext cx="2200046" cy="365760"/>
-          </a:xfrm>
-          <a:prstGeom prst="roundRect">
-            <a:avLst/>
-          </a:prstGeom>
-          <a:solidFill>
-            <a:srgbClr val="E8EEF7"/>
-          </a:solidFill>
-          <a:ln>
-            <a:solidFill>
-              <a:srgbClr val="1F3A5F"/>
-            </a:solidFill>
-          </a:ln>
-        </p:spPr>
-        <p:style>
-          <a:lnRef idx="1">
-            <a:schemeClr val="accent1"/>
-          </a:lnRef>
-          <a:fillRef idx="3">
-            <a:schemeClr val="accent1"/>
-          </a:fillRef>
-          <a:effectRef idx="2">
-            <a:schemeClr val="accent1"/>
-          </a:effectRef>
-          <a:fontRef idx="minor">
-            <a:schemeClr val="lt1"/>
-          </a:fontRef>
-        </p:style>
-        <p:txBody>
-          <a:bodyPr rtlCol="0" anchor="ctr" lIns="45720" rIns="45720"/>
-          <a:lstStyle/>
-          <a:p>
-            <a:pPr algn="ctr"/>
-            <a:r>
-              <a:rPr sz="900">
-                <a:solidFill>
-                  <a:srgbClr val="1F3A5F"/>
-                </a:solidFill>
-              </a:rPr>
-              <a:t>Gram 11: FR Enterprise, Category 2, Mustafar</a:t>
-            </a:r>
-          </a:p>
-        </p:txBody>
-      </p:sp>
-      <p:sp>
-        <p:nvSpPr>
-          <p:cNvPr id="18" name="TextBox 17"/>
-          <p:cNvSpPr txBox="1"/>
-          <p:nvPr/>
-        </p:nvSpPr>
-        <p:spPr>
-          <a:xfrm>
-            <a:off x="4948732" y="3066288"/>
-            <a:ext cx="2200046" cy="1447800"/>
-          </a:xfrm>
-          <a:prstGeom prst="rect">
-            <a:avLst/>
-          </a:prstGeom>
-          <a:noFill/>
-        </p:spPr>
-        <p:txBody>
-          <a:bodyPr wrap="square">
-            <a:spAutoFit/>
-          </a:bodyPr>
-          <a:lstStyle/>
-          <a:p>
-            <a:r>
-              <a:rPr sz="800">
-                <a:hlinkClick r:id="rId25"/>
-              </a:rPr>
-              <a:t>Lofar 1</a:t>
-            </a:r>
-          </a:p>
-        </p:txBody>
-      </p:sp>
-      <p:sp>
-        <p:nvSpPr>
-          <p:cNvPr id="19" name="Rounded Rectangle 18"/>
-          <p:cNvSpPr/>
-          <p:nvPr>
-            <a:hlinkClick r:id="rId26"/>
-          </p:nvPr>
-        </p:nvSpPr>
-        <p:spPr>
-          <a:xfrm>
-            <a:off x="7240219" y="2682240"/>
-            <a:ext cx="2200046" cy="365760"/>
-          </a:xfrm>
-          <a:prstGeom prst="roundRect">
-            <a:avLst/>
-          </a:prstGeom>
-          <a:solidFill>
-            <a:srgbClr val="E8EEF7"/>
-          </a:solidFill>
-          <a:ln>
-            <a:solidFill>
-              <a:srgbClr val="1F3A5F"/>
-            </a:solidFill>
-          </a:ln>
-        </p:spPr>
-        <p:style>
-          <a:lnRef idx="1">
-            <a:schemeClr val="accent1"/>
-          </a:lnRef>
-          <a:fillRef idx="3">
-            <a:schemeClr val="accent1"/>
-          </a:fillRef>
-          <a:effectRef idx="2">
-            <a:schemeClr val="accent1"/>
-          </a:effectRef>
-          <a:fontRef idx="minor">
-            <a:schemeClr val="lt1"/>
-          </a:fontRef>
-        </p:style>
-        <p:txBody>
-          <a:bodyPr rtlCol="0" anchor="ctr" lIns="45720" rIns="45720"/>
-          <a:lstStyle/>
-          <a:p>
-            <a:pPr algn="ctr"/>
-            <a:r>
-              <a:rPr sz="900">
-                <a:solidFill>
-                  <a:srgbClr val="1F3A5F"/>
-                </a:solidFill>
-              </a:rPr>
-              <a:t>Gram 12: FR Slave I, Category 4, Naboo</a:t>
-            </a:r>
-          </a:p>
-        </p:txBody>
-      </p:sp>
-      <p:sp>
-        <p:nvSpPr>
-          <p:cNvPr id="20" name="TextBox 19"/>
-          <p:cNvSpPr txBox="1"/>
-          <p:nvPr/>
-        </p:nvSpPr>
-        <p:spPr>
-          <a:xfrm>
-            <a:off x="7240219" y="3066288"/>
-            <a:ext cx="2200046" cy="1447800"/>
-          </a:xfrm>
-          <a:prstGeom prst="rect">
-            <a:avLst/>
-          </a:prstGeom>
-          <a:noFill/>
-        </p:spPr>
-        <p:txBody>
-          <a:bodyPr wrap="square">
-            <a:spAutoFit/>
-          </a:bodyPr>
-          <a:lstStyle/>
-          <a:p>
-            <a:r>
-              <a:rPr sz="800">
-                <a:hlinkClick r:id="rId27"/>
-              </a:rPr>
-              <a:t>Lofar 1</a:t>
-            </a:r>
-          </a:p>
-        </p:txBody>
-      </p:sp>
-      <p:sp>
-        <p:nvSpPr>
-          <p:cNvPr id="21" name="Rounded Rectangle 20"/>
-          <p:cNvSpPr/>
-          <p:nvPr>
-            <a:hlinkClick r:id="rId28"/>
-          </p:nvPr>
-        </p:nvSpPr>
-        <p:spPr>
-          <a:xfrm>
-            <a:off x="9531705" y="2682240"/>
-            <a:ext cx="2200046" cy="365760"/>
-          </a:xfrm>
-          <a:prstGeom prst="roundRect">
-            <a:avLst/>
-          </a:prstGeom>
-          <a:solidFill>
-            <a:srgbClr val="E8EEF7"/>
-          </a:solidFill>
-          <a:ln>
-            <a:solidFill>
-              <a:srgbClr val="1F3A5F"/>
-            </a:solidFill>
-          </a:ln>
-        </p:spPr>
-        <p:style>
-          <a:lnRef idx="1">
-            <a:schemeClr val="accent1"/>
-          </a:lnRef>
-          <a:fillRef idx="3">
-            <a:schemeClr val="accent1"/>
-          </a:fillRef>
-          <a:effectRef idx="2">
-            <a:schemeClr val="accent1"/>
-          </a:effectRef>
-          <a:fontRef idx="minor">
-            <a:schemeClr val="lt1"/>
-          </a:fontRef>
-        </p:style>
-        <p:txBody>
-          <a:bodyPr rtlCol="0" anchor="ctr" lIns="45720" rIns="45720"/>
-          <a:lstStyle/>
-          <a:p>
-            <a:pPr algn="ctr"/>
-            <a:r>
-              <a:rPr sz="900">
-                <a:solidFill>
-                  <a:srgbClr val="1F3A5F"/>
-                </a:solidFill>
-              </a:rPr>
-              <a:t>Gram 13: Slave I contact bearing 010, codename Naboo</a:t>
-            </a:r>
-          </a:p>
-        </p:txBody>
-      </p:sp>
-      <p:sp>
-        <p:nvSpPr>
-          <p:cNvPr id="22" name="TextBox 21"/>
-          <p:cNvSpPr txBox="1"/>
-          <p:nvPr/>
-        </p:nvSpPr>
-        <p:spPr>
-          <a:xfrm>
-            <a:off x="9531705" y="3066288"/>
-            <a:ext cx="2200046" cy="1447800"/>
-          </a:xfrm>
-          <a:prstGeom prst="rect">
-            <a:avLst/>
-          </a:prstGeom>
-          <a:noFill/>
-        </p:spPr>
-        <p:txBody>
-          <a:bodyPr wrap="square">
-            <a:spAutoFit/>
-          </a:bodyPr>
-          <a:lstStyle/>
-          <a:p>
-            <a:r>
-              <a:rPr sz="800">
-                <a:hlinkClick r:id="rId29"/>
-              </a:rPr>
-              <a:t>Lofar 1</a:t>
-            </a:r>
-          </a:p>
-          <a:p>
-            <a:r>
-              <a:rPr sz="800">
-                <a:hlinkClick r:id="rId30"/>
-              </a:rPr>
-              <a:t>Lofar 2</a:t>
-            </a:r>
-          </a:p>
-        </p:txBody>
-      </p:sp>
-      <p:sp>
-        <p:nvSpPr>
-          <p:cNvPr id="23" name="Rounded Rectangle 22"/>
-          <p:cNvSpPr/>
-          <p:nvPr>
-            <a:hlinkClick r:id="rId31"/>
-          </p:nvPr>
-        </p:nvSpPr>
-        <p:spPr>
-          <a:xfrm>
-            <a:off x="365760" y="4632960"/>
-            <a:ext cx="2200046" cy="365760"/>
-          </a:xfrm>
-          <a:prstGeom prst="roundRect">
-            <a:avLst/>
-          </a:prstGeom>
-          <a:solidFill>
-            <a:srgbClr val="E8EEF7"/>
-          </a:solidFill>
-          <a:ln>
-            <a:solidFill>
-              <a:srgbClr val="1F3A5F"/>
-            </a:solidFill>
-          </a:ln>
-        </p:spPr>
-        <p:style>
-          <a:lnRef idx="1">
-            <a:schemeClr val="accent1"/>
-          </a:lnRef>
-          <a:fillRef idx="3">
-            <a:schemeClr val="accent1"/>
-          </a:fillRef>
-          <a:effectRef idx="2">
-            <a:schemeClr val="accent1"/>
-          </a:effectRef>
-          <a:fontRef idx="minor">
-            <a:schemeClr val="lt1"/>
-          </a:fontRef>
-        </p:style>
-        <p:txBody>
-          <a:bodyPr rtlCol="0" anchor="ctr" lIns="45720" rIns="45720"/>
-          <a:lstStyle/>
-          <a:p>
-            <a:pPr algn="ctr"/>
-            <a:r>
-              <a:rPr sz="900">
-                <a:solidFill>
-                  <a:srgbClr val="1F3A5F"/>
-                </a:solidFill>
-              </a:rPr>
-              <a:t>Gram 14: FR Galaxy-class, Category 2, Risa</a:t>
-            </a:r>
-          </a:p>
-        </p:txBody>
-      </p:sp>
-      <p:sp>
-        <p:nvSpPr>
-          <p:cNvPr id="24" name="TextBox 23"/>
-          <p:cNvSpPr txBox="1"/>
-          <p:nvPr/>
-        </p:nvSpPr>
-        <p:spPr>
-          <a:xfrm>
-            <a:off x="365760" y="5017008"/>
-            <a:ext cx="2200046" cy="1447800"/>
-          </a:xfrm>
-          <a:prstGeom prst="rect">
-            <a:avLst/>
-          </a:prstGeom>
-          <a:noFill/>
-        </p:spPr>
-        <p:txBody>
-          <a:bodyPr wrap="square">
-            <a:spAutoFit/>
-          </a:bodyPr>
-          <a:lstStyle/>
-          <a:p>
-            <a:r>
-              <a:rPr sz="800">
-                <a:hlinkClick r:id="rId32"/>
-              </a:rPr>
-              <a:t>Lofar 1</a:t>
-            </a:r>
-          </a:p>
-        </p:txBody>
-      </p:sp>
-      <p:sp>
-        <p:nvSpPr>
-          <p:cNvPr id="25" name="Rounded Rectangle 24"/>
-          <p:cNvSpPr/>
-          <p:nvPr>
-            <a:hlinkClick r:id="rId33"/>
-          </p:nvPr>
-        </p:nvSpPr>
-        <p:spPr>
-          <a:xfrm>
-            <a:off x="2657246" y="4632960"/>
-            <a:ext cx="2200046" cy="365760"/>
-          </a:xfrm>
-          <a:prstGeom prst="roundRect">
-            <a:avLst/>
-          </a:prstGeom>
-          <a:solidFill>
-            <a:srgbClr val="E8EEF7"/>
-          </a:solidFill>
-          <a:ln>
-            <a:solidFill>
-              <a:srgbClr val="1F3A5F"/>
-            </a:solidFill>
-          </a:ln>
-        </p:spPr>
-        <p:style>
-          <a:lnRef idx="1">
-            <a:schemeClr val="accent1"/>
-          </a:lnRef>
-          <a:fillRef idx="3">
-            <a:schemeClr val="accent1"/>
-          </a:fillRef>
-          <a:effectRef idx="2">
-            <a:schemeClr val="accent1"/>
-          </a:effectRef>
-          <a:fontRef idx="minor">
-            <a:schemeClr val="lt1"/>
-          </a:fontRef>
-        </p:style>
-        <p:txBody>
-          <a:bodyPr rtlCol="0" anchor="ctr" lIns="45720" rIns="45720"/>
-          <a:lstStyle/>
-          <a:p>
-            <a:pPr algn="ctr"/>
-            <a:r>
-              <a:rPr sz="900">
-                <a:solidFill>
-                  <a:srgbClr val="1F3A5F"/>
-                </a:solidFill>
-              </a:rPr>
-              <a:t>Gram 15: FR Y-wing, Category 4, Vulcan</a:t>
-            </a:r>
-          </a:p>
-        </p:txBody>
-      </p:sp>
-      <p:sp>
-        <p:nvSpPr>
-          <p:cNvPr id="26" name="TextBox 25"/>
-          <p:cNvSpPr txBox="1"/>
-          <p:nvPr/>
-        </p:nvSpPr>
-        <p:spPr>
-          <a:xfrm>
-            <a:off x="2657246" y="5017008"/>
-            <a:ext cx="2200046" cy="1447800"/>
-          </a:xfrm>
-          <a:prstGeom prst="rect">
-            <a:avLst/>
-          </a:prstGeom>
-          <a:noFill/>
-        </p:spPr>
-        <p:txBody>
-          <a:bodyPr wrap="square">
-            <a:spAutoFit/>
-          </a:bodyPr>
-          <a:lstStyle/>
-          <a:p>
-            <a:r>
-              <a:rPr sz="800">
-                <a:hlinkClick r:id="rId34"/>
-              </a:rPr>
-              <a:t>Lofar 1</a:t>
-            </a:r>
-          </a:p>
-          <a:p>
-            <a:r>
-              <a:rPr sz="800">
-                <a:hlinkClick r:id="rId35"/>
-              </a:rPr>
-              <a:t>Lofar 2</a:t>
-            </a:r>
-          </a:p>
-          <a:p>
-            <a:r>
-              <a:rPr sz="800">
-                <a:hlinkClick r:id="rId36"/>
-              </a:rPr>
-              <a:t>Lofar 3</a:t>
-            </a:r>
-          </a:p>
-          <a:p>
-            <a:r>
-              <a:rPr sz="800">
-                <a:hlinkClick r:id="rId37"/>
-              </a:rPr>
-              <a:t>Lofar 4</a:t>
-            </a:r>
-          </a:p>
-        </p:txBody>
-      </p:sp>
-      <p:sp>
-        <p:nvSpPr>
-          <p:cNvPr id="27" name="Rounded Rectangle 26"/>
-          <p:cNvSpPr/>
-          <p:nvPr>
-            <a:hlinkClick r:id="rId38"/>
-          </p:nvPr>
-        </p:nvSpPr>
-        <p:spPr>
-          <a:xfrm>
-            <a:off x="4948732" y="4632960"/>
-            <a:ext cx="2200046" cy="365760"/>
-          </a:xfrm>
-          <a:prstGeom prst="roundRect">
-            <a:avLst/>
-          </a:prstGeom>
-          <a:solidFill>
-            <a:srgbClr val="E8EEF7"/>
-          </a:solidFill>
-          <a:ln>
-            <a:solidFill>
-              <a:srgbClr val="1F3A5F"/>
-            </a:solidFill>
-          </a:ln>
-        </p:spPr>
-        <p:style>
-          <a:lnRef idx="1">
-            <a:schemeClr val="accent1"/>
-          </a:lnRef>
-          <a:fillRef idx="3">
-            <a:schemeClr val="accent1"/>
-          </a:fillRef>
-          <a:effectRef idx="2">
-            <a:schemeClr val="accent1"/>
-          </a:effectRef>
-          <a:fontRef idx="minor">
-            <a:schemeClr val="lt1"/>
-          </a:fontRef>
-        </p:style>
-        <p:txBody>
-          <a:bodyPr rtlCol="0" anchor="ctr" lIns="45720" rIns="45720"/>
-          <a:lstStyle/>
-          <a:p>
-            <a:pPr algn="ctr"/>
-            <a:r>
-              <a:rPr sz="900">
-                <a:solidFill>
-                  <a:srgbClr val="1F3A5F"/>
-                </a:solidFill>
-              </a:rPr>
-              <a:t>Gram 16: FR Tantive IV, Category 2, Dagobah</a:t>
-            </a:r>
-          </a:p>
-        </p:txBody>
-      </p:sp>
-      <p:sp>
-        <p:nvSpPr>
-          <p:cNvPr id="28" name="TextBox 27"/>
-          <p:cNvSpPr txBox="1"/>
-          <p:nvPr/>
-        </p:nvSpPr>
-        <p:spPr>
-          <a:xfrm>
-            <a:off x="4948732" y="5017008"/>
-            <a:ext cx="2200046" cy="1447800"/>
-          </a:xfrm>
-          <a:prstGeom prst="rect">
-            <a:avLst/>
-          </a:prstGeom>
-          <a:noFill/>
-        </p:spPr>
-        <p:txBody>
-          <a:bodyPr wrap="square">
-            <a:spAutoFit/>
-          </a:bodyPr>
-          <a:lstStyle/>
-          <a:p>
-            <a:r>
-              <a:rPr sz="800">
-                <a:hlinkClick r:id="rId39"/>
-              </a:rPr>
-              <a:t>Lofar 1</a:t>
-            </a:r>
-          </a:p>
-          <a:p>
-            <a:r>
-              <a:rPr sz="800">
-                <a:hlinkClick r:id="rId40"/>
-              </a:rPr>
-              <a:t>Lofar 2</a:t>
-            </a:r>
-          </a:p>
-          <a:p>
-            <a:r>
-              <a:rPr sz="800">
-                <a:hlinkClick r:id="rId41"/>
-              </a:rPr>
-              <a:t>Lofar 3</a:t>
-            </a:r>
-          </a:p>
-        </p:txBody>
-      </p:sp>
-      <p:sp>
-        <p:nvSpPr>
-          <p:cNvPr id="29" name="Rounded Rectangle 28"/>
-          <p:cNvSpPr/>
-          <p:nvPr>
-            <a:hlinkClick r:id="rId42"/>
-          </p:nvPr>
-        </p:nvSpPr>
-        <p:spPr>
-          <a:xfrm>
-            <a:off x="7240219" y="4632960"/>
-            <a:ext cx="2200046" cy="365760"/>
-          </a:xfrm>
-          <a:prstGeom prst="roundRect">
-            <a:avLst/>
-          </a:prstGeom>
-          <a:solidFill>
-            <a:srgbClr val="E8EEF7"/>
-          </a:solidFill>
-          <a:ln>
-            <a:solidFill>
-              <a:srgbClr val="1F3A5F"/>
-            </a:solidFill>
-          </a:ln>
-        </p:spPr>
-        <p:style>
-          <a:lnRef idx="1">
-            <a:schemeClr val="accent1"/>
-          </a:lnRef>
-          <a:fillRef idx="3">
-            <a:schemeClr val="accent1"/>
-          </a:fillRef>
-          <a:effectRef idx="2">
-            <a:schemeClr val="accent1"/>
-          </a:effectRef>
-          <a:fontRef idx="minor">
-            <a:schemeClr val="lt1"/>
-          </a:fontRef>
-        </p:style>
-        <p:txBody>
-          <a:bodyPr rtlCol="0" anchor="ctr" lIns="45720" rIns="45720"/>
-          <a:lstStyle/>
-          <a:p>
-            <a:pPr algn="ctr"/>
-            <a:r>
-              <a:rPr sz="900">
-                <a:solidFill>
-                  <a:srgbClr val="1F3A5F"/>
-                </a:solidFill>
-              </a:rPr>
-              <a:t>Gram 17: FR Prometheus, Category 3, Hoth</a:t>
-            </a:r>
-          </a:p>
-        </p:txBody>
-      </p:sp>
-      <p:sp>
-        <p:nvSpPr>
-          <p:cNvPr id="30" name="TextBox 29"/>
-          <p:cNvSpPr txBox="1"/>
-          <p:nvPr/>
-        </p:nvSpPr>
-        <p:spPr>
-          <a:xfrm>
-            <a:off x="7240219" y="5017008"/>
-            <a:ext cx="2200046" cy="1447800"/>
-          </a:xfrm>
-          <a:prstGeom prst="rect">
-            <a:avLst/>
-          </a:prstGeom>
-          <a:noFill/>
-        </p:spPr>
-        <p:txBody>
-          <a:bodyPr wrap="square">
-            <a:spAutoFit/>
-          </a:bodyPr>
-          <a:lstStyle/>
-          <a:p>
-            <a:r>
-              <a:rPr sz="800">
-                <a:hlinkClick r:id="rId43"/>
-              </a:rPr>
-              <a:t>Lofar 1</a:t>
-            </a:r>
-          </a:p>
-          <a:p>
-            <a:r>
-              <a:rPr sz="800">
-                <a:hlinkClick r:id="rId44"/>
-              </a:rPr>
-              <a:t>Lofar 2</a:t>
-            </a:r>
-          </a:p>
-        </p:txBody>
-      </p:sp>
-      <p:sp>
-        <p:nvSpPr>
-          <p:cNvPr id="31" name="Rounded Rectangle 30"/>
-          <p:cNvSpPr/>
-          <p:nvPr>
-            <a:hlinkClick r:id="rId45"/>
-          </p:nvPr>
-        </p:nvSpPr>
-        <p:spPr>
-          <a:xfrm>
-            <a:off x="9531705" y="4632960"/>
-            <a:ext cx="2200046" cy="365760"/>
-          </a:xfrm>
-          <a:prstGeom prst="roundRect">
-            <a:avLst/>
-          </a:prstGeom>
-          <a:solidFill>
-            <a:srgbClr val="E8EEF7"/>
-          </a:solidFill>
-          <a:ln>
-            <a:solidFill>
-              <a:srgbClr val="1F3A5F"/>
-            </a:solidFill>
-          </a:ln>
-        </p:spPr>
-        <p:style>
-          <a:lnRef idx="1">
-            <a:schemeClr val="accent1"/>
-          </a:lnRef>
-          <a:fillRef idx="3">
-            <a:schemeClr val="accent1"/>
-          </a:fillRef>
-          <a:effectRef idx="2">
-            <a:schemeClr val="accent1"/>
-          </a:effectRef>
-          <a:fontRef idx="minor">
-            <a:schemeClr val="lt1"/>
-          </a:fontRef>
-        </p:style>
-        <p:txBody>
-          <a:bodyPr rtlCol="0" anchor="ctr" lIns="45720" rIns="45720"/>
-          <a:lstStyle/>
-          <a:p>
-            <a:pPr algn="ctr"/>
-            <a:r>
-              <a:rPr sz="900">
-                <a:solidFill>
-                  <a:srgbClr val="1F3A5F"/>
-                </a:solidFill>
-              </a:rPr>
-              <a:t>Gram 18: FR A-wing, Category 2, Hoth</a:t>
-            </a:r>
-          </a:p>
-        </p:txBody>
-      </p:sp>
-      <p:sp>
-        <p:nvSpPr>
-          <p:cNvPr id="32" name="TextBox 31"/>
-          <p:cNvSpPr txBox="1"/>
-          <p:nvPr/>
-        </p:nvSpPr>
-        <p:spPr>
-          <a:xfrm>
-            <a:off x="9531705" y="5017008"/>
-            <a:ext cx="2200046" cy="1447800"/>
-          </a:xfrm>
-          <a:prstGeom prst="rect">
-            <a:avLst/>
-          </a:prstGeom>
-          <a:noFill/>
-        </p:spPr>
-        <p:txBody>
-          <a:bodyPr wrap="square">
-            <a:spAutoFit/>
-          </a:bodyPr>
-          <a:lstStyle/>
-          <a:p>
-            <a:r>
-              <a:rPr sz="800">
-                <a:hlinkClick r:id="rId46"/>
-              </a:rPr>
-              <a:t>Lofar 1</a:t>
-            </a:r>
-          </a:p>
-          <a:p>
-            <a:r>
-              <a:rPr sz="800">
-                <a:hlinkClick r:id="rId47"/>
-              </a:rPr>
-              <a:t>Lofar 2</a:t>
-            </a:r>
-          </a:p>
-          <a:p>
-            <a:r>
-              <a:rPr sz="800">
-                <a:hlinkClick r:id="rId48"/>
-              </a:rPr>
-              <a:t>Lofar 3</a:t>
+              <a:t>Instructor Version</a:t>
             </a:r>
           </a:p>
         </p:txBody>
@@ -4630,7 +3223,7 @@
                   <a:srgbClr val="FFFFFF"/>
                 </a:solidFill>
               </a:rPr>
-              <a:t>Instructor Progress Test 4 Grams — Page 2 of 2</a:t>
+              <a:t>Instructor Progress Test 4 Grams — Page 1 of 2</a:t>
             </a:r>
           </a:p>
         </p:txBody>
@@ -4685,7 +3278,7 @@
                   <a:srgbClr val="1F3A5F"/>
                 </a:solidFill>
               </a:rPr>
-              <a:t>Gram 19: Acclamator-class contact bearing 019, codename Defiant</a:t>
+              <a:t>Gram 1: FR A-wing, Category 2, Bespin</a:t>
             </a:r>
           </a:p>
         </p:txBody>
@@ -4787,7 +3380,7 @@
                   <a:srgbClr val="1F3A5F"/>
                 </a:solidFill>
               </a:rPr>
-              <a:t>Gram 21: Akira-class contact bearing 296, codename Bespin</a:t>
+              <a:t>Gram 2: Lambda Shuttle contact bearing 219, codename Cardassia</a:t>
             </a:r>
           </a:p>
         </p:txBody>
@@ -4873,7 +3466,7 @@
                   <a:srgbClr val="1F3A5F"/>
                 </a:solidFill>
               </a:rPr>
-              <a:t>Gram 23: FR Miranda-class, Category 3, Trill</a:t>
+              <a:t>Gram 4: FR Acclamator-class, Category 1, Trill</a:t>
             </a:r>
           </a:p>
         </p:txBody>
@@ -4907,6 +3500,14 @@
               <a:t>Lofar 1</a:t>
             </a:r>
           </a:p>
+          <a:p>
+            <a:r>
+              <a:rPr sz="800">
+                <a:hlinkClick r:id="rId10"/>
+              </a:rPr>
+              <a:t>Lofar 2</a:t>
+            </a:r>
+          </a:p>
         </p:txBody>
       </p:sp>
       <p:sp>
@@ -4914,7 +3515,7 @@
           <p:cNvPr id="9" name="Rounded Rectangle 8"/>
           <p:cNvSpPr/>
           <p:nvPr>
-            <a:hlinkClick r:id="rId10"/>
+            <a:hlinkClick r:id="rId11"/>
           </p:nvPr>
         </p:nvSpPr>
         <p:spPr>
@@ -4959,7 +3560,7 @@
                   <a:srgbClr val="1F3A5F"/>
                 </a:solidFill>
               </a:rPr>
-              <a:t>Gram 24: FR Nebula-class, Category 4, Coruscant</a:t>
+              <a:t>Gram 5: Nebulon-B contact bearing 084, codename Risa</a:t>
             </a:r>
           </a:p>
         </p:txBody>
@@ -4988,7 +3589,7 @@
           <a:p>
             <a:r>
               <a:rPr sz="800">
-                <a:hlinkClick r:id="rId11"/>
+                <a:hlinkClick r:id="rId12"/>
               </a:rPr>
               <a:t>Lofar 1</a:t>
             </a:r>
@@ -4996,7 +3597,7 @@
           <a:p>
             <a:r>
               <a:rPr sz="800">
-                <a:hlinkClick r:id="rId12"/>
+                <a:hlinkClick r:id="rId13"/>
               </a:rPr>
               <a:t>Lofar 2</a:t>
             </a:r>
@@ -5004,7 +3605,7 @@
           <a:p>
             <a:r>
               <a:rPr sz="800">
-                <a:hlinkClick r:id="rId13"/>
+                <a:hlinkClick r:id="rId14"/>
               </a:rPr>
               <a:t>Lofar 3</a:t>
             </a:r>
@@ -5016,7 +3617,7 @@
           <p:cNvPr id="11" name="Rounded Rectangle 10"/>
           <p:cNvSpPr/>
           <p:nvPr>
-            <a:hlinkClick r:id="rId14"/>
+            <a:hlinkClick r:id="rId15"/>
           </p:nvPr>
         </p:nvSpPr>
         <p:spPr>
@@ -5061,7 +3662,7 @@
                   <a:srgbClr val="1F3A5F"/>
                 </a:solidFill>
               </a:rPr>
-              <a:t>Gram 25: FR Mon Calamari Cruiser, Category 1, Bespin</a:t>
+              <a:t>Gram 6: Discovery contact bearing 136, codename Tantive</a:t>
             </a:r>
           </a:p>
         </p:txBody>
@@ -5090,7 +3691,7 @@
           <a:p>
             <a:r>
               <a:rPr sz="800">
-                <a:hlinkClick r:id="rId15"/>
+                <a:hlinkClick r:id="rId16"/>
               </a:rPr>
               <a:t>Lofar 1</a:t>
             </a:r>
@@ -5098,7 +3699,7 @@
           <a:p>
             <a:r>
               <a:rPr sz="800">
-                <a:hlinkClick r:id="rId16"/>
+                <a:hlinkClick r:id="rId17"/>
               </a:rPr>
               <a:t>Lofar 2</a:t>
             </a:r>
@@ -5110,7 +3711,7 @@
           <p:cNvPr id="13" name="Rounded Rectangle 12"/>
           <p:cNvSpPr/>
           <p:nvPr>
-            <a:hlinkClick r:id="rId17"/>
+            <a:hlinkClick r:id="rId18"/>
           </p:nvPr>
         </p:nvSpPr>
         <p:spPr>
@@ -5155,7 +3756,7 @@
                   <a:srgbClr val="1F3A5F"/>
                 </a:solidFill>
               </a:rPr>
-              <a:t>Gram 26: FR Enterprise, Category 3, Betazed</a:t>
+              <a:t>Gram 7: FR Tantive IV, Category 3, Vulcan</a:t>
             </a:r>
           </a:p>
         </p:txBody>
@@ -5184,7 +3785,7 @@
           <a:p>
             <a:r>
               <a:rPr sz="800">
-                <a:hlinkClick r:id="rId18"/>
+                <a:hlinkClick r:id="rId19"/>
               </a:rPr>
               <a:t>Lofar 1</a:t>
             </a:r>
@@ -5192,9 +3793,17 @@
           <a:p>
             <a:r>
               <a:rPr sz="800">
-                <a:hlinkClick r:id="rId19"/>
+                <a:hlinkClick r:id="rId20"/>
               </a:rPr>
               <a:t>Lofar 2</a:t>
+            </a:r>
+          </a:p>
+          <a:p>
+            <a:r>
+              <a:rPr sz="800">
+                <a:hlinkClick r:id="rId21"/>
+              </a:rPr>
+              <a:t>Lofar 3</a:t>
             </a:r>
           </a:p>
         </p:txBody>
@@ -5204,7 +3813,7 @@
           <p:cNvPr id="15" name="Rounded Rectangle 14"/>
           <p:cNvSpPr/>
           <p:nvPr>
-            <a:hlinkClick r:id="rId20"/>
+            <a:hlinkClick r:id="rId22"/>
           </p:nvPr>
         </p:nvSpPr>
         <p:spPr>
@@ -5249,7 +3858,7 @@
                   <a:srgbClr val="1F3A5F"/>
                 </a:solidFill>
               </a:rPr>
-              <a:t>Gram 27: FR Excelsior, Category 1, Romulus</a:t>
+              <a:t>Gram 8: FR Devastator, Category 3, Yavin</a:t>
             </a:r>
           </a:p>
         </p:txBody>
@@ -5278,33 +3887,9 @@
           <a:p>
             <a:r>
               <a:rPr sz="800">
-                <a:hlinkClick r:id="rId21"/>
+                <a:hlinkClick r:id="rId23"/>
               </a:rPr>
               <a:t>Lofar 1</a:t>
-            </a:r>
-          </a:p>
-          <a:p>
-            <a:r>
-              <a:rPr sz="800">
-                <a:hlinkClick r:id="rId22"/>
-              </a:rPr>
-              <a:t>Lofar 2</a:t>
-            </a:r>
-          </a:p>
-          <a:p>
-            <a:r>
-              <a:rPr sz="800">
-                <a:hlinkClick r:id="rId23"/>
-              </a:rPr>
-              <a:t>Lofar 3</a:t>
-            </a:r>
-          </a:p>
-          <a:p>
-            <a:r>
-              <a:rPr sz="800">
-                <a:hlinkClick r:id="rId24"/>
-              </a:rPr>
-              <a:t>Lofar 4</a:t>
             </a:r>
           </a:p>
         </p:txBody>
@@ -5314,7 +3899,7 @@
           <p:cNvPr id="17" name="Rounded Rectangle 16"/>
           <p:cNvSpPr/>
           <p:nvPr>
-            <a:hlinkClick r:id="rId25"/>
+            <a:hlinkClick r:id="rId24"/>
           </p:nvPr>
         </p:nvSpPr>
         <p:spPr>
@@ -5359,7 +3944,7 @@
                   <a:srgbClr val="1F3A5F"/>
                 </a:solidFill>
               </a:rPr>
-              <a:t>Gram 28: FR Devastator, Category 4, Risa</a:t>
+              <a:t>Gram 11: FR Enterprise, Category 2, Mustafar</a:t>
             </a:r>
           </a:p>
         </p:txBody>
@@ -5388,33 +3973,9 @@
           <a:p>
             <a:r>
               <a:rPr sz="800">
-                <a:hlinkClick r:id="rId26"/>
+                <a:hlinkClick r:id="rId25"/>
               </a:rPr>
               <a:t>Lofar 1</a:t>
-            </a:r>
-          </a:p>
-          <a:p>
-            <a:r>
-              <a:rPr sz="800">
-                <a:hlinkClick r:id="rId27"/>
-              </a:rPr>
-              <a:t>Lofar 2</a:t>
-            </a:r>
-          </a:p>
-          <a:p>
-            <a:r>
-              <a:rPr sz="800">
-                <a:hlinkClick r:id="rId28"/>
-              </a:rPr>
-              <a:t>Lofar 3</a:t>
-            </a:r>
-          </a:p>
-          <a:p>
-            <a:r>
-              <a:rPr sz="800">
-                <a:hlinkClick r:id="rId29"/>
-              </a:rPr>
-              <a:t>Lofar 4</a:t>
             </a:r>
           </a:p>
         </p:txBody>
@@ -5424,7 +3985,7 @@
           <p:cNvPr id="19" name="Rounded Rectangle 18"/>
           <p:cNvSpPr/>
           <p:nvPr>
-            <a:hlinkClick r:id="rId30"/>
+            <a:hlinkClick r:id="rId26"/>
           </p:nvPr>
         </p:nvSpPr>
         <p:spPr>
@@ -5469,7 +4030,7 @@
                   <a:srgbClr val="1F3A5F"/>
                 </a:solidFill>
               </a:rPr>
-              <a:t>Gram 29: Prometheus contact bearing 178, codename Trill</a:t>
+              <a:t>Gram 12: FR Slave I, Category 4, Naboo</a:t>
             </a:r>
           </a:p>
         </p:txBody>
@@ -5498,25 +4059,9 @@
           <a:p>
             <a:r>
               <a:rPr sz="800">
-                <a:hlinkClick r:id="rId31"/>
+                <a:hlinkClick r:id="rId27"/>
               </a:rPr>
               <a:t>Lofar 1</a:t>
-            </a:r>
-          </a:p>
-          <a:p>
-            <a:r>
-              <a:rPr sz="800">
-                <a:hlinkClick r:id="rId32"/>
-              </a:rPr>
-              <a:t>Lofar 2</a:t>
-            </a:r>
-          </a:p>
-          <a:p>
-            <a:r>
-              <a:rPr sz="800">
-                <a:hlinkClick r:id="rId33"/>
-              </a:rPr>
-              <a:t>Lofar 3</a:t>
             </a:r>
           </a:p>
         </p:txBody>
@@ -5526,7 +4071,7 @@
           <p:cNvPr id="21" name="Rounded Rectangle 20"/>
           <p:cNvSpPr/>
           <p:nvPr>
-            <a:hlinkClick r:id="rId34"/>
+            <a:hlinkClick r:id="rId28"/>
           </p:nvPr>
         </p:nvSpPr>
         <p:spPr>
@@ -5571,7 +4116,7 @@
                   <a:srgbClr val="1F3A5F"/>
                 </a:solidFill>
               </a:rPr>
-              <a:t>Gram 30: FR Ghost, Category 2, Risa</a:t>
+              <a:t>Gram 13: Slave I contact bearing 010, codename Naboo</a:t>
             </a:r>
           </a:p>
         </p:txBody>
@@ -5600,9 +4145,17 @@
           <a:p>
             <a:r>
               <a:rPr sz="800">
-                <a:hlinkClick r:id="rId35"/>
+                <a:hlinkClick r:id="rId29"/>
               </a:rPr>
               <a:t>Lofar 1</a:t>
+            </a:r>
+          </a:p>
+          <a:p>
+            <a:r>
+              <a:rPr sz="800">
+                <a:hlinkClick r:id="rId30"/>
+              </a:rPr>
+              <a:t>Lofar 2</a:t>
             </a:r>
           </a:p>
         </p:txBody>
@@ -5612,7 +4165,7 @@
           <p:cNvPr id="23" name="Rounded Rectangle 22"/>
           <p:cNvSpPr/>
           <p:nvPr>
-            <a:hlinkClick r:id="rId36"/>
+            <a:hlinkClick r:id="rId31"/>
           </p:nvPr>
         </p:nvSpPr>
         <p:spPr>
@@ -5657,7 +4210,7 @@
                   <a:srgbClr val="1F3A5F"/>
                 </a:solidFill>
               </a:rPr>
-              <a:t>Gram 32: FR Defiant, Category 4, Kobol</a:t>
+              <a:t>Gram 14: FR Galaxy-class, Category 2, Risa</a:t>
             </a:r>
           </a:p>
         </p:txBody>
@@ -5686,7 +4239,7 @@
           <a:p>
             <a:r>
               <a:rPr sz="800">
-                <a:hlinkClick r:id="rId37"/>
+                <a:hlinkClick r:id="rId32"/>
               </a:rPr>
               <a:t>Lofar 1</a:t>
             </a:r>
@@ -5698,7 +4251,7 @@
           <p:cNvPr id="25" name="Rounded Rectangle 24"/>
           <p:cNvSpPr/>
           <p:nvPr>
-            <a:hlinkClick r:id="rId38"/>
+            <a:hlinkClick r:id="rId33"/>
           </p:nvPr>
         </p:nvSpPr>
         <p:spPr>
@@ -5743,7 +4296,7 @@
                   <a:srgbClr val="1F3A5F"/>
                 </a:solidFill>
               </a:rPr>
-              <a:t>Gram 33: FR Ghost, Category 4, Risa</a:t>
+              <a:t>Gram 15: FR Y-wing, Category 4, Vulcan</a:t>
             </a:r>
           </a:p>
         </p:txBody>
@@ -5772,7 +4325,7 @@
           <a:p>
             <a:r>
               <a:rPr sz="800">
-                <a:hlinkClick r:id="rId39"/>
+                <a:hlinkClick r:id="rId34"/>
               </a:rPr>
               <a:t>Lofar 1</a:t>
             </a:r>
@@ -5780,7 +4333,7 @@
           <a:p>
             <a:r>
               <a:rPr sz="800">
-                <a:hlinkClick r:id="rId40"/>
+                <a:hlinkClick r:id="rId35"/>
               </a:rPr>
               <a:t>Lofar 2</a:t>
             </a:r>
@@ -5788,7 +4341,7 @@
           <a:p>
             <a:r>
               <a:rPr sz="800">
-                <a:hlinkClick r:id="rId41"/>
+                <a:hlinkClick r:id="rId36"/>
               </a:rPr>
               <a:t>Lofar 3</a:t>
             </a:r>
@@ -5796,7 +4349,7 @@
           <a:p>
             <a:r>
               <a:rPr sz="800">
-                <a:hlinkClick r:id="rId42"/>
+                <a:hlinkClick r:id="rId37"/>
               </a:rPr>
               <a:t>Lofar 4</a:t>
             </a:r>
@@ -5808,7 +4361,7 @@
           <p:cNvPr id="27" name="Rounded Rectangle 26"/>
           <p:cNvSpPr/>
           <p:nvPr>
-            <a:hlinkClick r:id="rId43"/>
+            <a:hlinkClick r:id="rId38"/>
           </p:nvPr>
         </p:nvSpPr>
         <p:spPr>
@@ -5853,7 +4406,7 @@
                   <a:srgbClr val="1F3A5F"/>
                 </a:solidFill>
               </a:rPr>
-              <a:t>Gram 34: FR Reliant, Category 3, Risa</a:t>
+              <a:t>Gram 16: FR Tantive IV, Category 2, Dagobah</a:t>
             </a:r>
           </a:p>
         </p:txBody>
@@ -5882,7 +4435,7 @@
           <a:p>
             <a:r>
               <a:rPr sz="800">
-                <a:hlinkClick r:id="rId44"/>
+                <a:hlinkClick r:id="rId39"/>
               </a:rPr>
               <a:t>Lofar 1</a:t>
             </a:r>
@@ -5890,7 +4443,7 @@
           <a:p>
             <a:r>
               <a:rPr sz="800">
-                <a:hlinkClick r:id="rId45"/>
+                <a:hlinkClick r:id="rId40"/>
               </a:rPr>
               <a:t>Lofar 2</a:t>
             </a:r>
@@ -5898,17 +4451,9 @@
           <a:p>
             <a:r>
               <a:rPr sz="800">
-                <a:hlinkClick r:id="rId46"/>
+                <a:hlinkClick r:id="rId41"/>
               </a:rPr>
               <a:t>Lofar 3</a:t>
-            </a:r>
-          </a:p>
-          <a:p>
-            <a:r>
-              <a:rPr sz="800">
-                <a:hlinkClick r:id="rId47"/>
-              </a:rPr>
-              <a:t>Lofar 4</a:t>
             </a:r>
           </a:p>
         </p:txBody>
@@ -5918,7 +4463,7 @@
           <p:cNvPr id="29" name="Rounded Rectangle 28"/>
           <p:cNvSpPr/>
           <p:nvPr>
-            <a:hlinkClick r:id="rId48"/>
+            <a:hlinkClick r:id="rId42"/>
           </p:nvPr>
         </p:nvSpPr>
         <p:spPr>
@@ -5963,7 +4508,7 @@
                   <a:srgbClr val="1F3A5F"/>
                 </a:solidFill>
               </a:rPr>
-              <a:t>Gram 35: FR Slave I, Category 3, Dagobah</a:t>
+              <a:t>Gram 17: FR Prometheus, Category 3, Hoth</a:t>
             </a:r>
           </a:p>
         </p:txBody>
@@ -5992,9 +4537,17 @@
           <a:p>
             <a:r>
               <a:rPr sz="800">
-                <a:hlinkClick r:id="rId49"/>
+                <a:hlinkClick r:id="rId43"/>
               </a:rPr>
               <a:t>Lofar 1</a:t>
+            </a:r>
+          </a:p>
+          <a:p>
+            <a:r>
+              <a:rPr sz="800">
+                <a:hlinkClick r:id="rId44"/>
+              </a:rPr>
+              <a:t>Lofar 2</a:t>
             </a:r>
           </a:p>
         </p:txBody>
@@ -6004,7 +4557,7 @@
           <p:cNvPr id="31" name="Rounded Rectangle 30"/>
           <p:cNvSpPr/>
           <p:nvPr>
-            <a:hlinkClick r:id="rId50"/>
+            <a:hlinkClick r:id="rId45"/>
           </p:nvPr>
         </p:nvSpPr>
         <p:spPr>
@@ -6049,7 +4602,7 @@
                   <a:srgbClr val="1F3A5F"/>
                 </a:solidFill>
               </a:rPr>
-              <a:t>Gram 36: FR Equinox, Category 2, Gandalf</a:t>
+              <a:t>Gram 18: FR A-wing, Category 2, Hoth</a:t>
             </a:r>
           </a:p>
         </p:txBody>
@@ -6078,6 +4631,1541 @@
           <a:p>
             <a:r>
               <a:rPr sz="800">
+                <a:hlinkClick r:id="rId46"/>
+              </a:rPr>
+              <a:t>Lofar 1</a:t>
+            </a:r>
+          </a:p>
+          <a:p>
+            <a:r>
+              <a:rPr sz="800">
+                <a:hlinkClick r:id="rId47"/>
+              </a:rPr>
+              <a:t>Lofar 2</a:t>
+            </a:r>
+          </a:p>
+          <a:p>
+            <a:r>
+              <a:rPr sz="800">
+                <a:hlinkClick r:id="rId48"/>
+              </a:rPr>
+              <a:t>Lofar 3</a:t>
+            </a:r>
+          </a:p>
+        </p:txBody>
+      </p:sp>
+    </p:spTree>
+  </p:cSld>
+  <p:clrMapOvr>
+    <a:masterClrMapping/>
+  </p:clrMapOvr>
+</p:sld>
+</file>
+
+<file path=ppt/slides/slide3.xml><?xml version="1.0" encoding="utf-8"?>
+<p:sld xmlns:a="http://schemas.openxmlformats.org/drawingml/2006/main" xmlns:p="http://schemas.openxmlformats.org/presentationml/2006/main" xmlns:r="http://schemas.openxmlformats.org/officeDocument/2006/relationships">
+  <p:cSld>
+    <p:spTree>
+      <p:nvGrpSpPr>
+        <p:cNvPr id="1" name=""/>
+        <p:cNvGrpSpPr/>
+        <p:nvPr/>
+      </p:nvGrpSpPr>
+      <p:grpSpPr/>
+      <p:sp>
+        <p:nvSpPr>
+          <p:cNvPr id="2" name="Rectangle 1"/>
+          <p:cNvSpPr/>
+          <p:nvPr/>
+        </p:nvSpPr>
+        <p:spPr>
+          <a:xfrm>
+            <a:off x="0" y="0"/>
+            <a:ext cx="12188952" cy="548640"/>
+          </a:xfrm>
+          <a:prstGeom prst="rect">
+            <a:avLst/>
+          </a:prstGeom>
+          <a:solidFill>
+            <a:srgbClr val="1F3A5F"/>
+          </a:solidFill>
+          <a:ln>
+            <a:noFill/>
+          </a:ln>
+        </p:spPr>
+        <p:style>
+          <a:lnRef idx="1">
+            <a:schemeClr val="accent1"/>
+          </a:lnRef>
+          <a:fillRef idx="3">
+            <a:schemeClr val="accent1"/>
+          </a:fillRef>
+          <a:effectRef idx="2">
+            <a:schemeClr val="accent1"/>
+          </a:effectRef>
+          <a:fontRef idx="minor">
+            <a:schemeClr val="lt1"/>
+          </a:fontRef>
+        </p:style>
+        <p:txBody>
+          <a:bodyPr rtlCol="0" anchor="ctr" lIns="182880" rIns="182880"/>
+          <a:lstStyle/>
+          <a:p>
+            <a:pPr algn="ctr"/>
+            <a:r>
+              <a:rPr sz="2000" b="1">
+                <a:solidFill>
+                  <a:srgbClr val="FFFFFF"/>
+                </a:solidFill>
+              </a:rPr>
+              <a:t>Instructor Progress Test 4 Grams — Page 2 of 2</a:t>
+            </a:r>
+          </a:p>
+        </p:txBody>
+      </p:sp>
+      <p:sp>
+        <p:nvSpPr>
+          <p:cNvPr id="3" name="Rounded Rectangle 2"/>
+          <p:cNvSpPr/>
+          <p:nvPr>
+            <a:hlinkClick r:id="rId2"/>
+          </p:nvPr>
+        </p:nvSpPr>
+        <p:spPr>
+          <a:xfrm>
+            <a:off x="365760" y="731520"/>
+            <a:ext cx="2200046" cy="365760"/>
+          </a:xfrm>
+          <a:prstGeom prst="roundRect">
+            <a:avLst/>
+          </a:prstGeom>
+          <a:solidFill>
+            <a:srgbClr val="E8EEF7"/>
+          </a:solidFill>
+          <a:ln>
+            <a:solidFill>
+              <a:srgbClr val="1F3A5F"/>
+            </a:solidFill>
+          </a:ln>
+        </p:spPr>
+        <p:style>
+          <a:lnRef idx="1">
+            <a:schemeClr val="accent1"/>
+          </a:lnRef>
+          <a:fillRef idx="3">
+            <a:schemeClr val="accent1"/>
+          </a:fillRef>
+          <a:effectRef idx="2">
+            <a:schemeClr val="accent1"/>
+          </a:effectRef>
+          <a:fontRef idx="minor">
+            <a:schemeClr val="lt1"/>
+          </a:fontRef>
+        </p:style>
+        <p:txBody>
+          <a:bodyPr rtlCol="0" anchor="ctr" lIns="45720" rIns="45720"/>
+          <a:lstStyle/>
+          <a:p>
+            <a:pPr algn="ctr"/>
+            <a:r>
+              <a:rPr sz="900">
+                <a:solidFill>
+                  <a:srgbClr val="1F3A5F"/>
+                </a:solidFill>
+              </a:rPr>
+              <a:t>Gram 19: Acclamator-class contact bearing 019, codename Defiant</a:t>
+            </a:r>
+          </a:p>
+        </p:txBody>
+      </p:sp>
+      <p:sp>
+        <p:nvSpPr>
+          <p:cNvPr id="4" name="TextBox 3"/>
+          <p:cNvSpPr txBox="1"/>
+          <p:nvPr/>
+        </p:nvSpPr>
+        <p:spPr>
+          <a:xfrm>
+            <a:off x="365760" y="1115568"/>
+            <a:ext cx="2200046" cy="1447800"/>
+          </a:xfrm>
+          <a:prstGeom prst="rect">
+            <a:avLst/>
+          </a:prstGeom>
+          <a:noFill/>
+        </p:spPr>
+        <p:txBody>
+          <a:bodyPr wrap="square">
+            <a:spAutoFit/>
+          </a:bodyPr>
+          <a:lstStyle/>
+          <a:p>
+            <a:r>
+              <a:rPr sz="800">
+                <a:hlinkClick r:id="rId3"/>
+              </a:rPr>
+              <a:t>Lofar 1</a:t>
+            </a:r>
+          </a:p>
+          <a:p>
+            <a:r>
+              <a:rPr sz="800">
+                <a:hlinkClick r:id="rId4"/>
+              </a:rPr>
+              <a:t>Lofar 2</a:t>
+            </a:r>
+          </a:p>
+          <a:p>
+            <a:r>
+              <a:rPr sz="800">
+                <a:hlinkClick r:id="rId5"/>
+              </a:rPr>
+              <a:t>Lofar 3</a:t>
+            </a:r>
+          </a:p>
+        </p:txBody>
+      </p:sp>
+      <p:sp>
+        <p:nvSpPr>
+          <p:cNvPr id="5" name="Rounded Rectangle 4"/>
+          <p:cNvSpPr/>
+          <p:nvPr>
+            <a:hlinkClick r:id="rId6"/>
+          </p:nvPr>
+        </p:nvSpPr>
+        <p:spPr>
+          <a:xfrm>
+            <a:off x="2657246" y="731520"/>
+            <a:ext cx="2200046" cy="365760"/>
+          </a:xfrm>
+          <a:prstGeom prst="roundRect">
+            <a:avLst/>
+          </a:prstGeom>
+          <a:solidFill>
+            <a:srgbClr val="E8EEF7"/>
+          </a:solidFill>
+          <a:ln>
+            <a:solidFill>
+              <a:srgbClr val="1F3A5F"/>
+            </a:solidFill>
+          </a:ln>
+        </p:spPr>
+        <p:style>
+          <a:lnRef idx="1">
+            <a:schemeClr val="accent1"/>
+          </a:lnRef>
+          <a:fillRef idx="3">
+            <a:schemeClr val="accent1"/>
+          </a:fillRef>
+          <a:effectRef idx="2">
+            <a:schemeClr val="accent1"/>
+          </a:effectRef>
+          <a:fontRef idx="minor">
+            <a:schemeClr val="lt1"/>
+          </a:fontRef>
+        </p:style>
+        <p:txBody>
+          <a:bodyPr rtlCol="0" anchor="ctr" lIns="45720" rIns="45720"/>
+          <a:lstStyle/>
+          <a:p>
+            <a:pPr algn="ctr"/>
+            <a:r>
+              <a:rPr sz="900">
+                <a:solidFill>
+                  <a:srgbClr val="1F3A5F"/>
+                </a:solidFill>
+              </a:rPr>
+              <a:t>Gram 21: Akira-class contact bearing 296, codename Bespin</a:t>
+            </a:r>
+          </a:p>
+        </p:txBody>
+      </p:sp>
+      <p:sp>
+        <p:nvSpPr>
+          <p:cNvPr id="6" name="TextBox 5"/>
+          <p:cNvSpPr txBox="1"/>
+          <p:nvPr/>
+        </p:nvSpPr>
+        <p:spPr>
+          <a:xfrm>
+            <a:off x="2657246" y="1115568"/>
+            <a:ext cx="2200046" cy="1447800"/>
+          </a:xfrm>
+          <a:prstGeom prst="rect">
+            <a:avLst/>
+          </a:prstGeom>
+          <a:noFill/>
+        </p:spPr>
+        <p:txBody>
+          <a:bodyPr wrap="square">
+            <a:spAutoFit/>
+          </a:bodyPr>
+          <a:lstStyle/>
+          <a:p>
+            <a:r>
+              <a:rPr sz="800">
+                <a:hlinkClick r:id="rId7"/>
+              </a:rPr>
+              <a:t>Lofar 1</a:t>
+            </a:r>
+          </a:p>
+        </p:txBody>
+      </p:sp>
+      <p:sp>
+        <p:nvSpPr>
+          <p:cNvPr id="7" name="Rounded Rectangle 6"/>
+          <p:cNvSpPr/>
+          <p:nvPr>
+            <a:hlinkClick r:id="rId8"/>
+          </p:nvPr>
+        </p:nvSpPr>
+        <p:spPr>
+          <a:xfrm>
+            <a:off x="4948732" y="731520"/>
+            <a:ext cx="2200046" cy="365760"/>
+          </a:xfrm>
+          <a:prstGeom prst="roundRect">
+            <a:avLst/>
+          </a:prstGeom>
+          <a:solidFill>
+            <a:srgbClr val="E8EEF7"/>
+          </a:solidFill>
+          <a:ln>
+            <a:solidFill>
+              <a:srgbClr val="1F3A5F"/>
+            </a:solidFill>
+          </a:ln>
+        </p:spPr>
+        <p:style>
+          <a:lnRef idx="1">
+            <a:schemeClr val="accent1"/>
+          </a:lnRef>
+          <a:fillRef idx="3">
+            <a:schemeClr val="accent1"/>
+          </a:fillRef>
+          <a:effectRef idx="2">
+            <a:schemeClr val="accent1"/>
+          </a:effectRef>
+          <a:fontRef idx="minor">
+            <a:schemeClr val="lt1"/>
+          </a:fontRef>
+        </p:style>
+        <p:txBody>
+          <a:bodyPr rtlCol="0" anchor="ctr" lIns="45720" rIns="45720"/>
+          <a:lstStyle/>
+          <a:p>
+            <a:pPr algn="ctr"/>
+            <a:r>
+              <a:rPr sz="900">
+                <a:solidFill>
+                  <a:srgbClr val="1F3A5F"/>
+                </a:solidFill>
+              </a:rPr>
+              <a:t>Gram 23: FR Miranda-class, Category 3, Trill</a:t>
+            </a:r>
+          </a:p>
+        </p:txBody>
+      </p:sp>
+      <p:sp>
+        <p:nvSpPr>
+          <p:cNvPr id="8" name="TextBox 7"/>
+          <p:cNvSpPr txBox="1"/>
+          <p:nvPr/>
+        </p:nvSpPr>
+        <p:spPr>
+          <a:xfrm>
+            <a:off x="4948732" y="1115568"/>
+            <a:ext cx="2200046" cy="1447800"/>
+          </a:xfrm>
+          <a:prstGeom prst="rect">
+            <a:avLst/>
+          </a:prstGeom>
+          <a:noFill/>
+        </p:spPr>
+        <p:txBody>
+          <a:bodyPr wrap="square">
+            <a:spAutoFit/>
+          </a:bodyPr>
+          <a:lstStyle/>
+          <a:p>
+            <a:r>
+              <a:rPr sz="800">
+                <a:hlinkClick r:id="rId9"/>
+              </a:rPr>
+              <a:t>Lofar 1</a:t>
+            </a:r>
+          </a:p>
+        </p:txBody>
+      </p:sp>
+      <p:sp>
+        <p:nvSpPr>
+          <p:cNvPr id="9" name="Rounded Rectangle 8"/>
+          <p:cNvSpPr/>
+          <p:nvPr>
+            <a:hlinkClick r:id="rId10"/>
+          </p:nvPr>
+        </p:nvSpPr>
+        <p:spPr>
+          <a:xfrm>
+            <a:off x="7240219" y="731520"/>
+            <a:ext cx="2200046" cy="365760"/>
+          </a:xfrm>
+          <a:prstGeom prst="roundRect">
+            <a:avLst/>
+          </a:prstGeom>
+          <a:solidFill>
+            <a:srgbClr val="E8EEF7"/>
+          </a:solidFill>
+          <a:ln>
+            <a:solidFill>
+              <a:srgbClr val="1F3A5F"/>
+            </a:solidFill>
+          </a:ln>
+        </p:spPr>
+        <p:style>
+          <a:lnRef idx="1">
+            <a:schemeClr val="accent1"/>
+          </a:lnRef>
+          <a:fillRef idx="3">
+            <a:schemeClr val="accent1"/>
+          </a:fillRef>
+          <a:effectRef idx="2">
+            <a:schemeClr val="accent1"/>
+          </a:effectRef>
+          <a:fontRef idx="minor">
+            <a:schemeClr val="lt1"/>
+          </a:fontRef>
+        </p:style>
+        <p:txBody>
+          <a:bodyPr rtlCol="0" anchor="ctr" lIns="45720" rIns="45720"/>
+          <a:lstStyle/>
+          <a:p>
+            <a:pPr algn="ctr"/>
+            <a:r>
+              <a:rPr sz="900">
+                <a:solidFill>
+                  <a:srgbClr val="1F3A5F"/>
+                </a:solidFill>
+              </a:rPr>
+              <a:t>Gram 24: FR Nebula-class, Category 4, Coruscant</a:t>
+            </a:r>
+          </a:p>
+        </p:txBody>
+      </p:sp>
+      <p:sp>
+        <p:nvSpPr>
+          <p:cNvPr id="10" name="TextBox 9"/>
+          <p:cNvSpPr txBox="1"/>
+          <p:nvPr/>
+        </p:nvSpPr>
+        <p:spPr>
+          <a:xfrm>
+            <a:off x="7240219" y="1115568"/>
+            <a:ext cx="2200046" cy="1447800"/>
+          </a:xfrm>
+          <a:prstGeom prst="rect">
+            <a:avLst/>
+          </a:prstGeom>
+          <a:noFill/>
+        </p:spPr>
+        <p:txBody>
+          <a:bodyPr wrap="square">
+            <a:spAutoFit/>
+          </a:bodyPr>
+          <a:lstStyle/>
+          <a:p>
+            <a:r>
+              <a:rPr sz="800">
+                <a:hlinkClick r:id="rId11"/>
+              </a:rPr>
+              <a:t>Lofar 1</a:t>
+            </a:r>
+          </a:p>
+          <a:p>
+            <a:r>
+              <a:rPr sz="800">
+                <a:hlinkClick r:id="rId12"/>
+              </a:rPr>
+              <a:t>Lofar 2</a:t>
+            </a:r>
+          </a:p>
+          <a:p>
+            <a:r>
+              <a:rPr sz="800">
+                <a:hlinkClick r:id="rId13"/>
+              </a:rPr>
+              <a:t>Lofar 3</a:t>
+            </a:r>
+          </a:p>
+        </p:txBody>
+      </p:sp>
+      <p:sp>
+        <p:nvSpPr>
+          <p:cNvPr id="11" name="Rounded Rectangle 10"/>
+          <p:cNvSpPr/>
+          <p:nvPr>
+            <a:hlinkClick r:id="rId14"/>
+          </p:nvPr>
+        </p:nvSpPr>
+        <p:spPr>
+          <a:xfrm>
+            <a:off x="9531705" y="731520"/>
+            <a:ext cx="2200046" cy="365760"/>
+          </a:xfrm>
+          <a:prstGeom prst="roundRect">
+            <a:avLst/>
+          </a:prstGeom>
+          <a:solidFill>
+            <a:srgbClr val="E8EEF7"/>
+          </a:solidFill>
+          <a:ln>
+            <a:solidFill>
+              <a:srgbClr val="1F3A5F"/>
+            </a:solidFill>
+          </a:ln>
+        </p:spPr>
+        <p:style>
+          <a:lnRef idx="1">
+            <a:schemeClr val="accent1"/>
+          </a:lnRef>
+          <a:fillRef idx="3">
+            <a:schemeClr val="accent1"/>
+          </a:fillRef>
+          <a:effectRef idx="2">
+            <a:schemeClr val="accent1"/>
+          </a:effectRef>
+          <a:fontRef idx="minor">
+            <a:schemeClr val="lt1"/>
+          </a:fontRef>
+        </p:style>
+        <p:txBody>
+          <a:bodyPr rtlCol="0" anchor="ctr" lIns="45720" rIns="45720"/>
+          <a:lstStyle/>
+          <a:p>
+            <a:pPr algn="ctr"/>
+            <a:r>
+              <a:rPr sz="900">
+                <a:solidFill>
+                  <a:srgbClr val="1F3A5F"/>
+                </a:solidFill>
+              </a:rPr>
+              <a:t>Gram 25: FR Mon Calamari Cruiser, Category 1, Bespin</a:t>
+            </a:r>
+          </a:p>
+        </p:txBody>
+      </p:sp>
+      <p:sp>
+        <p:nvSpPr>
+          <p:cNvPr id="12" name="TextBox 11"/>
+          <p:cNvSpPr txBox="1"/>
+          <p:nvPr/>
+        </p:nvSpPr>
+        <p:spPr>
+          <a:xfrm>
+            <a:off x="9531705" y="1115568"/>
+            <a:ext cx="2200046" cy="1447800"/>
+          </a:xfrm>
+          <a:prstGeom prst="rect">
+            <a:avLst/>
+          </a:prstGeom>
+          <a:noFill/>
+        </p:spPr>
+        <p:txBody>
+          <a:bodyPr wrap="square">
+            <a:spAutoFit/>
+          </a:bodyPr>
+          <a:lstStyle/>
+          <a:p>
+            <a:r>
+              <a:rPr sz="800">
+                <a:hlinkClick r:id="rId15"/>
+              </a:rPr>
+              <a:t>Lofar 1</a:t>
+            </a:r>
+          </a:p>
+          <a:p>
+            <a:r>
+              <a:rPr sz="800">
+                <a:hlinkClick r:id="rId16"/>
+              </a:rPr>
+              <a:t>Lofar 2</a:t>
+            </a:r>
+          </a:p>
+        </p:txBody>
+      </p:sp>
+      <p:sp>
+        <p:nvSpPr>
+          <p:cNvPr id="13" name="Rounded Rectangle 12"/>
+          <p:cNvSpPr/>
+          <p:nvPr>
+            <a:hlinkClick r:id="rId17"/>
+          </p:nvPr>
+        </p:nvSpPr>
+        <p:spPr>
+          <a:xfrm>
+            <a:off x="365760" y="2682240"/>
+            <a:ext cx="2200046" cy="365760"/>
+          </a:xfrm>
+          <a:prstGeom prst="roundRect">
+            <a:avLst/>
+          </a:prstGeom>
+          <a:solidFill>
+            <a:srgbClr val="E8EEF7"/>
+          </a:solidFill>
+          <a:ln>
+            <a:solidFill>
+              <a:srgbClr val="1F3A5F"/>
+            </a:solidFill>
+          </a:ln>
+        </p:spPr>
+        <p:style>
+          <a:lnRef idx="1">
+            <a:schemeClr val="accent1"/>
+          </a:lnRef>
+          <a:fillRef idx="3">
+            <a:schemeClr val="accent1"/>
+          </a:fillRef>
+          <a:effectRef idx="2">
+            <a:schemeClr val="accent1"/>
+          </a:effectRef>
+          <a:fontRef idx="minor">
+            <a:schemeClr val="lt1"/>
+          </a:fontRef>
+        </p:style>
+        <p:txBody>
+          <a:bodyPr rtlCol="0" anchor="ctr" lIns="45720" rIns="45720"/>
+          <a:lstStyle/>
+          <a:p>
+            <a:pPr algn="ctr"/>
+            <a:r>
+              <a:rPr sz="900">
+                <a:solidFill>
+                  <a:srgbClr val="1F3A5F"/>
+                </a:solidFill>
+              </a:rPr>
+              <a:t>Gram 26: FR Enterprise, Category 3, Betazed</a:t>
+            </a:r>
+          </a:p>
+        </p:txBody>
+      </p:sp>
+      <p:sp>
+        <p:nvSpPr>
+          <p:cNvPr id="14" name="TextBox 13"/>
+          <p:cNvSpPr txBox="1"/>
+          <p:nvPr/>
+        </p:nvSpPr>
+        <p:spPr>
+          <a:xfrm>
+            <a:off x="365760" y="3066288"/>
+            <a:ext cx="2200046" cy="1447800"/>
+          </a:xfrm>
+          <a:prstGeom prst="rect">
+            <a:avLst/>
+          </a:prstGeom>
+          <a:noFill/>
+        </p:spPr>
+        <p:txBody>
+          <a:bodyPr wrap="square">
+            <a:spAutoFit/>
+          </a:bodyPr>
+          <a:lstStyle/>
+          <a:p>
+            <a:r>
+              <a:rPr sz="800">
+                <a:hlinkClick r:id="rId18"/>
+              </a:rPr>
+              <a:t>Lofar 1</a:t>
+            </a:r>
+          </a:p>
+          <a:p>
+            <a:r>
+              <a:rPr sz="800">
+                <a:hlinkClick r:id="rId19"/>
+              </a:rPr>
+              <a:t>Lofar 2</a:t>
+            </a:r>
+          </a:p>
+        </p:txBody>
+      </p:sp>
+      <p:sp>
+        <p:nvSpPr>
+          <p:cNvPr id="15" name="Rounded Rectangle 14"/>
+          <p:cNvSpPr/>
+          <p:nvPr>
+            <a:hlinkClick r:id="rId20"/>
+          </p:nvPr>
+        </p:nvSpPr>
+        <p:spPr>
+          <a:xfrm>
+            <a:off x="2657246" y="2682240"/>
+            <a:ext cx="2200046" cy="365760"/>
+          </a:xfrm>
+          <a:prstGeom prst="roundRect">
+            <a:avLst/>
+          </a:prstGeom>
+          <a:solidFill>
+            <a:srgbClr val="E8EEF7"/>
+          </a:solidFill>
+          <a:ln>
+            <a:solidFill>
+              <a:srgbClr val="1F3A5F"/>
+            </a:solidFill>
+          </a:ln>
+        </p:spPr>
+        <p:style>
+          <a:lnRef idx="1">
+            <a:schemeClr val="accent1"/>
+          </a:lnRef>
+          <a:fillRef idx="3">
+            <a:schemeClr val="accent1"/>
+          </a:fillRef>
+          <a:effectRef idx="2">
+            <a:schemeClr val="accent1"/>
+          </a:effectRef>
+          <a:fontRef idx="minor">
+            <a:schemeClr val="lt1"/>
+          </a:fontRef>
+        </p:style>
+        <p:txBody>
+          <a:bodyPr rtlCol="0" anchor="ctr" lIns="45720" rIns="45720"/>
+          <a:lstStyle/>
+          <a:p>
+            <a:pPr algn="ctr"/>
+            <a:r>
+              <a:rPr sz="900">
+                <a:solidFill>
+                  <a:srgbClr val="1F3A5F"/>
+                </a:solidFill>
+              </a:rPr>
+              <a:t>Gram 27: FR Excelsior, Category 1, Romulus</a:t>
+            </a:r>
+          </a:p>
+        </p:txBody>
+      </p:sp>
+      <p:sp>
+        <p:nvSpPr>
+          <p:cNvPr id="16" name="TextBox 15"/>
+          <p:cNvSpPr txBox="1"/>
+          <p:nvPr/>
+        </p:nvSpPr>
+        <p:spPr>
+          <a:xfrm>
+            <a:off x="2657246" y="3066288"/>
+            <a:ext cx="2200046" cy="1447800"/>
+          </a:xfrm>
+          <a:prstGeom prst="rect">
+            <a:avLst/>
+          </a:prstGeom>
+          <a:noFill/>
+        </p:spPr>
+        <p:txBody>
+          <a:bodyPr wrap="square">
+            <a:spAutoFit/>
+          </a:bodyPr>
+          <a:lstStyle/>
+          <a:p>
+            <a:r>
+              <a:rPr sz="800">
+                <a:hlinkClick r:id="rId21"/>
+              </a:rPr>
+              <a:t>Lofar 1</a:t>
+            </a:r>
+          </a:p>
+          <a:p>
+            <a:r>
+              <a:rPr sz="800">
+                <a:hlinkClick r:id="rId22"/>
+              </a:rPr>
+              <a:t>Lofar 2</a:t>
+            </a:r>
+          </a:p>
+          <a:p>
+            <a:r>
+              <a:rPr sz="800">
+                <a:hlinkClick r:id="rId23"/>
+              </a:rPr>
+              <a:t>Lofar 3</a:t>
+            </a:r>
+          </a:p>
+          <a:p>
+            <a:r>
+              <a:rPr sz="800">
+                <a:hlinkClick r:id="rId24"/>
+              </a:rPr>
+              <a:t>Lofar 4</a:t>
+            </a:r>
+          </a:p>
+        </p:txBody>
+      </p:sp>
+      <p:sp>
+        <p:nvSpPr>
+          <p:cNvPr id="17" name="Rounded Rectangle 16"/>
+          <p:cNvSpPr/>
+          <p:nvPr>
+            <a:hlinkClick r:id="rId25"/>
+          </p:nvPr>
+        </p:nvSpPr>
+        <p:spPr>
+          <a:xfrm>
+            <a:off x="4948732" y="2682240"/>
+            <a:ext cx="2200046" cy="365760"/>
+          </a:xfrm>
+          <a:prstGeom prst="roundRect">
+            <a:avLst/>
+          </a:prstGeom>
+          <a:solidFill>
+            <a:srgbClr val="E8EEF7"/>
+          </a:solidFill>
+          <a:ln>
+            <a:solidFill>
+              <a:srgbClr val="1F3A5F"/>
+            </a:solidFill>
+          </a:ln>
+        </p:spPr>
+        <p:style>
+          <a:lnRef idx="1">
+            <a:schemeClr val="accent1"/>
+          </a:lnRef>
+          <a:fillRef idx="3">
+            <a:schemeClr val="accent1"/>
+          </a:fillRef>
+          <a:effectRef idx="2">
+            <a:schemeClr val="accent1"/>
+          </a:effectRef>
+          <a:fontRef idx="minor">
+            <a:schemeClr val="lt1"/>
+          </a:fontRef>
+        </p:style>
+        <p:txBody>
+          <a:bodyPr rtlCol="0" anchor="ctr" lIns="45720" rIns="45720"/>
+          <a:lstStyle/>
+          <a:p>
+            <a:pPr algn="ctr"/>
+            <a:r>
+              <a:rPr sz="900">
+                <a:solidFill>
+                  <a:srgbClr val="1F3A5F"/>
+                </a:solidFill>
+              </a:rPr>
+              <a:t>Gram 28: FR Devastator, Category 4, Risa</a:t>
+            </a:r>
+          </a:p>
+        </p:txBody>
+      </p:sp>
+      <p:sp>
+        <p:nvSpPr>
+          <p:cNvPr id="18" name="TextBox 17"/>
+          <p:cNvSpPr txBox="1"/>
+          <p:nvPr/>
+        </p:nvSpPr>
+        <p:spPr>
+          <a:xfrm>
+            <a:off x="4948732" y="3066288"/>
+            <a:ext cx="2200046" cy="1447800"/>
+          </a:xfrm>
+          <a:prstGeom prst="rect">
+            <a:avLst/>
+          </a:prstGeom>
+          <a:noFill/>
+        </p:spPr>
+        <p:txBody>
+          <a:bodyPr wrap="square">
+            <a:spAutoFit/>
+          </a:bodyPr>
+          <a:lstStyle/>
+          <a:p>
+            <a:r>
+              <a:rPr sz="800">
+                <a:hlinkClick r:id="rId26"/>
+              </a:rPr>
+              <a:t>Lofar 1</a:t>
+            </a:r>
+          </a:p>
+          <a:p>
+            <a:r>
+              <a:rPr sz="800">
+                <a:hlinkClick r:id="rId27"/>
+              </a:rPr>
+              <a:t>Lofar 2</a:t>
+            </a:r>
+          </a:p>
+          <a:p>
+            <a:r>
+              <a:rPr sz="800">
+                <a:hlinkClick r:id="rId28"/>
+              </a:rPr>
+              <a:t>Lofar 3</a:t>
+            </a:r>
+          </a:p>
+          <a:p>
+            <a:r>
+              <a:rPr sz="800">
+                <a:hlinkClick r:id="rId29"/>
+              </a:rPr>
+              <a:t>Lofar 4</a:t>
+            </a:r>
+          </a:p>
+        </p:txBody>
+      </p:sp>
+      <p:sp>
+        <p:nvSpPr>
+          <p:cNvPr id="19" name="Rounded Rectangle 18"/>
+          <p:cNvSpPr/>
+          <p:nvPr>
+            <a:hlinkClick r:id="rId30"/>
+          </p:nvPr>
+        </p:nvSpPr>
+        <p:spPr>
+          <a:xfrm>
+            <a:off x="7240219" y="2682240"/>
+            <a:ext cx="2200046" cy="365760"/>
+          </a:xfrm>
+          <a:prstGeom prst="roundRect">
+            <a:avLst/>
+          </a:prstGeom>
+          <a:solidFill>
+            <a:srgbClr val="E8EEF7"/>
+          </a:solidFill>
+          <a:ln>
+            <a:solidFill>
+              <a:srgbClr val="1F3A5F"/>
+            </a:solidFill>
+          </a:ln>
+        </p:spPr>
+        <p:style>
+          <a:lnRef idx="1">
+            <a:schemeClr val="accent1"/>
+          </a:lnRef>
+          <a:fillRef idx="3">
+            <a:schemeClr val="accent1"/>
+          </a:fillRef>
+          <a:effectRef idx="2">
+            <a:schemeClr val="accent1"/>
+          </a:effectRef>
+          <a:fontRef idx="minor">
+            <a:schemeClr val="lt1"/>
+          </a:fontRef>
+        </p:style>
+        <p:txBody>
+          <a:bodyPr rtlCol="0" anchor="ctr" lIns="45720" rIns="45720"/>
+          <a:lstStyle/>
+          <a:p>
+            <a:pPr algn="ctr"/>
+            <a:r>
+              <a:rPr sz="900">
+                <a:solidFill>
+                  <a:srgbClr val="1F3A5F"/>
+                </a:solidFill>
+              </a:rPr>
+              <a:t>Gram 29: Prometheus contact bearing 178, codename Trill</a:t>
+            </a:r>
+          </a:p>
+        </p:txBody>
+      </p:sp>
+      <p:sp>
+        <p:nvSpPr>
+          <p:cNvPr id="20" name="TextBox 19"/>
+          <p:cNvSpPr txBox="1"/>
+          <p:nvPr/>
+        </p:nvSpPr>
+        <p:spPr>
+          <a:xfrm>
+            <a:off x="7240219" y="3066288"/>
+            <a:ext cx="2200046" cy="1447800"/>
+          </a:xfrm>
+          <a:prstGeom prst="rect">
+            <a:avLst/>
+          </a:prstGeom>
+          <a:noFill/>
+        </p:spPr>
+        <p:txBody>
+          <a:bodyPr wrap="square">
+            <a:spAutoFit/>
+          </a:bodyPr>
+          <a:lstStyle/>
+          <a:p>
+            <a:r>
+              <a:rPr sz="800">
+                <a:hlinkClick r:id="rId31"/>
+              </a:rPr>
+              <a:t>Lofar 1</a:t>
+            </a:r>
+          </a:p>
+          <a:p>
+            <a:r>
+              <a:rPr sz="800">
+                <a:hlinkClick r:id="rId32"/>
+              </a:rPr>
+              <a:t>Lofar 2</a:t>
+            </a:r>
+          </a:p>
+          <a:p>
+            <a:r>
+              <a:rPr sz="800">
+                <a:hlinkClick r:id="rId33"/>
+              </a:rPr>
+              <a:t>Lofar 3</a:t>
+            </a:r>
+          </a:p>
+        </p:txBody>
+      </p:sp>
+      <p:sp>
+        <p:nvSpPr>
+          <p:cNvPr id="21" name="Rounded Rectangle 20"/>
+          <p:cNvSpPr/>
+          <p:nvPr>
+            <a:hlinkClick r:id="rId34"/>
+          </p:nvPr>
+        </p:nvSpPr>
+        <p:spPr>
+          <a:xfrm>
+            <a:off x="9531705" y="2682240"/>
+            <a:ext cx="2200046" cy="365760"/>
+          </a:xfrm>
+          <a:prstGeom prst="roundRect">
+            <a:avLst/>
+          </a:prstGeom>
+          <a:solidFill>
+            <a:srgbClr val="E8EEF7"/>
+          </a:solidFill>
+          <a:ln>
+            <a:solidFill>
+              <a:srgbClr val="1F3A5F"/>
+            </a:solidFill>
+          </a:ln>
+        </p:spPr>
+        <p:style>
+          <a:lnRef idx="1">
+            <a:schemeClr val="accent1"/>
+          </a:lnRef>
+          <a:fillRef idx="3">
+            <a:schemeClr val="accent1"/>
+          </a:fillRef>
+          <a:effectRef idx="2">
+            <a:schemeClr val="accent1"/>
+          </a:effectRef>
+          <a:fontRef idx="minor">
+            <a:schemeClr val="lt1"/>
+          </a:fontRef>
+        </p:style>
+        <p:txBody>
+          <a:bodyPr rtlCol="0" anchor="ctr" lIns="45720" rIns="45720"/>
+          <a:lstStyle/>
+          <a:p>
+            <a:pPr algn="ctr"/>
+            <a:r>
+              <a:rPr sz="900">
+                <a:solidFill>
+                  <a:srgbClr val="1F3A5F"/>
+                </a:solidFill>
+              </a:rPr>
+              <a:t>Gram 30: FR Ghost, Category 2, Risa</a:t>
+            </a:r>
+          </a:p>
+        </p:txBody>
+      </p:sp>
+      <p:sp>
+        <p:nvSpPr>
+          <p:cNvPr id="22" name="TextBox 21"/>
+          <p:cNvSpPr txBox="1"/>
+          <p:nvPr/>
+        </p:nvSpPr>
+        <p:spPr>
+          <a:xfrm>
+            <a:off x="9531705" y="3066288"/>
+            <a:ext cx="2200046" cy="1447800"/>
+          </a:xfrm>
+          <a:prstGeom prst="rect">
+            <a:avLst/>
+          </a:prstGeom>
+          <a:noFill/>
+        </p:spPr>
+        <p:txBody>
+          <a:bodyPr wrap="square">
+            <a:spAutoFit/>
+          </a:bodyPr>
+          <a:lstStyle/>
+          <a:p>
+            <a:r>
+              <a:rPr sz="800">
+                <a:hlinkClick r:id="rId35"/>
+              </a:rPr>
+              <a:t>Lofar 1</a:t>
+            </a:r>
+          </a:p>
+        </p:txBody>
+      </p:sp>
+      <p:sp>
+        <p:nvSpPr>
+          <p:cNvPr id="23" name="Rounded Rectangle 22"/>
+          <p:cNvSpPr/>
+          <p:nvPr>
+            <a:hlinkClick r:id="rId36"/>
+          </p:nvPr>
+        </p:nvSpPr>
+        <p:spPr>
+          <a:xfrm>
+            <a:off x="365760" y="4632960"/>
+            <a:ext cx="2200046" cy="365760"/>
+          </a:xfrm>
+          <a:prstGeom prst="roundRect">
+            <a:avLst/>
+          </a:prstGeom>
+          <a:solidFill>
+            <a:srgbClr val="E8EEF7"/>
+          </a:solidFill>
+          <a:ln>
+            <a:solidFill>
+              <a:srgbClr val="1F3A5F"/>
+            </a:solidFill>
+          </a:ln>
+        </p:spPr>
+        <p:style>
+          <a:lnRef idx="1">
+            <a:schemeClr val="accent1"/>
+          </a:lnRef>
+          <a:fillRef idx="3">
+            <a:schemeClr val="accent1"/>
+          </a:fillRef>
+          <a:effectRef idx="2">
+            <a:schemeClr val="accent1"/>
+          </a:effectRef>
+          <a:fontRef idx="minor">
+            <a:schemeClr val="lt1"/>
+          </a:fontRef>
+        </p:style>
+        <p:txBody>
+          <a:bodyPr rtlCol="0" anchor="ctr" lIns="45720" rIns="45720"/>
+          <a:lstStyle/>
+          <a:p>
+            <a:pPr algn="ctr"/>
+            <a:r>
+              <a:rPr sz="900">
+                <a:solidFill>
+                  <a:srgbClr val="1F3A5F"/>
+                </a:solidFill>
+              </a:rPr>
+              <a:t>Gram 32: FR Defiant, Category 4, Kobol</a:t>
+            </a:r>
+          </a:p>
+        </p:txBody>
+      </p:sp>
+      <p:sp>
+        <p:nvSpPr>
+          <p:cNvPr id="24" name="TextBox 23"/>
+          <p:cNvSpPr txBox="1"/>
+          <p:nvPr/>
+        </p:nvSpPr>
+        <p:spPr>
+          <a:xfrm>
+            <a:off x="365760" y="5017008"/>
+            <a:ext cx="2200046" cy="1447800"/>
+          </a:xfrm>
+          <a:prstGeom prst="rect">
+            <a:avLst/>
+          </a:prstGeom>
+          <a:noFill/>
+        </p:spPr>
+        <p:txBody>
+          <a:bodyPr wrap="square">
+            <a:spAutoFit/>
+          </a:bodyPr>
+          <a:lstStyle/>
+          <a:p>
+            <a:r>
+              <a:rPr sz="800">
+                <a:hlinkClick r:id="rId37"/>
+              </a:rPr>
+              <a:t>Lofar 1</a:t>
+            </a:r>
+          </a:p>
+        </p:txBody>
+      </p:sp>
+      <p:sp>
+        <p:nvSpPr>
+          <p:cNvPr id="25" name="Rounded Rectangle 24"/>
+          <p:cNvSpPr/>
+          <p:nvPr>
+            <a:hlinkClick r:id="rId38"/>
+          </p:nvPr>
+        </p:nvSpPr>
+        <p:spPr>
+          <a:xfrm>
+            <a:off x="2657246" y="4632960"/>
+            <a:ext cx="2200046" cy="365760"/>
+          </a:xfrm>
+          <a:prstGeom prst="roundRect">
+            <a:avLst/>
+          </a:prstGeom>
+          <a:solidFill>
+            <a:srgbClr val="E8EEF7"/>
+          </a:solidFill>
+          <a:ln>
+            <a:solidFill>
+              <a:srgbClr val="1F3A5F"/>
+            </a:solidFill>
+          </a:ln>
+        </p:spPr>
+        <p:style>
+          <a:lnRef idx="1">
+            <a:schemeClr val="accent1"/>
+          </a:lnRef>
+          <a:fillRef idx="3">
+            <a:schemeClr val="accent1"/>
+          </a:fillRef>
+          <a:effectRef idx="2">
+            <a:schemeClr val="accent1"/>
+          </a:effectRef>
+          <a:fontRef idx="minor">
+            <a:schemeClr val="lt1"/>
+          </a:fontRef>
+        </p:style>
+        <p:txBody>
+          <a:bodyPr rtlCol="0" anchor="ctr" lIns="45720" rIns="45720"/>
+          <a:lstStyle/>
+          <a:p>
+            <a:pPr algn="ctr"/>
+            <a:r>
+              <a:rPr sz="900">
+                <a:solidFill>
+                  <a:srgbClr val="1F3A5F"/>
+                </a:solidFill>
+              </a:rPr>
+              <a:t>Gram 33: FR Ghost, Category 4, Risa</a:t>
+            </a:r>
+          </a:p>
+        </p:txBody>
+      </p:sp>
+      <p:sp>
+        <p:nvSpPr>
+          <p:cNvPr id="26" name="TextBox 25"/>
+          <p:cNvSpPr txBox="1"/>
+          <p:nvPr/>
+        </p:nvSpPr>
+        <p:spPr>
+          <a:xfrm>
+            <a:off x="2657246" y="5017008"/>
+            <a:ext cx="2200046" cy="1447800"/>
+          </a:xfrm>
+          <a:prstGeom prst="rect">
+            <a:avLst/>
+          </a:prstGeom>
+          <a:noFill/>
+        </p:spPr>
+        <p:txBody>
+          <a:bodyPr wrap="square">
+            <a:spAutoFit/>
+          </a:bodyPr>
+          <a:lstStyle/>
+          <a:p>
+            <a:r>
+              <a:rPr sz="800">
+                <a:hlinkClick r:id="rId39"/>
+              </a:rPr>
+              <a:t>Lofar 1</a:t>
+            </a:r>
+          </a:p>
+          <a:p>
+            <a:r>
+              <a:rPr sz="800">
+                <a:hlinkClick r:id="rId40"/>
+              </a:rPr>
+              <a:t>Lofar 2</a:t>
+            </a:r>
+          </a:p>
+          <a:p>
+            <a:r>
+              <a:rPr sz="800">
+                <a:hlinkClick r:id="rId41"/>
+              </a:rPr>
+              <a:t>Lofar 3</a:t>
+            </a:r>
+          </a:p>
+          <a:p>
+            <a:r>
+              <a:rPr sz="800">
+                <a:hlinkClick r:id="rId42"/>
+              </a:rPr>
+              <a:t>Lofar 4</a:t>
+            </a:r>
+          </a:p>
+        </p:txBody>
+      </p:sp>
+      <p:sp>
+        <p:nvSpPr>
+          <p:cNvPr id="27" name="Rounded Rectangle 26"/>
+          <p:cNvSpPr/>
+          <p:nvPr>
+            <a:hlinkClick r:id="rId43"/>
+          </p:nvPr>
+        </p:nvSpPr>
+        <p:spPr>
+          <a:xfrm>
+            <a:off x="4948732" y="4632960"/>
+            <a:ext cx="2200046" cy="365760"/>
+          </a:xfrm>
+          <a:prstGeom prst="roundRect">
+            <a:avLst/>
+          </a:prstGeom>
+          <a:solidFill>
+            <a:srgbClr val="E8EEF7"/>
+          </a:solidFill>
+          <a:ln>
+            <a:solidFill>
+              <a:srgbClr val="1F3A5F"/>
+            </a:solidFill>
+          </a:ln>
+        </p:spPr>
+        <p:style>
+          <a:lnRef idx="1">
+            <a:schemeClr val="accent1"/>
+          </a:lnRef>
+          <a:fillRef idx="3">
+            <a:schemeClr val="accent1"/>
+          </a:fillRef>
+          <a:effectRef idx="2">
+            <a:schemeClr val="accent1"/>
+          </a:effectRef>
+          <a:fontRef idx="minor">
+            <a:schemeClr val="lt1"/>
+          </a:fontRef>
+        </p:style>
+        <p:txBody>
+          <a:bodyPr rtlCol="0" anchor="ctr" lIns="45720" rIns="45720"/>
+          <a:lstStyle/>
+          <a:p>
+            <a:pPr algn="ctr"/>
+            <a:r>
+              <a:rPr sz="900">
+                <a:solidFill>
+                  <a:srgbClr val="1F3A5F"/>
+                </a:solidFill>
+              </a:rPr>
+              <a:t>Gram 34: FR Reliant, Category 3, Risa</a:t>
+            </a:r>
+          </a:p>
+        </p:txBody>
+      </p:sp>
+      <p:sp>
+        <p:nvSpPr>
+          <p:cNvPr id="28" name="TextBox 27"/>
+          <p:cNvSpPr txBox="1"/>
+          <p:nvPr/>
+        </p:nvSpPr>
+        <p:spPr>
+          <a:xfrm>
+            <a:off x="4948732" y="5017008"/>
+            <a:ext cx="2200046" cy="1447800"/>
+          </a:xfrm>
+          <a:prstGeom prst="rect">
+            <a:avLst/>
+          </a:prstGeom>
+          <a:noFill/>
+        </p:spPr>
+        <p:txBody>
+          <a:bodyPr wrap="square">
+            <a:spAutoFit/>
+          </a:bodyPr>
+          <a:lstStyle/>
+          <a:p>
+            <a:r>
+              <a:rPr sz="800">
+                <a:hlinkClick r:id="rId44"/>
+              </a:rPr>
+              <a:t>Lofar 1</a:t>
+            </a:r>
+          </a:p>
+          <a:p>
+            <a:r>
+              <a:rPr sz="800">
+                <a:hlinkClick r:id="rId45"/>
+              </a:rPr>
+              <a:t>Lofar 2</a:t>
+            </a:r>
+          </a:p>
+          <a:p>
+            <a:r>
+              <a:rPr sz="800">
+                <a:hlinkClick r:id="rId46"/>
+              </a:rPr>
+              <a:t>Lofar 3</a:t>
+            </a:r>
+          </a:p>
+          <a:p>
+            <a:r>
+              <a:rPr sz="800">
+                <a:hlinkClick r:id="rId47"/>
+              </a:rPr>
+              <a:t>Lofar 4</a:t>
+            </a:r>
+          </a:p>
+        </p:txBody>
+      </p:sp>
+      <p:sp>
+        <p:nvSpPr>
+          <p:cNvPr id="29" name="Rounded Rectangle 28"/>
+          <p:cNvSpPr/>
+          <p:nvPr>
+            <a:hlinkClick r:id="rId48"/>
+          </p:nvPr>
+        </p:nvSpPr>
+        <p:spPr>
+          <a:xfrm>
+            <a:off x="7240219" y="4632960"/>
+            <a:ext cx="2200046" cy="365760"/>
+          </a:xfrm>
+          <a:prstGeom prst="roundRect">
+            <a:avLst/>
+          </a:prstGeom>
+          <a:solidFill>
+            <a:srgbClr val="E8EEF7"/>
+          </a:solidFill>
+          <a:ln>
+            <a:solidFill>
+              <a:srgbClr val="1F3A5F"/>
+            </a:solidFill>
+          </a:ln>
+        </p:spPr>
+        <p:style>
+          <a:lnRef idx="1">
+            <a:schemeClr val="accent1"/>
+          </a:lnRef>
+          <a:fillRef idx="3">
+            <a:schemeClr val="accent1"/>
+          </a:fillRef>
+          <a:effectRef idx="2">
+            <a:schemeClr val="accent1"/>
+          </a:effectRef>
+          <a:fontRef idx="minor">
+            <a:schemeClr val="lt1"/>
+          </a:fontRef>
+        </p:style>
+        <p:txBody>
+          <a:bodyPr rtlCol="0" anchor="ctr" lIns="45720" rIns="45720"/>
+          <a:lstStyle/>
+          <a:p>
+            <a:pPr algn="ctr"/>
+            <a:r>
+              <a:rPr sz="900">
+                <a:solidFill>
+                  <a:srgbClr val="1F3A5F"/>
+                </a:solidFill>
+              </a:rPr>
+              <a:t>Gram 35: FR Slave I, Category 3, Dagobah</a:t>
+            </a:r>
+          </a:p>
+        </p:txBody>
+      </p:sp>
+      <p:sp>
+        <p:nvSpPr>
+          <p:cNvPr id="30" name="TextBox 29"/>
+          <p:cNvSpPr txBox="1"/>
+          <p:nvPr/>
+        </p:nvSpPr>
+        <p:spPr>
+          <a:xfrm>
+            <a:off x="7240219" y="5017008"/>
+            <a:ext cx="2200046" cy="1447800"/>
+          </a:xfrm>
+          <a:prstGeom prst="rect">
+            <a:avLst/>
+          </a:prstGeom>
+          <a:noFill/>
+        </p:spPr>
+        <p:txBody>
+          <a:bodyPr wrap="square">
+            <a:spAutoFit/>
+          </a:bodyPr>
+          <a:lstStyle/>
+          <a:p>
+            <a:r>
+              <a:rPr sz="800">
+                <a:hlinkClick r:id="rId49"/>
+              </a:rPr>
+              <a:t>Lofar 1</a:t>
+            </a:r>
+          </a:p>
+        </p:txBody>
+      </p:sp>
+      <p:sp>
+        <p:nvSpPr>
+          <p:cNvPr id="31" name="Rounded Rectangle 30"/>
+          <p:cNvSpPr/>
+          <p:nvPr>
+            <a:hlinkClick r:id="rId50"/>
+          </p:nvPr>
+        </p:nvSpPr>
+        <p:spPr>
+          <a:xfrm>
+            <a:off x="9531705" y="4632960"/>
+            <a:ext cx="2200046" cy="365760"/>
+          </a:xfrm>
+          <a:prstGeom prst="roundRect">
+            <a:avLst/>
+          </a:prstGeom>
+          <a:solidFill>
+            <a:srgbClr val="E8EEF7"/>
+          </a:solidFill>
+          <a:ln>
+            <a:solidFill>
+              <a:srgbClr val="1F3A5F"/>
+            </a:solidFill>
+          </a:ln>
+        </p:spPr>
+        <p:style>
+          <a:lnRef idx="1">
+            <a:schemeClr val="accent1"/>
+          </a:lnRef>
+          <a:fillRef idx="3">
+            <a:schemeClr val="accent1"/>
+          </a:fillRef>
+          <a:effectRef idx="2">
+            <a:schemeClr val="accent1"/>
+          </a:effectRef>
+          <a:fontRef idx="minor">
+            <a:schemeClr val="lt1"/>
+          </a:fontRef>
+        </p:style>
+        <p:txBody>
+          <a:bodyPr rtlCol="0" anchor="ctr" lIns="45720" rIns="45720"/>
+          <a:lstStyle/>
+          <a:p>
+            <a:pPr algn="ctr"/>
+            <a:r>
+              <a:rPr sz="900">
+                <a:solidFill>
+                  <a:srgbClr val="1F3A5F"/>
+                </a:solidFill>
+              </a:rPr>
+              <a:t>Gram 36: FR Equinox, Category 2, Gandalf</a:t>
+            </a:r>
+          </a:p>
+        </p:txBody>
+      </p:sp>
+      <p:sp>
+        <p:nvSpPr>
+          <p:cNvPr id="32" name="TextBox 31"/>
+          <p:cNvSpPr txBox="1"/>
+          <p:nvPr/>
+        </p:nvSpPr>
+        <p:spPr>
+          <a:xfrm>
+            <a:off x="9531705" y="5017008"/>
+            <a:ext cx="2200046" cy="1447800"/>
+          </a:xfrm>
+          <a:prstGeom prst="rect">
+            <a:avLst/>
+          </a:prstGeom>
+          <a:noFill/>
+        </p:spPr>
+        <p:txBody>
+          <a:bodyPr wrap="square">
+            <a:spAutoFit/>
+          </a:bodyPr>
+          <a:lstStyle/>
+          <a:p>
+            <a:r>
+              <a:rPr sz="800">
                 <a:hlinkClick r:id="rId51"/>
               </a:rPr>
               <a:t>Lofar 1</a:t>
@@ -6089,6 +6177,92 @@
                 <a:hlinkClick r:id="rId52"/>
               </a:rPr>
               <a:t>Lofar 2</a:t>
+            </a:r>
+          </a:p>
+        </p:txBody>
+      </p:sp>
+    </p:spTree>
+  </p:cSld>
+  <p:clrMapOvr>
+    <a:masterClrMapping/>
+  </p:clrMapOvr>
+</p:sld>
+</file>
+
+<file path=ppt/slides/slide4.xml><?xml version="1.0" encoding="utf-8"?>
+<p:sld xmlns:a="http://schemas.openxmlformats.org/drawingml/2006/main" xmlns:p="http://schemas.openxmlformats.org/presentationml/2006/main" xmlns:r="http://schemas.openxmlformats.org/officeDocument/2006/relationships">
+  <p:cSld>
+    <p:spTree>
+      <p:nvGrpSpPr>
+        <p:cNvPr id="1" name=""/>
+        <p:cNvGrpSpPr/>
+        <p:nvPr/>
+      </p:nvGrpSpPr>
+      <p:grpSpPr/>
+      <p:sp>
+        <p:nvSpPr>
+          <p:cNvPr id="2" name="TextBox 1"/>
+          <p:cNvSpPr txBox="1"/>
+          <p:nvPr/>
+        </p:nvSpPr>
+        <p:spPr>
+          <a:xfrm>
+            <a:off x="914400" y="2377440"/>
+            <a:ext cx="10360152" cy="1280160"/>
+          </a:xfrm>
+          <a:prstGeom prst="rect">
+            <a:avLst/>
+          </a:prstGeom>
+          <a:noFill/>
+        </p:spPr>
+        <p:txBody>
+          <a:bodyPr wrap="square">
+            <a:spAutoFit/>
+          </a:bodyPr>
+          <a:lstStyle/>
+          <a:p>
+            <a:pPr algn="ctr"/>
+            <a:r>
+              <a:rPr sz="4000" b="1">
+                <a:solidFill>
+                  <a:srgbClr val="1F3A5F"/>
+                </a:solidFill>
+              </a:rPr>
+              <a:t>End of Instructor Progress Test 4 Grams</a:t>
+            </a:r>
+          </a:p>
+        </p:txBody>
+      </p:sp>
+      <p:sp>
+        <p:nvSpPr>
+          <p:cNvPr id="3" name="TextBox 2"/>
+          <p:cNvSpPr txBox="1"/>
+          <p:nvPr/>
+        </p:nvSpPr>
+        <p:spPr>
+          <a:xfrm>
+            <a:off x="914400" y="3840480"/>
+            <a:ext cx="10360152" cy="731520"/>
+          </a:xfrm>
+          <a:prstGeom prst="rect">
+            <a:avLst/>
+          </a:prstGeom>
+          <a:noFill/>
+        </p:spPr>
+        <p:txBody>
+          <a:bodyPr wrap="none">
+            <a:spAutoFit/>
+          </a:bodyPr>
+          <a:lstStyle/>
+          <a:p>
+            <a:pPr algn="ctr"/>
+            <a:r>
+              <a:rPr sz="2400">
+                <a:solidFill>
+                  <a:srgbClr val="1F3A5F"/>
+                </a:solidFill>
+              </a:rPr>
+              <a:t>Instructor Version</a:t>
             </a:r>
           </a:p>
         </p:txBody>

--- a/source/Instructor Progress Test 4 Grams/Instructor Progress Test 4 Grams.pptx
+++ b/source/Instructor Progress Test 4 Grams/Instructor Progress Test 4 Grams.pptx
@@ -7,8 +7,6 @@
   <p:sldIdLst>
     <p:sldId id="256" r:id="rId7"/>
     <p:sldId id="257" r:id="rId8"/>
-    <p:sldId id="258" r:id="rId9"/>
-    <p:sldId id="259" r:id="rId10"/>
   </p:sldIdLst>
   <p:sldSz cx="12188952" cy="6858000" type="screen4x3"/>
   <p:notesSz cx="6858000" cy="9144000"/>
@@ -3093,14 +3091,120 @@
       <p:grpSpPr/>
       <p:sp>
         <p:nvSpPr>
-          <p:cNvPr id="2" name="TextBox 1"/>
+          <p:cNvPr id="2" name="Rectangle 1"/>
+          <p:cNvSpPr/>
+          <p:nvPr/>
+        </p:nvSpPr>
+        <p:spPr>
+          <a:xfrm>
+            <a:off x="0" y="0"/>
+            <a:ext cx="12188952" cy="548640"/>
+          </a:xfrm>
+          <a:prstGeom prst="rect">
+            <a:avLst/>
+          </a:prstGeom>
+          <a:solidFill>
+            <a:srgbClr val="1F3A5F"/>
+          </a:solidFill>
+          <a:ln>
+            <a:noFill/>
+          </a:ln>
+        </p:spPr>
+        <p:style>
+          <a:lnRef idx="1">
+            <a:schemeClr val="accent1"/>
+          </a:lnRef>
+          <a:fillRef idx="3">
+            <a:schemeClr val="accent1"/>
+          </a:fillRef>
+          <a:effectRef idx="2">
+            <a:schemeClr val="accent1"/>
+          </a:effectRef>
+          <a:fontRef idx="minor">
+            <a:schemeClr val="lt1"/>
+          </a:fontRef>
+        </p:style>
+        <p:txBody>
+          <a:bodyPr rtlCol="0" anchor="ctr" lIns="182880" rIns="182880"/>
+          <a:lstStyle/>
+          <a:p>
+            <a:pPr algn="ctr"/>
+            <a:r>
+              <a:rPr sz="2000" b="1">
+                <a:solidFill>
+                  <a:srgbClr val="FFFFFF"/>
+                </a:solidFill>
+              </a:rPr>
+              <a:t>Instructor Progress Test 4 Grams — Page 1 of 2</a:t>
+            </a:r>
+          </a:p>
+        </p:txBody>
+      </p:sp>
+      <p:sp>
+        <p:nvSpPr>
+          <p:cNvPr id="3" name="Rounded Rectangle 2">
+            <a:hlinkClick r:id="rId2"/>
+          </p:cNvPr>
+          <p:cNvSpPr/>
+          <p:nvPr/>
+        </p:nvSpPr>
+        <p:spPr>
+          <a:xfrm>
+            <a:off x="365760" y="731520"/>
+            <a:ext cx="2200046" cy="365760"/>
+          </a:xfrm>
+          <a:prstGeom prst="roundRect">
+            <a:avLst/>
+          </a:prstGeom>
+          <a:solidFill>
+            <a:srgbClr val="E8EEF7"/>
+          </a:solidFill>
+          <a:ln>
+            <a:solidFill>
+              <a:srgbClr val="1F3A5F"/>
+            </a:solidFill>
+          </a:ln>
+        </p:spPr>
+        <p:style>
+          <a:lnRef idx="1">
+            <a:schemeClr val="accent1"/>
+          </a:lnRef>
+          <a:fillRef idx="3">
+            <a:schemeClr val="accent1"/>
+          </a:fillRef>
+          <a:effectRef idx="2">
+            <a:schemeClr val="accent1"/>
+          </a:effectRef>
+          <a:fontRef idx="minor">
+            <a:schemeClr val="lt1"/>
+          </a:fontRef>
+        </p:style>
+        <p:txBody>
+          <a:bodyPr rtlCol="0" anchor="ctr" lIns="45720" rIns="45720"/>
+          <a:lstStyle/>
+          <a:p>
+            <a:pPr algn="ctr"/>
+            <a:r>
+              <a:rPr sz="900">
+                <a:solidFill>
+                  <a:srgbClr val="1F3A5F"/>
+                </a:solidFill>
+              </a:rPr>
+              <a:t>Gram 1: FR A-wing, Category 2, Bespin</a:t>
+            </a:r>
+          </a:p>
+        </p:txBody>
+      </p:sp>
+      <p:sp>
+        <p:nvSpPr>
+          <p:cNvPr id="4" name="TextBox 3"/>
           <p:cNvSpPr txBox="1"/>
           <p:nvPr/>
         </p:nvSpPr>
         <p:spPr>
           <a:xfrm>
-            <a:off x="914400" y="2377440"/>
-            <a:ext cx="10360152" cy="1280160"/>
+            <a:off x="365760" y="1115568"/>
+            <a:ext cx="2200046" cy="1447800"/>
           </a:xfrm>
           <a:prstGeom prst="rect">
             <a:avLst/>
@@ -3113,28 +3217,96 @@
           </a:bodyPr>
           <a:lstStyle/>
           <a:p>
+            <a:r>
+              <a:rPr sz="800">
+                <a:hlinkClick r:id="rId3"/>
+              </a:rPr>
+              <a:t>Lofar 1</a:t>
+            </a:r>
+          </a:p>
+          <a:p>
+            <a:r>
+              <a:rPr sz="800">
+                <a:hlinkClick r:id="rId4"/>
+              </a:rPr>
+              <a:t>Lofar 2</a:t>
+            </a:r>
+          </a:p>
+          <a:p>
+            <a:r>
+              <a:rPr sz="800">
+                <a:hlinkClick r:id="rId5"/>
+              </a:rPr>
+              <a:t>Lofar 3</a:t>
+            </a:r>
+          </a:p>
+        </p:txBody>
+      </p:sp>
+      <p:sp>
+        <p:nvSpPr>
+          <p:cNvPr id="5" name="Rounded Rectangle 4">
+            <a:hlinkClick r:id="rId6"/>
+          </p:cNvPr>
+          <p:cNvSpPr/>
+          <p:nvPr/>
+        </p:nvSpPr>
+        <p:spPr>
+          <a:xfrm>
+            <a:off x="2657246" y="731520"/>
+            <a:ext cx="2200046" cy="365760"/>
+          </a:xfrm>
+          <a:prstGeom prst="roundRect">
+            <a:avLst/>
+          </a:prstGeom>
+          <a:solidFill>
+            <a:srgbClr val="E8EEF7"/>
+          </a:solidFill>
+          <a:ln>
+            <a:solidFill>
+              <a:srgbClr val="1F3A5F"/>
+            </a:solidFill>
+          </a:ln>
+        </p:spPr>
+        <p:style>
+          <a:lnRef idx="1">
+            <a:schemeClr val="accent1"/>
+          </a:lnRef>
+          <a:fillRef idx="3">
+            <a:schemeClr val="accent1"/>
+          </a:fillRef>
+          <a:effectRef idx="2">
+            <a:schemeClr val="accent1"/>
+          </a:effectRef>
+          <a:fontRef idx="minor">
+            <a:schemeClr val="lt1"/>
+          </a:fontRef>
+        </p:style>
+        <p:txBody>
+          <a:bodyPr rtlCol="0" anchor="ctr" lIns="45720" rIns="45720"/>
+          <a:lstStyle/>
+          <a:p>
             <a:pPr algn="ctr"/>
             <a:r>
-              <a:rPr sz="4000" b="1">
+              <a:rPr sz="900">
                 <a:solidFill>
                   <a:srgbClr val="1F3A5F"/>
                 </a:solidFill>
               </a:rPr>
-              <a:t>Welcome to Instructor Progress Test 4 Grams</a:t>
-            </a:r>
-          </a:p>
-        </p:txBody>
-      </p:sp>
-      <p:sp>
-        <p:nvSpPr>
-          <p:cNvPr id="3" name="TextBox 2"/>
+              <a:t>Gram 2: Lambda Shuttle contact bearing 219, codename Cardassia</a:t>
+            </a:r>
+          </a:p>
+        </p:txBody>
+      </p:sp>
+      <p:sp>
+        <p:nvSpPr>
+          <p:cNvPr id="6" name="TextBox 5"/>
           <p:cNvSpPr txBox="1"/>
           <p:nvPr/>
         </p:nvSpPr>
         <p:spPr>
           <a:xfrm>
-            <a:off x="914400" y="3840480"/>
-            <a:ext cx="10360152" cy="731520"/>
+            <a:off x="2657246" y="1115568"/>
+            <a:ext cx="2200046" cy="1447800"/>
           </a:xfrm>
           <a:prstGeom prst="rect">
             <a:avLst/>
@@ -3142,19 +3314,1254 @@
           <a:noFill/>
         </p:spPr>
         <p:txBody>
-          <a:bodyPr wrap="none">
+          <a:bodyPr wrap="square">
             <a:spAutoFit/>
           </a:bodyPr>
           <a:lstStyle/>
           <a:p>
+            <a:r>
+              <a:rPr sz="800">
+                <a:hlinkClick r:id="rId7"/>
+              </a:rPr>
+              <a:t>Lofar 1</a:t>
+            </a:r>
+          </a:p>
+        </p:txBody>
+      </p:sp>
+      <p:sp>
+        <p:nvSpPr>
+          <p:cNvPr id="7" name="Rounded Rectangle 6">
+            <a:hlinkClick r:id="rId8"/>
+          </p:cNvPr>
+          <p:cNvSpPr/>
+          <p:nvPr/>
+        </p:nvSpPr>
+        <p:spPr>
+          <a:xfrm>
+            <a:off x="4948732" y="731520"/>
+            <a:ext cx="2200046" cy="365760"/>
+          </a:xfrm>
+          <a:prstGeom prst="roundRect">
+            <a:avLst/>
+          </a:prstGeom>
+          <a:solidFill>
+            <a:srgbClr val="E8EEF7"/>
+          </a:solidFill>
+          <a:ln>
+            <a:solidFill>
+              <a:srgbClr val="1F3A5F"/>
+            </a:solidFill>
+          </a:ln>
+        </p:spPr>
+        <p:style>
+          <a:lnRef idx="1">
+            <a:schemeClr val="accent1"/>
+          </a:lnRef>
+          <a:fillRef idx="3">
+            <a:schemeClr val="accent1"/>
+          </a:fillRef>
+          <a:effectRef idx="2">
+            <a:schemeClr val="accent1"/>
+          </a:effectRef>
+          <a:fontRef idx="minor">
+            <a:schemeClr val="lt1"/>
+          </a:fontRef>
+        </p:style>
+        <p:txBody>
+          <a:bodyPr rtlCol="0" anchor="ctr" lIns="45720" rIns="45720"/>
+          <a:lstStyle/>
+          <a:p>
             <a:pPr algn="ctr"/>
             <a:r>
-              <a:rPr sz="2400">
+              <a:rPr sz="900">
                 <a:solidFill>
                   <a:srgbClr val="1F3A5F"/>
                 </a:solidFill>
               </a:rPr>
-              <a:t>Instructor Version</a:t>
+              <a:t>Gram 4: FR Acclamator-class, Category 1, Trill</a:t>
+            </a:r>
+          </a:p>
+        </p:txBody>
+      </p:sp>
+      <p:sp>
+        <p:nvSpPr>
+          <p:cNvPr id="8" name="TextBox 7"/>
+          <p:cNvSpPr txBox="1"/>
+          <p:nvPr/>
+        </p:nvSpPr>
+        <p:spPr>
+          <a:xfrm>
+            <a:off x="4948732" y="1115568"/>
+            <a:ext cx="2200046" cy="1447800"/>
+          </a:xfrm>
+          <a:prstGeom prst="rect">
+            <a:avLst/>
+          </a:prstGeom>
+          <a:noFill/>
+        </p:spPr>
+        <p:txBody>
+          <a:bodyPr wrap="square">
+            <a:spAutoFit/>
+          </a:bodyPr>
+          <a:lstStyle/>
+          <a:p>
+            <a:r>
+              <a:rPr sz="800">
+                <a:hlinkClick r:id="rId9"/>
+              </a:rPr>
+              <a:t>Lofar 1</a:t>
+            </a:r>
+          </a:p>
+          <a:p>
+            <a:r>
+              <a:rPr sz="800">
+                <a:hlinkClick r:id="rId10"/>
+              </a:rPr>
+              <a:t>Lofar 2</a:t>
+            </a:r>
+          </a:p>
+        </p:txBody>
+      </p:sp>
+      <p:sp>
+        <p:nvSpPr>
+          <p:cNvPr id="9" name="Rounded Rectangle 8">
+            <a:hlinkClick r:id="rId11"/>
+          </p:cNvPr>
+          <p:cNvSpPr/>
+          <p:nvPr/>
+        </p:nvSpPr>
+        <p:spPr>
+          <a:xfrm>
+            <a:off x="7240219" y="731520"/>
+            <a:ext cx="2200046" cy="365760"/>
+          </a:xfrm>
+          <a:prstGeom prst="roundRect">
+            <a:avLst/>
+          </a:prstGeom>
+          <a:solidFill>
+            <a:srgbClr val="E8EEF7"/>
+          </a:solidFill>
+          <a:ln>
+            <a:solidFill>
+              <a:srgbClr val="1F3A5F"/>
+            </a:solidFill>
+          </a:ln>
+        </p:spPr>
+        <p:style>
+          <a:lnRef idx="1">
+            <a:schemeClr val="accent1"/>
+          </a:lnRef>
+          <a:fillRef idx="3">
+            <a:schemeClr val="accent1"/>
+          </a:fillRef>
+          <a:effectRef idx="2">
+            <a:schemeClr val="accent1"/>
+          </a:effectRef>
+          <a:fontRef idx="minor">
+            <a:schemeClr val="lt1"/>
+          </a:fontRef>
+        </p:style>
+        <p:txBody>
+          <a:bodyPr rtlCol="0" anchor="ctr" lIns="45720" rIns="45720"/>
+          <a:lstStyle/>
+          <a:p>
+            <a:pPr algn="ctr"/>
+            <a:r>
+              <a:rPr sz="900">
+                <a:solidFill>
+                  <a:srgbClr val="1F3A5F"/>
+                </a:solidFill>
+              </a:rPr>
+              <a:t>Gram 5: Nebulon-B contact bearing 084, codename Risa</a:t>
+            </a:r>
+          </a:p>
+        </p:txBody>
+      </p:sp>
+      <p:sp>
+        <p:nvSpPr>
+          <p:cNvPr id="10" name="TextBox 9"/>
+          <p:cNvSpPr txBox="1"/>
+          <p:nvPr/>
+        </p:nvSpPr>
+        <p:spPr>
+          <a:xfrm>
+            <a:off x="7240219" y="1115568"/>
+            <a:ext cx="2200046" cy="1447800"/>
+          </a:xfrm>
+          <a:prstGeom prst="rect">
+            <a:avLst/>
+          </a:prstGeom>
+          <a:noFill/>
+        </p:spPr>
+        <p:txBody>
+          <a:bodyPr wrap="square">
+            <a:spAutoFit/>
+          </a:bodyPr>
+          <a:lstStyle/>
+          <a:p>
+            <a:r>
+              <a:rPr sz="800">
+                <a:hlinkClick r:id="rId12"/>
+              </a:rPr>
+              <a:t>Lofar 1</a:t>
+            </a:r>
+          </a:p>
+          <a:p>
+            <a:r>
+              <a:rPr sz="800">
+                <a:hlinkClick r:id="rId13"/>
+              </a:rPr>
+              <a:t>Lofar 2</a:t>
+            </a:r>
+          </a:p>
+          <a:p>
+            <a:r>
+              <a:rPr sz="800">
+                <a:hlinkClick r:id="rId14"/>
+              </a:rPr>
+              <a:t>Lofar 3</a:t>
+            </a:r>
+          </a:p>
+        </p:txBody>
+      </p:sp>
+      <p:sp>
+        <p:nvSpPr>
+          <p:cNvPr id="11" name="Rounded Rectangle 10">
+            <a:hlinkClick r:id="rId15"/>
+          </p:cNvPr>
+          <p:cNvSpPr/>
+          <p:nvPr/>
+        </p:nvSpPr>
+        <p:spPr>
+          <a:xfrm>
+            <a:off x="9531705" y="731520"/>
+            <a:ext cx="2200046" cy="365760"/>
+          </a:xfrm>
+          <a:prstGeom prst="roundRect">
+            <a:avLst/>
+          </a:prstGeom>
+          <a:solidFill>
+            <a:srgbClr val="E8EEF7"/>
+          </a:solidFill>
+          <a:ln>
+            <a:solidFill>
+              <a:srgbClr val="1F3A5F"/>
+            </a:solidFill>
+          </a:ln>
+        </p:spPr>
+        <p:style>
+          <a:lnRef idx="1">
+            <a:schemeClr val="accent1"/>
+          </a:lnRef>
+          <a:fillRef idx="3">
+            <a:schemeClr val="accent1"/>
+          </a:fillRef>
+          <a:effectRef idx="2">
+            <a:schemeClr val="accent1"/>
+          </a:effectRef>
+          <a:fontRef idx="minor">
+            <a:schemeClr val="lt1"/>
+          </a:fontRef>
+        </p:style>
+        <p:txBody>
+          <a:bodyPr rtlCol="0" anchor="ctr" lIns="45720" rIns="45720"/>
+          <a:lstStyle/>
+          <a:p>
+            <a:pPr algn="ctr"/>
+            <a:r>
+              <a:rPr sz="900">
+                <a:solidFill>
+                  <a:srgbClr val="1F3A5F"/>
+                </a:solidFill>
+              </a:rPr>
+              <a:t>Gram 6: Discovery contact bearing 136, codename Tantive</a:t>
+            </a:r>
+          </a:p>
+        </p:txBody>
+      </p:sp>
+      <p:sp>
+        <p:nvSpPr>
+          <p:cNvPr id="12" name="TextBox 11"/>
+          <p:cNvSpPr txBox="1"/>
+          <p:nvPr/>
+        </p:nvSpPr>
+        <p:spPr>
+          <a:xfrm>
+            <a:off x="9531705" y="1115568"/>
+            <a:ext cx="2200046" cy="1447800"/>
+          </a:xfrm>
+          <a:prstGeom prst="rect">
+            <a:avLst/>
+          </a:prstGeom>
+          <a:noFill/>
+        </p:spPr>
+        <p:txBody>
+          <a:bodyPr wrap="square">
+            <a:spAutoFit/>
+          </a:bodyPr>
+          <a:lstStyle/>
+          <a:p>
+            <a:r>
+              <a:rPr sz="800">
+                <a:hlinkClick r:id="rId16"/>
+              </a:rPr>
+              <a:t>Lofar 1</a:t>
+            </a:r>
+          </a:p>
+          <a:p>
+            <a:r>
+              <a:rPr sz="800">
+                <a:hlinkClick r:id="rId17"/>
+              </a:rPr>
+              <a:t>Lofar 2</a:t>
+            </a:r>
+          </a:p>
+        </p:txBody>
+      </p:sp>
+      <p:sp>
+        <p:nvSpPr>
+          <p:cNvPr id="13" name="Rounded Rectangle 12">
+            <a:hlinkClick r:id="rId18"/>
+          </p:cNvPr>
+          <p:cNvSpPr/>
+          <p:nvPr/>
+        </p:nvSpPr>
+        <p:spPr>
+          <a:xfrm>
+            <a:off x="365760" y="2682240"/>
+            <a:ext cx="2200046" cy="365760"/>
+          </a:xfrm>
+          <a:prstGeom prst="roundRect">
+            <a:avLst/>
+          </a:prstGeom>
+          <a:solidFill>
+            <a:srgbClr val="E8EEF7"/>
+          </a:solidFill>
+          <a:ln>
+            <a:solidFill>
+              <a:srgbClr val="1F3A5F"/>
+            </a:solidFill>
+          </a:ln>
+        </p:spPr>
+        <p:style>
+          <a:lnRef idx="1">
+            <a:schemeClr val="accent1"/>
+          </a:lnRef>
+          <a:fillRef idx="3">
+            <a:schemeClr val="accent1"/>
+          </a:fillRef>
+          <a:effectRef idx="2">
+            <a:schemeClr val="accent1"/>
+          </a:effectRef>
+          <a:fontRef idx="minor">
+            <a:schemeClr val="lt1"/>
+          </a:fontRef>
+        </p:style>
+        <p:txBody>
+          <a:bodyPr rtlCol="0" anchor="ctr" lIns="45720" rIns="45720"/>
+          <a:lstStyle/>
+          <a:p>
+            <a:pPr algn="ctr"/>
+            <a:r>
+              <a:rPr sz="900">
+                <a:solidFill>
+                  <a:srgbClr val="1F3A5F"/>
+                </a:solidFill>
+              </a:rPr>
+              <a:t>Gram 7: FR Tantive IV, Category 3, Vulcan</a:t>
+            </a:r>
+          </a:p>
+        </p:txBody>
+      </p:sp>
+      <p:sp>
+        <p:nvSpPr>
+          <p:cNvPr id="14" name="TextBox 13"/>
+          <p:cNvSpPr txBox="1"/>
+          <p:nvPr/>
+        </p:nvSpPr>
+        <p:spPr>
+          <a:xfrm>
+            <a:off x="365760" y="3066288"/>
+            <a:ext cx="2200046" cy="1447800"/>
+          </a:xfrm>
+          <a:prstGeom prst="rect">
+            <a:avLst/>
+          </a:prstGeom>
+          <a:noFill/>
+        </p:spPr>
+        <p:txBody>
+          <a:bodyPr wrap="square">
+            <a:spAutoFit/>
+          </a:bodyPr>
+          <a:lstStyle/>
+          <a:p>
+            <a:r>
+              <a:rPr sz="800">
+                <a:hlinkClick r:id="rId19"/>
+              </a:rPr>
+              <a:t>Lofar 1</a:t>
+            </a:r>
+          </a:p>
+          <a:p>
+            <a:r>
+              <a:rPr sz="800">
+                <a:hlinkClick r:id="rId20"/>
+              </a:rPr>
+              <a:t>Lofar 2</a:t>
+            </a:r>
+          </a:p>
+          <a:p>
+            <a:r>
+              <a:rPr sz="800">
+                <a:hlinkClick r:id="rId21"/>
+              </a:rPr>
+              <a:t>Lofar 3</a:t>
+            </a:r>
+          </a:p>
+        </p:txBody>
+      </p:sp>
+      <p:sp>
+        <p:nvSpPr>
+          <p:cNvPr id="15" name="Rounded Rectangle 14">
+            <a:hlinkClick r:id="rId22"/>
+          </p:cNvPr>
+          <p:cNvSpPr/>
+          <p:nvPr/>
+        </p:nvSpPr>
+        <p:spPr>
+          <a:xfrm>
+            <a:off x="2657246" y="2682240"/>
+            <a:ext cx="2200046" cy="365760"/>
+          </a:xfrm>
+          <a:prstGeom prst="roundRect">
+            <a:avLst/>
+          </a:prstGeom>
+          <a:solidFill>
+            <a:srgbClr val="E8EEF7"/>
+          </a:solidFill>
+          <a:ln>
+            <a:solidFill>
+              <a:srgbClr val="1F3A5F"/>
+            </a:solidFill>
+          </a:ln>
+        </p:spPr>
+        <p:style>
+          <a:lnRef idx="1">
+            <a:schemeClr val="accent1"/>
+          </a:lnRef>
+          <a:fillRef idx="3">
+            <a:schemeClr val="accent1"/>
+          </a:fillRef>
+          <a:effectRef idx="2">
+            <a:schemeClr val="accent1"/>
+          </a:effectRef>
+          <a:fontRef idx="minor">
+            <a:schemeClr val="lt1"/>
+          </a:fontRef>
+        </p:style>
+        <p:txBody>
+          <a:bodyPr rtlCol="0" anchor="ctr" lIns="45720" rIns="45720"/>
+          <a:lstStyle/>
+          <a:p>
+            <a:pPr algn="ctr"/>
+            <a:r>
+              <a:rPr sz="900">
+                <a:solidFill>
+                  <a:srgbClr val="1F3A5F"/>
+                </a:solidFill>
+              </a:rPr>
+              <a:t>Gram 8: FR Devastator, Category 3, Yavin</a:t>
+            </a:r>
+          </a:p>
+        </p:txBody>
+      </p:sp>
+      <p:sp>
+        <p:nvSpPr>
+          <p:cNvPr id="16" name="TextBox 15"/>
+          <p:cNvSpPr txBox="1"/>
+          <p:nvPr/>
+        </p:nvSpPr>
+        <p:spPr>
+          <a:xfrm>
+            <a:off x="2657246" y="3066288"/>
+            <a:ext cx="2200046" cy="1447800"/>
+          </a:xfrm>
+          <a:prstGeom prst="rect">
+            <a:avLst/>
+          </a:prstGeom>
+          <a:noFill/>
+        </p:spPr>
+        <p:txBody>
+          <a:bodyPr wrap="square">
+            <a:spAutoFit/>
+          </a:bodyPr>
+          <a:lstStyle/>
+          <a:p>
+            <a:r>
+              <a:rPr sz="800">
+                <a:hlinkClick r:id="rId23"/>
+              </a:rPr>
+              <a:t>Lofar 1</a:t>
+            </a:r>
+          </a:p>
+        </p:txBody>
+      </p:sp>
+      <p:sp>
+        <p:nvSpPr>
+          <p:cNvPr id="17" name="Rounded Rectangle 16">
+            <a:hlinkClick r:id="rId24"/>
+          </p:cNvPr>
+          <p:cNvSpPr/>
+          <p:nvPr/>
+        </p:nvSpPr>
+        <p:spPr>
+          <a:xfrm>
+            <a:off x="4948732" y="2682240"/>
+            <a:ext cx="2200046" cy="365760"/>
+          </a:xfrm>
+          <a:prstGeom prst="roundRect">
+            <a:avLst/>
+          </a:prstGeom>
+          <a:solidFill>
+            <a:srgbClr val="E8EEF7"/>
+          </a:solidFill>
+          <a:ln>
+            <a:solidFill>
+              <a:srgbClr val="1F3A5F"/>
+            </a:solidFill>
+          </a:ln>
+        </p:spPr>
+        <p:style>
+          <a:lnRef idx="1">
+            <a:schemeClr val="accent1"/>
+          </a:lnRef>
+          <a:fillRef idx="3">
+            <a:schemeClr val="accent1"/>
+          </a:fillRef>
+          <a:effectRef idx="2">
+            <a:schemeClr val="accent1"/>
+          </a:effectRef>
+          <a:fontRef idx="minor">
+            <a:schemeClr val="lt1"/>
+          </a:fontRef>
+        </p:style>
+        <p:txBody>
+          <a:bodyPr rtlCol="0" anchor="ctr" lIns="45720" rIns="45720"/>
+          <a:lstStyle/>
+          <a:p>
+            <a:pPr algn="ctr"/>
+            <a:r>
+              <a:rPr sz="900">
+                <a:solidFill>
+                  <a:srgbClr val="1F3A5F"/>
+                </a:solidFill>
+              </a:rPr>
+              <a:t>Gram 11: FR Enterprise, Category 2, Mustafar</a:t>
+            </a:r>
+          </a:p>
+        </p:txBody>
+      </p:sp>
+      <p:sp>
+        <p:nvSpPr>
+          <p:cNvPr id="18" name="TextBox 17"/>
+          <p:cNvSpPr txBox="1"/>
+          <p:nvPr/>
+        </p:nvSpPr>
+        <p:spPr>
+          <a:xfrm>
+            <a:off x="4948732" y="3066288"/>
+            <a:ext cx="2200046" cy="1447800"/>
+          </a:xfrm>
+          <a:prstGeom prst="rect">
+            <a:avLst/>
+          </a:prstGeom>
+          <a:noFill/>
+        </p:spPr>
+        <p:txBody>
+          <a:bodyPr wrap="square">
+            <a:spAutoFit/>
+          </a:bodyPr>
+          <a:lstStyle/>
+          <a:p>
+            <a:r>
+              <a:rPr sz="800">
+                <a:hlinkClick r:id="rId25"/>
+              </a:rPr>
+              <a:t>Lofar 1</a:t>
+            </a:r>
+          </a:p>
+        </p:txBody>
+      </p:sp>
+      <p:sp>
+        <p:nvSpPr>
+          <p:cNvPr id="19" name="Rounded Rectangle 18">
+            <a:hlinkClick r:id="rId26"/>
+          </p:cNvPr>
+          <p:cNvSpPr/>
+          <p:nvPr/>
+        </p:nvSpPr>
+        <p:spPr>
+          <a:xfrm>
+            <a:off x="7240219" y="2682240"/>
+            <a:ext cx="2200046" cy="365760"/>
+          </a:xfrm>
+          <a:prstGeom prst="roundRect">
+            <a:avLst/>
+          </a:prstGeom>
+          <a:solidFill>
+            <a:srgbClr val="E8EEF7"/>
+          </a:solidFill>
+          <a:ln>
+            <a:solidFill>
+              <a:srgbClr val="1F3A5F"/>
+            </a:solidFill>
+          </a:ln>
+        </p:spPr>
+        <p:style>
+          <a:lnRef idx="1">
+            <a:schemeClr val="accent1"/>
+          </a:lnRef>
+          <a:fillRef idx="3">
+            <a:schemeClr val="accent1"/>
+          </a:fillRef>
+          <a:effectRef idx="2">
+            <a:schemeClr val="accent1"/>
+          </a:effectRef>
+          <a:fontRef idx="minor">
+            <a:schemeClr val="lt1"/>
+          </a:fontRef>
+        </p:style>
+        <p:txBody>
+          <a:bodyPr rtlCol="0" anchor="ctr" lIns="45720" rIns="45720"/>
+          <a:lstStyle/>
+          <a:p>
+            <a:pPr algn="ctr"/>
+            <a:r>
+              <a:rPr sz="900">
+                <a:solidFill>
+                  <a:srgbClr val="1F3A5F"/>
+                </a:solidFill>
+              </a:rPr>
+              <a:t>Gram 12: FR Slave I, Category 4, Naboo</a:t>
+            </a:r>
+          </a:p>
+        </p:txBody>
+      </p:sp>
+      <p:sp>
+        <p:nvSpPr>
+          <p:cNvPr id="20" name="TextBox 19"/>
+          <p:cNvSpPr txBox="1"/>
+          <p:nvPr/>
+        </p:nvSpPr>
+        <p:spPr>
+          <a:xfrm>
+            <a:off x="7240219" y="3066288"/>
+            <a:ext cx="2200046" cy="1447800"/>
+          </a:xfrm>
+          <a:prstGeom prst="rect">
+            <a:avLst/>
+          </a:prstGeom>
+          <a:noFill/>
+        </p:spPr>
+        <p:txBody>
+          <a:bodyPr wrap="square">
+            <a:spAutoFit/>
+          </a:bodyPr>
+          <a:lstStyle/>
+          <a:p>
+            <a:r>
+              <a:rPr sz="800">
+                <a:hlinkClick r:id="rId27"/>
+              </a:rPr>
+              <a:t>Lofar 1</a:t>
+            </a:r>
+          </a:p>
+        </p:txBody>
+      </p:sp>
+      <p:sp>
+        <p:nvSpPr>
+          <p:cNvPr id="21" name="Rounded Rectangle 20">
+            <a:hlinkClick r:id="rId28"/>
+          </p:cNvPr>
+          <p:cNvSpPr/>
+          <p:nvPr/>
+        </p:nvSpPr>
+        <p:spPr>
+          <a:xfrm>
+            <a:off x="9531705" y="2682240"/>
+            <a:ext cx="2200046" cy="365760"/>
+          </a:xfrm>
+          <a:prstGeom prst="roundRect">
+            <a:avLst/>
+          </a:prstGeom>
+          <a:solidFill>
+            <a:srgbClr val="E8EEF7"/>
+          </a:solidFill>
+          <a:ln>
+            <a:solidFill>
+              <a:srgbClr val="1F3A5F"/>
+            </a:solidFill>
+          </a:ln>
+        </p:spPr>
+        <p:style>
+          <a:lnRef idx="1">
+            <a:schemeClr val="accent1"/>
+          </a:lnRef>
+          <a:fillRef idx="3">
+            <a:schemeClr val="accent1"/>
+          </a:fillRef>
+          <a:effectRef idx="2">
+            <a:schemeClr val="accent1"/>
+          </a:effectRef>
+          <a:fontRef idx="minor">
+            <a:schemeClr val="lt1"/>
+          </a:fontRef>
+        </p:style>
+        <p:txBody>
+          <a:bodyPr rtlCol="0" anchor="ctr" lIns="45720" rIns="45720"/>
+          <a:lstStyle/>
+          <a:p>
+            <a:pPr algn="ctr"/>
+            <a:r>
+              <a:rPr sz="900">
+                <a:solidFill>
+                  <a:srgbClr val="1F3A5F"/>
+                </a:solidFill>
+              </a:rPr>
+              <a:t>Gram 13: Slave I contact bearing 010, codename Naboo</a:t>
+            </a:r>
+          </a:p>
+        </p:txBody>
+      </p:sp>
+      <p:sp>
+        <p:nvSpPr>
+          <p:cNvPr id="22" name="TextBox 21"/>
+          <p:cNvSpPr txBox="1"/>
+          <p:nvPr/>
+        </p:nvSpPr>
+        <p:spPr>
+          <a:xfrm>
+            <a:off x="9531705" y="3066288"/>
+            <a:ext cx="2200046" cy="1447800"/>
+          </a:xfrm>
+          <a:prstGeom prst="rect">
+            <a:avLst/>
+          </a:prstGeom>
+          <a:noFill/>
+        </p:spPr>
+        <p:txBody>
+          <a:bodyPr wrap="square">
+            <a:spAutoFit/>
+          </a:bodyPr>
+          <a:lstStyle/>
+          <a:p>
+            <a:r>
+              <a:rPr sz="800">
+                <a:hlinkClick r:id="rId29"/>
+              </a:rPr>
+              <a:t>Lofar 1</a:t>
+            </a:r>
+          </a:p>
+          <a:p>
+            <a:r>
+              <a:rPr sz="800">
+                <a:hlinkClick r:id="rId30"/>
+              </a:rPr>
+              <a:t>Lofar 2</a:t>
+            </a:r>
+          </a:p>
+        </p:txBody>
+      </p:sp>
+      <p:sp>
+        <p:nvSpPr>
+          <p:cNvPr id="23" name="Rounded Rectangle 22">
+            <a:hlinkClick r:id="rId31"/>
+          </p:cNvPr>
+          <p:cNvSpPr/>
+          <p:nvPr/>
+        </p:nvSpPr>
+        <p:spPr>
+          <a:xfrm>
+            <a:off x="365760" y="4632960"/>
+            <a:ext cx="2200046" cy="365760"/>
+          </a:xfrm>
+          <a:prstGeom prst="roundRect">
+            <a:avLst/>
+          </a:prstGeom>
+          <a:solidFill>
+            <a:srgbClr val="E8EEF7"/>
+          </a:solidFill>
+          <a:ln>
+            <a:solidFill>
+              <a:srgbClr val="1F3A5F"/>
+            </a:solidFill>
+          </a:ln>
+        </p:spPr>
+        <p:style>
+          <a:lnRef idx="1">
+            <a:schemeClr val="accent1"/>
+          </a:lnRef>
+          <a:fillRef idx="3">
+            <a:schemeClr val="accent1"/>
+          </a:fillRef>
+          <a:effectRef idx="2">
+            <a:schemeClr val="accent1"/>
+          </a:effectRef>
+          <a:fontRef idx="minor">
+            <a:schemeClr val="lt1"/>
+          </a:fontRef>
+        </p:style>
+        <p:txBody>
+          <a:bodyPr rtlCol="0" anchor="ctr" lIns="45720" rIns="45720"/>
+          <a:lstStyle/>
+          <a:p>
+            <a:pPr algn="ctr"/>
+            <a:r>
+              <a:rPr sz="900">
+                <a:solidFill>
+                  <a:srgbClr val="1F3A5F"/>
+                </a:solidFill>
+              </a:rPr>
+              <a:t>Gram 14: FR Galaxy-class, Category 2, Risa</a:t>
+            </a:r>
+          </a:p>
+        </p:txBody>
+      </p:sp>
+      <p:sp>
+        <p:nvSpPr>
+          <p:cNvPr id="24" name="TextBox 23"/>
+          <p:cNvSpPr txBox="1"/>
+          <p:nvPr/>
+        </p:nvSpPr>
+        <p:spPr>
+          <a:xfrm>
+            <a:off x="365760" y="5017008"/>
+            <a:ext cx="2200046" cy="1447800"/>
+          </a:xfrm>
+          <a:prstGeom prst="rect">
+            <a:avLst/>
+          </a:prstGeom>
+          <a:noFill/>
+        </p:spPr>
+        <p:txBody>
+          <a:bodyPr wrap="square">
+            <a:spAutoFit/>
+          </a:bodyPr>
+          <a:lstStyle/>
+          <a:p>
+            <a:r>
+              <a:rPr sz="800">
+                <a:hlinkClick r:id="rId32"/>
+              </a:rPr>
+              <a:t>Lofar 1</a:t>
+            </a:r>
+          </a:p>
+        </p:txBody>
+      </p:sp>
+      <p:sp>
+        <p:nvSpPr>
+          <p:cNvPr id="25" name="Rounded Rectangle 24">
+            <a:hlinkClick r:id="rId33"/>
+          </p:cNvPr>
+          <p:cNvSpPr/>
+          <p:nvPr/>
+        </p:nvSpPr>
+        <p:spPr>
+          <a:xfrm>
+            <a:off x="2657246" y="4632960"/>
+            <a:ext cx="2200046" cy="365760"/>
+          </a:xfrm>
+          <a:prstGeom prst="roundRect">
+            <a:avLst/>
+          </a:prstGeom>
+          <a:solidFill>
+            <a:srgbClr val="E8EEF7"/>
+          </a:solidFill>
+          <a:ln>
+            <a:solidFill>
+              <a:srgbClr val="1F3A5F"/>
+            </a:solidFill>
+          </a:ln>
+        </p:spPr>
+        <p:style>
+          <a:lnRef idx="1">
+            <a:schemeClr val="accent1"/>
+          </a:lnRef>
+          <a:fillRef idx="3">
+            <a:schemeClr val="accent1"/>
+          </a:fillRef>
+          <a:effectRef idx="2">
+            <a:schemeClr val="accent1"/>
+          </a:effectRef>
+          <a:fontRef idx="minor">
+            <a:schemeClr val="lt1"/>
+          </a:fontRef>
+        </p:style>
+        <p:txBody>
+          <a:bodyPr rtlCol="0" anchor="ctr" lIns="45720" rIns="45720"/>
+          <a:lstStyle/>
+          <a:p>
+            <a:pPr algn="ctr"/>
+            <a:r>
+              <a:rPr sz="900">
+                <a:solidFill>
+                  <a:srgbClr val="1F3A5F"/>
+                </a:solidFill>
+              </a:rPr>
+              <a:t>Gram 15: FR Y-wing, Category 4, Vulcan</a:t>
+            </a:r>
+          </a:p>
+        </p:txBody>
+      </p:sp>
+      <p:sp>
+        <p:nvSpPr>
+          <p:cNvPr id="26" name="TextBox 25"/>
+          <p:cNvSpPr txBox="1"/>
+          <p:nvPr/>
+        </p:nvSpPr>
+        <p:spPr>
+          <a:xfrm>
+            <a:off x="2657246" y="5017008"/>
+            <a:ext cx="2200046" cy="1447800"/>
+          </a:xfrm>
+          <a:prstGeom prst="rect">
+            <a:avLst/>
+          </a:prstGeom>
+          <a:noFill/>
+        </p:spPr>
+        <p:txBody>
+          <a:bodyPr wrap="square">
+            <a:spAutoFit/>
+          </a:bodyPr>
+          <a:lstStyle/>
+          <a:p>
+            <a:r>
+              <a:rPr sz="800">
+                <a:hlinkClick r:id="rId34"/>
+              </a:rPr>
+              <a:t>Lofar 1</a:t>
+            </a:r>
+          </a:p>
+          <a:p>
+            <a:r>
+              <a:rPr sz="800">
+                <a:hlinkClick r:id="rId35"/>
+              </a:rPr>
+              <a:t>Lofar 2</a:t>
+            </a:r>
+          </a:p>
+          <a:p>
+            <a:r>
+              <a:rPr sz="800">
+                <a:hlinkClick r:id="rId36"/>
+              </a:rPr>
+              <a:t>Lofar 3</a:t>
+            </a:r>
+          </a:p>
+          <a:p>
+            <a:r>
+              <a:rPr sz="800">
+                <a:hlinkClick r:id="rId37"/>
+              </a:rPr>
+              <a:t>Lofar 4</a:t>
+            </a:r>
+          </a:p>
+        </p:txBody>
+      </p:sp>
+      <p:sp>
+        <p:nvSpPr>
+          <p:cNvPr id="27" name="Rounded Rectangle 26">
+            <a:hlinkClick r:id="rId38"/>
+          </p:cNvPr>
+          <p:cNvSpPr/>
+          <p:nvPr/>
+        </p:nvSpPr>
+        <p:spPr>
+          <a:xfrm>
+            <a:off x="4948732" y="4632960"/>
+            <a:ext cx="2200046" cy="365760"/>
+          </a:xfrm>
+          <a:prstGeom prst="roundRect">
+            <a:avLst/>
+          </a:prstGeom>
+          <a:solidFill>
+            <a:srgbClr val="E8EEF7"/>
+          </a:solidFill>
+          <a:ln>
+            <a:solidFill>
+              <a:srgbClr val="1F3A5F"/>
+            </a:solidFill>
+          </a:ln>
+        </p:spPr>
+        <p:style>
+          <a:lnRef idx="1">
+            <a:schemeClr val="accent1"/>
+          </a:lnRef>
+          <a:fillRef idx="3">
+            <a:schemeClr val="accent1"/>
+          </a:fillRef>
+          <a:effectRef idx="2">
+            <a:schemeClr val="accent1"/>
+          </a:effectRef>
+          <a:fontRef idx="minor">
+            <a:schemeClr val="lt1"/>
+          </a:fontRef>
+        </p:style>
+        <p:txBody>
+          <a:bodyPr rtlCol="0" anchor="ctr" lIns="45720" rIns="45720"/>
+          <a:lstStyle/>
+          <a:p>
+            <a:pPr algn="ctr"/>
+            <a:r>
+              <a:rPr sz="900">
+                <a:solidFill>
+                  <a:srgbClr val="1F3A5F"/>
+                </a:solidFill>
+              </a:rPr>
+              <a:t>Gram 16: FR Tantive IV, Category 2, Dagobah</a:t>
+            </a:r>
+          </a:p>
+        </p:txBody>
+      </p:sp>
+      <p:sp>
+        <p:nvSpPr>
+          <p:cNvPr id="28" name="TextBox 27"/>
+          <p:cNvSpPr txBox="1"/>
+          <p:nvPr/>
+        </p:nvSpPr>
+        <p:spPr>
+          <a:xfrm>
+            <a:off x="4948732" y="5017008"/>
+            <a:ext cx="2200046" cy="1447800"/>
+          </a:xfrm>
+          <a:prstGeom prst="rect">
+            <a:avLst/>
+          </a:prstGeom>
+          <a:noFill/>
+        </p:spPr>
+        <p:txBody>
+          <a:bodyPr wrap="square">
+            <a:spAutoFit/>
+          </a:bodyPr>
+          <a:lstStyle/>
+          <a:p>
+            <a:r>
+              <a:rPr sz="800">
+                <a:hlinkClick r:id="rId39"/>
+              </a:rPr>
+              <a:t>Lofar 1</a:t>
+            </a:r>
+          </a:p>
+          <a:p>
+            <a:r>
+              <a:rPr sz="800">
+                <a:hlinkClick r:id="rId40"/>
+              </a:rPr>
+              <a:t>Lofar 2</a:t>
+            </a:r>
+          </a:p>
+          <a:p>
+            <a:r>
+              <a:rPr sz="800">
+                <a:hlinkClick r:id="rId41"/>
+              </a:rPr>
+              <a:t>Lofar 3</a:t>
+            </a:r>
+          </a:p>
+        </p:txBody>
+      </p:sp>
+      <p:sp>
+        <p:nvSpPr>
+          <p:cNvPr id="29" name="Rounded Rectangle 28">
+            <a:hlinkClick r:id="rId42"/>
+          </p:cNvPr>
+          <p:cNvSpPr/>
+          <p:nvPr/>
+        </p:nvSpPr>
+        <p:spPr>
+          <a:xfrm>
+            <a:off x="7240219" y="4632960"/>
+            <a:ext cx="2200046" cy="365760"/>
+          </a:xfrm>
+          <a:prstGeom prst="roundRect">
+            <a:avLst/>
+          </a:prstGeom>
+          <a:solidFill>
+            <a:srgbClr val="E8EEF7"/>
+          </a:solidFill>
+          <a:ln>
+            <a:solidFill>
+              <a:srgbClr val="1F3A5F"/>
+            </a:solidFill>
+          </a:ln>
+        </p:spPr>
+        <p:style>
+          <a:lnRef idx="1">
+            <a:schemeClr val="accent1"/>
+          </a:lnRef>
+          <a:fillRef idx="3">
+            <a:schemeClr val="accent1"/>
+          </a:fillRef>
+          <a:effectRef idx="2">
+            <a:schemeClr val="accent1"/>
+          </a:effectRef>
+          <a:fontRef idx="minor">
+            <a:schemeClr val="lt1"/>
+          </a:fontRef>
+        </p:style>
+        <p:txBody>
+          <a:bodyPr rtlCol="0" anchor="ctr" lIns="45720" rIns="45720"/>
+          <a:lstStyle/>
+          <a:p>
+            <a:pPr algn="ctr"/>
+            <a:r>
+              <a:rPr sz="900">
+                <a:solidFill>
+                  <a:srgbClr val="1F3A5F"/>
+                </a:solidFill>
+              </a:rPr>
+              <a:t>Gram 17: FR Prometheus, Category 3, Hoth</a:t>
+            </a:r>
+          </a:p>
+        </p:txBody>
+      </p:sp>
+      <p:sp>
+        <p:nvSpPr>
+          <p:cNvPr id="30" name="TextBox 29"/>
+          <p:cNvSpPr txBox="1"/>
+          <p:nvPr/>
+        </p:nvSpPr>
+        <p:spPr>
+          <a:xfrm>
+            <a:off x="7240219" y="5017008"/>
+            <a:ext cx="2200046" cy="1447800"/>
+          </a:xfrm>
+          <a:prstGeom prst="rect">
+            <a:avLst/>
+          </a:prstGeom>
+          <a:noFill/>
+        </p:spPr>
+        <p:txBody>
+          <a:bodyPr wrap="square">
+            <a:spAutoFit/>
+          </a:bodyPr>
+          <a:lstStyle/>
+          <a:p>
+            <a:r>
+              <a:rPr sz="800">
+                <a:hlinkClick r:id="rId43"/>
+              </a:rPr>
+              <a:t>Lofar 1</a:t>
+            </a:r>
+          </a:p>
+          <a:p>
+            <a:r>
+              <a:rPr sz="800">
+                <a:hlinkClick r:id="rId44"/>
+              </a:rPr>
+              <a:t>Lofar 2</a:t>
+            </a:r>
+          </a:p>
+        </p:txBody>
+      </p:sp>
+      <p:sp>
+        <p:nvSpPr>
+          <p:cNvPr id="31" name="Rounded Rectangle 30">
+            <a:hlinkClick r:id="rId45"/>
+          </p:cNvPr>
+          <p:cNvSpPr/>
+          <p:nvPr/>
+        </p:nvSpPr>
+        <p:spPr>
+          <a:xfrm>
+            <a:off x="9531705" y="4632960"/>
+            <a:ext cx="2200046" cy="365760"/>
+          </a:xfrm>
+          <a:prstGeom prst="roundRect">
+            <a:avLst/>
+          </a:prstGeom>
+          <a:solidFill>
+            <a:srgbClr val="E8EEF7"/>
+          </a:solidFill>
+          <a:ln>
+            <a:solidFill>
+              <a:srgbClr val="1F3A5F"/>
+            </a:solidFill>
+          </a:ln>
+        </p:spPr>
+        <p:style>
+          <a:lnRef idx="1">
+            <a:schemeClr val="accent1"/>
+          </a:lnRef>
+          <a:fillRef idx="3">
+            <a:schemeClr val="accent1"/>
+          </a:fillRef>
+          <a:effectRef idx="2">
+            <a:schemeClr val="accent1"/>
+          </a:effectRef>
+          <a:fontRef idx="minor">
+            <a:schemeClr val="lt1"/>
+          </a:fontRef>
+        </p:style>
+        <p:txBody>
+          <a:bodyPr rtlCol="0" anchor="ctr" lIns="45720" rIns="45720"/>
+          <a:lstStyle/>
+          <a:p>
+            <a:pPr algn="ctr"/>
+            <a:r>
+              <a:rPr sz="900">
+                <a:solidFill>
+                  <a:srgbClr val="1F3A5F"/>
+                </a:solidFill>
+              </a:rPr>
+              <a:t>Gram 18: FR A-wing, Category 2, Hoth</a:t>
+            </a:r>
+          </a:p>
+        </p:txBody>
+      </p:sp>
+      <p:sp>
+        <p:nvSpPr>
+          <p:cNvPr id="32" name="TextBox 31"/>
+          <p:cNvSpPr txBox="1"/>
+          <p:nvPr/>
+        </p:nvSpPr>
+        <p:spPr>
+          <a:xfrm>
+            <a:off x="9531705" y="5017008"/>
+            <a:ext cx="2200046" cy="1447800"/>
+          </a:xfrm>
+          <a:prstGeom prst="rect">
+            <a:avLst/>
+          </a:prstGeom>
+          <a:noFill/>
+        </p:spPr>
+        <p:txBody>
+          <a:bodyPr wrap="square">
+            <a:spAutoFit/>
+          </a:bodyPr>
+          <a:lstStyle/>
+          <a:p>
+            <a:r>
+              <a:rPr sz="800">
+                <a:hlinkClick r:id="rId46"/>
+              </a:rPr>
+              <a:t>Lofar 1</a:t>
+            </a:r>
+          </a:p>
+          <a:p>
+            <a:r>
+              <a:rPr sz="800">
+                <a:hlinkClick r:id="rId47"/>
+              </a:rPr>
+              <a:t>Lofar 2</a:t>
+            </a:r>
+          </a:p>
+          <a:p>
+            <a:r>
+              <a:rPr sz="800">
+                <a:hlinkClick r:id="rId48"/>
+              </a:rPr>
+              <a:t>Lofar 3</a:t>
             </a:r>
           </a:p>
         </p:txBody>
@@ -3223,18 +4630,18 @@
                   <a:srgbClr val="FFFFFF"/>
                 </a:solidFill>
               </a:rPr>
-              <a:t>Instructor Progress Test 4 Grams — Page 1 of 2</a:t>
-            </a:r>
-          </a:p>
-        </p:txBody>
-      </p:sp>
-      <p:sp>
-        <p:nvSpPr>
-          <p:cNvPr id="3" name="Rounded Rectangle 2"/>
+              <a:t>Instructor Progress Test 4 Grams — Page 2 of 2</a:t>
+            </a:r>
+          </a:p>
+        </p:txBody>
+      </p:sp>
+      <p:sp>
+        <p:nvSpPr>
+          <p:cNvPr id="3" name="Rounded Rectangle 2">
+            <a:hlinkClick r:id="rId2"/>
+          </p:cNvPr>
           <p:cNvSpPr/>
-          <p:nvPr>
-            <a:hlinkClick r:id="rId2"/>
-          </p:nvPr>
+          <p:nvPr/>
         </p:nvSpPr>
         <p:spPr>
           <a:xfrm>
@@ -3278,7 +4685,7 @@
                   <a:srgbClr val="1F3A5F"/>
                 </a:solidFill>
               </a:rPr>
-              <a:t>Gram 1: FR A-wing, Category 2, Bespin</a:t>
+              <a:t>Gram 19: Acclamator-class contact bearing 019, codename Defiant</a:t>
             </a:r>
           </a:p>
         </p:txBody>
@@ -3332,11 +4739,11 @@
       </p:sp>
       <p:sp>
         <p:nvSpPr>
-          <p:cNvPr id="5" name="Rounded Rectangle 4"/>
+          <p:cNvPr id="5" name="Rounded Rectangle 4">
+            <a:hlinkClick r:id="rId6"/>
+          </p:cNvPr>
           <p:cNvSpPr/>
-          <p:nvPr>
-            <a:hlinkClick r:id="rId6"/>
-          </p:nvPr>
+          <p:nvPr/>
         </p:nvSpPr>
         <p:spPr>
           <a:xfrm>
@@ -3380,7 +4787,7 @@
                   <a:srgbClr val="1F3A5F"/>
                 </a:solidFill>
               </a:rPr>
-              <a:t>Gram 2: Lambda Shuttle contact bearing 219, codename Cardassia</a:t>
+              <a:t>Gram 21: Akira-class contact bearing 296, codename Bespin</a:t>
             </a:r>
           </a:p>
         </p:txBody>
@@ -3418,11 +4825,11 @@
       </p:sp>
       <p:sp>
         <p:nvSpPr>
-          <p:cNvPr id="7" name="Rounded Rectangle 6"/>
+          <p:cNvPr id="7" name="Rounded Rectangle 6">
+            <a:hlinkClick r:id="rId8"/>
+          </p:cNvPr>
           <p:cNvSpPr/>
-          <p:nvPr>
-            <a:hlinkClick r:id="rId8"/>
-          </p:nvPr>
+          <p:nvPr/>
         </p:nvSpPr>
         <p:spPr>
           <a:xfrm>
@@ -3466,7 +4873,7 @@
                   <a:srgbClr val="1F3A5F"/>
                 </a:solidFill>
               </a:rPr>
-              <a:t>Gram 4: FR Acclamator-class, Category 1, Trill</a:t>
+              <a:t>Gram 23: FR Miranda-class, Category 3, Trill</a:t>
             </a:r>
           </a:p>
         </p:txBody>
@@ -3500,23 +4907,15 @@
               <a:t>Lofar 1</a:t>
             </a:r>
           </a:p>
-          <a:p>
-            <a:r>
-              <a:rPr sz="800">
-                <a:hlinkClick r:id="rId10"/>
-              </a:rPr>
-              <a:t>Lofar 2</a:t>
-            </a:r>
-          </a:p>
-        </p:txBody>
-      </p:sp>
-      <p:sp>
-        <p:nvSpPr>
-          <p:cNvPr id="9" name="Rounded Rectangle 8"/>
+        </p:txBody>
+      </p:sp>
+      <p:sp>
+        <p:nvSpPr>
+          <p:cNvPr id="9" name="Rounded Rectangle 8">
+            <a:hlinkClick r:id="rId10"/>
+          </p:cNvPr>
           <p:cNvSpPr/>
-          <p:nvPr>
-            <a:hlinkClick r:id="rId11"/>
-          </p:nvPr>
+          <p:nvPr/>
         </p:nvSpPr>
         <p:spPr>
           <a:xfrm>
@@ -3560,7 +4959,7 @@
                   <a:srgbClr val="1F3A5F"/>
                 </a:solidFill>
               </a:rPr>
-              <a:t>Gram 5: Nebulon-B contact bearing 084, codename Risa</a:t>
+              <a:t>Gram 24: FR Nebula-class, Category 4, Coruscant</a:t>
             </a:r>
           </a:p>
         </p:txBody>
@@ -3589,9 +4988,17 @@
           <a:p>
             <a:r>
               <a:rPr sz="800">
+                <a:hlinkClick r:id="rId11"/>
+              </a:rPr>
+              <a:t>Lofar 1</a:t>
+            </a:r>
+          </a:p>
+          <a:p>
+            <a:r>
+              <a:rPr sz="800">
                 <a:hlinkClick r:id="rId12"/>
               </a:rPr>
-              <a:t>Lofar 1</a:t>
+              <a:t>Lofar 2</a:t>
             </a:r>
           </a:p>
           <a:p>
@@ -3599,14 +5006,6 @@
               <a:rPr sz="800">
                 <a:hlinkClick r:id="rId13"/>
               </a:rPr>
-              <a:t>Lofar 2</a:t>
-            </a:r>
-          </a:p>
-          <a:p>
-            <a:r>
-              <a:rPr sz="800">
-                <a:hlinkClick r:id="rId14"/>
-              </a:rPr>
               <a:t>Lofar 3</a:t>
             </a:r>
           </a:p>
@@ -3614,11 +5013,11 @@
       </p:sp>
       <p:sp>
         <p:nvSpPr>
-          <p:cNvPr id="11" name="Rounded Rectangle 10"/>
+          <p:cNvPr id="11" name="Rounded Rectangle 10">
+            <a:hlinkClick r:id="rId14"/>
+          </p:cNvPr>
           <p:cNvSpPr/>
-          <p:nvPr>
-            <a:hlinkClick r:id="rId15"/>
-          </p:nvPr>
+          <p:nvPr/>
         </p:nvSpPr>
         <p:spPr>
           <a:xfrm>
@@ -3662,7 +5061,7 @@
                   <a:srgbClr val="1F3A5F"/>
                 </a:solidFill>
               </a:rPr>
-              <a:t>Gram 6: Discovery contact bearing 136, codename Tantive</a:t>
+              <a:t>Gram 25: FR Mon Calamari Cruiser, Category 1, Bespin</a:t>
             </a:r>
           </a:p>
         </p:txBody>
@@ -3691,16 +5090,16 @@
           <a:p>
             <a:r>
               <a:rPr sz="800">
+                <a:hlinkClick r:id="rId15"/>
+              </a:rPr>
+              <a:t>Lofar 1</a:t>
+            </a:r>
+          </a:p>
+          <a:p>
+            <a:r>
+              <a:rPr sz="800">
                 <a:hlinkClick r:id="rId16"/>
               </a:rPr>
-              <a:t>Lofar 1</a:t>
-            </a:r>
-          </a:p>
-          <a:p>
-            <a:r>
-              <a:rPr sz="800">
-                <a:hlinkClick r:id="rId17"/>
-              </a:rPr>
               <a:t>Lofar 2</a:t>
             </a:r>
           </a:p>
@@ -3708,11 +5107,11 @@
       </p:sp>
       <p:sp>
         <p:nvSpPr>
-          <p:cNvPr id="13" name="Rounded Rectangle 12"/>
+          <p:cNvPr id="13" name="Rounded Rectangle 12">
+            <a:hlinkClick r:id="rId17"/>
+          </p:cNvPr>
           <p:cNvSpPr/>
-          <p:nvPr>
-            <a:hlinkClick r:id="rId18"/>
-          </p:nvPr>
+          <p:nvPr/>
         </p:nvSpPr>
         <p:spPr>
           <a:xfrm>
@@ -3756,7 +5155,7 @@
                   <a:srgbClr val="1F3A5F"/>
                 </a:solidFill>
               </a:rPr>
-              <a:t>Gram 7: FR Tantive IV, Category 3, Vulcan</a:t>
+              <a:t>Gram 26: FR Enterprise, Category 3, Betazed</a:t>
             </a:r>
           </a:p>
         </p:txBody>
@@ -3785,36 +5184,28 @@
           <a:p>
             <a:r>
               <a:rPr sz="800">
+                <a:hlinkClick r:id="rId18"/>
+              </a:rPr>
+              <a:t>Lofar 1</a:t>
+            </a:r>
+          </a:p>
+          <a:p>
+            <a:r>
+              <a:rPr sz="800">
                 <a:hlinkClick r:id="rId19"/>
               </a:rPr>
-              <a:t>Lofar 1</a:t>
-            </a:r>
-          </a:p>
-          <a:p>
-            <a:r>
-              <a:rPr sz="800">
-                <a:hlinkClick r:id="rId20"/>
-              </a:rPr>
               <a:t>Lofar 2</a:t>
             </a:r>
           </a:p>
-          <a:p>
-            <a:r>
-              <a:rPr sz="800">
-                <a:hlinkClick r:id="rId21"/>
-              </a:rPr>
-              <a:t>Lofar 3</a:t>
-            </a:r>
-          </a:p>
-        </p:txBody>
-      </p:sp>
-      <p:sp>
-        <p:nvSpPr>
-          <p:cNvPr id="15" name="Rounded Rectangle 14"/>
+        </p:txBody>
+      </p:sp>
+      <p:sp>
+        <p:nvSpPr>
+          <p:cNvPr id="15" name="Rounded Rectangle 14">
+            <a:hlinkClick r:id="rId20"/>
+          </p:cNvPr>
           <p:cNvSpPr/>
-          <p:nvPr>
-            <a:hlinkClick r:id="rId22"/>
-          </p:nvPr>
+          <p:nvPr/>
         </p:nvSpPr>
         <p:spPr>
           <a:xfrm>
@@ -3858,7 +5249,7 @@
                   <a:srgbClr val="1F3A5F"/>
                 </a:solidFill>
               </a:rPr>
-              <a:t>Gram 8: FR Devastator, Category 3, Yavin</a:t>
+              <a:t>Gram 27: FR Excelsior, Category 1, Romulus</a:t>
             </a:r>
           </a:p>
         </p:txBody>
@@ -3887,20 +5278,44 @@
           <a:p>
             <a:r>
               <a:rPr sz="800">
+                <a:hlinkClick r:id="rId21"/>
+              </a:rPr>
+              <a:t>Lofar 1</a:t>
+            </a:r>
+          </a:p>
+          <a:p>
+            <a:r>
+              <a:rPr sz="800">
+                <a:hlinkClick r:id="rId22"/>
+              </a:rPr>
+              <a:t>Lofar 2</a:t>
+            </a:r>
+          </a:p>
+          <a:p>
+            <a:r>
+              <a:rPr sz="800">
                 <a:hlinkClick r:id="rId23"/>
               </a:rPr>
-              <a:t>Lofar 1</a:t>
-            </a:r>
-          </a:p>
-        </p:txBody>
-      </p:sp>
-      <p:sp>
-        <p:nvSpPr>
-          <p:cNvPr id="17" name="Rounded Rectangle 16"/>
+              <a:t>Lofar 3</a:t>
+            </a:r>
+          </a:p>
+          <a:p>
+            <a:r>
+              <a:rPr sz="800">
+                <a:hlinkClick r:id="rId24"/>
+              </a:rPr>
+              <a:t>Lofar 4</a:t>
+            </a:r>
+          </a:p>
+        </p:txBody>
+      </p:sp>
+      <p:sp>
+        <p:nvSpPr>
+          <p:cNvPr id="17" name="Rounded Rectangle 16">
+            <a:hlinkClick r:id="rId25"/>
+          </p:cNvPr>
           <p:cNvSpPr/>
-          <p:nvPr>
-            <a:hlinkClick r:id="rId24"/>
-          </p:nvPr>
+          <p:nvPr/>
         </p:nvSpPr>
         <p:spPr>
           <a:xfrm>
@@ -3944,7 +5359,7 @@
                   <a:srgbClr val="1F3A5F"/>
                 </a:solidFill>
               </a:rPr>
-              <a:t>Gram 11: FR Enterprise, Category 2, Mustafar</a:t>
+              <a:t>Gram 28: FR Devastator, Category 4, Risa</a:t>
             </a:r>
           </a:p>
         </p:txBody>
@@ -3973,20 +5388,44 @@
           <a:p>
             <a:r>
               <a:rPr sz="800">
-                <a:hlinkClick r:id="rId25"/>
+                <a:hlinkClick r:id="rId26"/>
               </a:rPr>
               <a:t>Lofar 1</a:t>
             </a:r>
           </a:p>
-        </p:txBody>
-      </p:sp>
-      <p:sp>
-        <p:nvSpPr>
-          <p:cNvPr id="19" name="Rounded Rectangle 18"/>
+          <a:p>
+            <a:r>
+              <a:rPr sz="800">
+                <a:hlinkClick r:id="rId27"/>
+              </a:rPr>
+              <a:t>Lofar 2</a:t>
+            </a:r>
+          </a:p>
+          <a:p>
+            <a:r>
+              <a:rPr sz="800">
+                <a:hlinkClick r:id="rId28"/>
+              </a:rPr>
+              <a:t>Lofar 3</a:t>
+            </a:r>
+          </a:p>
+          <a:p>
+            <a:r>
+              <a:rPr sz="800">
+                <a:hlinkClick r:id="rId29"/>
+              </a:rPr>
+              <a:t>Lofar 4</a:t>
+            </a:r>
+          </a:p>
+        </p:txBody>
+      </p:sp>
+      <p:sp>
+        <p:nvSpPr>
+          <p:cNvPr id="19" name="Rounded Rectangle 18">
+            <a:hlinkClick r:id="rId30"/>
+          </p:cNvPr>
           <p:cNvSpPr/>
-          <p:nvPr>
-            <a:hlinkClick r:id="rId26"/>
-          </p:nvPr>
+          <p:nvPr/>
         </p:nvSpPr>
         <p:spPr>
           <a:xfrm>
@@ -4030,7 +5469,7 @@
                   <a:srgbClr val="1F3A5F"/>
                 </a:solidFill>
               </a:rPr>
-              <a:t>Gram 12: FR Slave I, Category 4, Naboo</a:t>
+              <a:t>Gram 29: Prometheus contact bearing 178, codename Trill</a:t>
             </a:r>
           </a:p>
         </p:txBody>
@@ -4059,20 +5498,36 @@
           <a:p>
             <a:r>
               <a:rPr sz="800">
-                <a:hlinkClick r:id="rId27"/>
+                <a:hlinkClick r:id="rId31"/>
               </a:rPr>
               <a:t>Lofar 1</a:t>
             </a:r>
           </a:p>
-        </p:txBody>
-      </p:sp>
-      <p:sp>
-        <p:nvSpPr>
-          <p:cNvPr id="21" name="Rounded Rectangle 20"/>
+          <a:p>
+            <a:r>
+              <a:rPr sz="800">
+                <a:hlinkClick r:id="rId32"/>
+              </a:rPr>
+              <a:t>Lofar 2</a:t>
+            </a:r>
+          </a:p>
+          <a:p>
+            <a:r>
+              <a:rPr sz="800">
+                <a:hlinkClick r:id="rId33"/>
+              </a:rPr>
+              <a:t>Lofar 3</a:t>
+            </a:r>
+          </a:p>
+        </p:txBody>
+      </p:sp>
+      <p:sp>
+        <p:nvSpPr>
+          <p:cNvPr id="21" name="Rounded Rectangle 20">
+            <a:hlinkClick r:id="rId34"/>
+          </p:cNvPr>
           <p:cNvSpPr/>
-          <p:nvPr>
-            <a:hlinkClick r:id="rId28"/>
-          </p:nvPr>
+          <p:nvPr/>
         </p:nvSpPr>
         <p:spPr>
           <a:xfrm>
@@ -4116,7 +5571,7 @@
                   <a:srgbClr val="1F3A5F"/>
                 </a:solidFill>
               </a:rPr>
-              <a:t>Gram 13: Slave I contact bearing 010, codename Naboo</a:t>
+              <a:t>Gram 30: FR Ghost, Category 2, Risa</a:t>
             </a:r>
           </a:p>
         </p:txBody>
@@ -4145,28 +5600,20 @@
           <a:p>
             <a:r>
               <a:rPr sz="800">
-                <a:hlinkClick r:id="rId29"/>
+                <a:hlinkClick r:id="rId35"/>
               </a:rPr>
               <a:t>Lofar 1</a:t>
             </a:r>
           </a:p>
-          <a:p>
-            <a:r>
-              <a:rPr sz="800">
-                <a:hlinkClick r:id="rId30"/>
-              </a:rPr>
-              <a:t>Lofar 2</a:t>
-            </a:r>
-          </a:p>
-        </p:txBody>
-      </p:sp>
-      <p:sp>
-        <p:nvSpPr>
-          <p:cNvPr id="23" name="Rounded Rectangle 22"/>
+        </p:txBody>
+      </p:sp>
+      <p:sp>
+        <p:nvSpPr>
+          <p:cNvPr id="23" name="Rounded Rectangle 22">
+            <a:hlinkClick r:id="rId36"/>
+          </p:cNvPr>
           <p:cNvSpPr/>
-          <p:nvPr>
-            <a:hlinkClick r:id="rId31"/>
-          </p:nvPr>
+          <p:nvPr/>
         </p:nvSpPr>
         <p:spPr>
           <a:xfrm>
@@ -4210,7 +5657,7 @@
                   <a:srgbClr val="1F3A5F"/>
                 </a:solidFill>
               </a:rPr>
-              <a:t>Gram 14: FR Galaxy-class, Category 2, Risa</a:t>
+              <a:t>Gram 32: FR Defiant, Category 4, Kobol</a:t>
             </a:r>
           </a:p>
         </p:txBody>
@@ -4239,7 +5686,7 @@
           <a:p>
             <a:r>
               <a:rPr sz="800">
-                <a:hlinkClick r:id="rId32"/>
+                <a:hlinkClick r:id="rId37"/>
               </a:rPr>
               <a:t>Lofar 1</a:t>
             </a:r>
@@ -4248,11 +5695,11 @@
       </p:sp>
       <p:sp>
         <p:nvSpPr>
-          <p:cNvPr id="25" name="Rounded Rectangle 24"/>
+          <p:cNvPr id="25" name="Rounded Rectangle 24">
+            <a:hlinkClick r:id="rId38"/>
+          </p:cNvPr>
           <p:cNvSpPr/>
-          <p:nvPr>
-            <a:hlinkClick r:id="rId33"/>
-          </p:nvPr>
+          <p:nvPr/>
         </p:nvSpPr>
         <p:spPr>
           <a:xfrm>
@@ -4296,7 +5743,7 @@
                   <a:srgbClr val="1F3A5F"/>
                 </a:solidFill>
               </a:rPr>
-              <a:t>Gram 15: FR Y-wing, Category 4, Vulcan</a:t>
+              <a:t>Gram 33: FR Ghost, Category 4, Risa</a:t>
             </a:r>
           </a:p>
         </p:txBody>
@@ -4325,7 +5772,7 @@
           <a:p>
             <a:r>
               <a:rPr sz="800">
-                <a:hlinkClick r:id="rId34"/>
+                <a:hlinkClick r:id="rId39"/>
               </a:rPr>
               <a:t>Lofar 1</a:t>
             </a:r>
@@ -4333,7 +5780,7 @@
           <a:p>
             <a:r>
               <a:rPr sz="800">
-                <a:hlinkClick r:id="rId35"/>
+                <a:hlinkClick r:id="rId40"/>
               </a:rPr>
               <a:t>Lofar 2</a:t>
             </a:r>
@@ -4341,7 +5788,7 @@
           <a:p>
             <a:r>
               <a:rPr sz="800">
-                <a:hlinkClick r:id="rId36"/>
+                <a:hlinkClick r:id="rId41"/>
               </a:rPr>
               <a:t>Lofar 3</a:t>
             </a:r>
@@ -4349,7 +5796,7 @@
           <a:p>
             <a:r>
               <a:rPr sz="800">
-                <a:hlinkClick r:id="rId37"/>
+                <a:hlinkClick r:id="rId42"/>
               </a:rPr>
               <a:t>Lofar 4</a:t>
             </a:r>
@@ -4358,11 +5805,11 @@
       </p:sp>
       <p:sp>
         <p:nvSpPr>
-          <p:cNvPr id="27" name="Rounded Rectangle 26"/>
+          <p:cNvPr id="27" name="Rounded Rectangle 26">
+            <a:hlinkClick r:id="rId43"/>
+          </p:cNvPr>
           <p:cNvSpPr/>
-          <p:nvPr>
-            <a:hlinkClick r:id="rId38"/>
-          </p:nvPr>
+          <p:nvPr/>
         </p:nvSpPr>
         <p:spPr>
           <a:xfrm>
@@ -4406,7 +5853,7 @@
                   <a:srgbClr val="1F3A5F"/>
                 </a:solidFill>
               </a:rPr>
-              <a:t>Gram 16: FR Tantive IV, Category 2, Dagobah</a:t>
+              <a:t>Gram 34: FR Reliant, Category 3, Risa</a:t>
             </a:r>
           </a:p>
         </p:txBody>
@@ -4435,7 +5882,7 @@
           <a:p>
             <a:r>
               <a:rPr sz="800">
-                <a:hlinkClick r:id="rId39"/>
+                <a:hlinkClick r:id="rId44"/>
               </a:rPr>
               <a:t>Lofar 1</a:t>
             </a:r>
@@ -4443,7 +5890,7 @@
           <a:p>
             <a:r>
               <a:rPr sz="800">
-                <a:hlinkClick r:id="rId40"/>
+                <a:hlinkClick r:id="rId45"/>
               </a:rPr>
               <a:t>Lofar 2</a:t>
             </a:r>
@@ -4451,20 +5898,28 @@
           <a:p>
             <a:r>
               <a:rPr sz="800">
-                <a:hlinkClick r:id="rId41"/>
+                <a:hlinkClick r:id="rId46"/>
               </a:rPr>
               <a:t>Lofar 3</a:t>
             </a:r>
           </a:p>
-        </p:txBody>
-      </p:sp>
-      <p:sp>
-        <p:nvSpPr>
-          <p:cNvPr id="29" name="Rounded Rectangle 28"/>
+          <a:p>
+            <a:r>
+              <a:rPr sz="800">
+                <a:hlinkClick r:id="rId47"/>
+              </a:rPr>
+              <a:t>Lofar 4</a:t>
+            </a:r>
+          </a:p>
+        </p:txBody>
+      </p:sp>
+      <p:sp>
+        <p:nvSpPr>
+          <p:cNvPr id="29" name="Rounded Rectangle 28">
+            <a:hlinkClick r:id="rId48"/>
+          </p:cNvPr>
           <p:cNvSpPr/>
-          <p:nvPr>
-            <a:hlinkClick r:id="rId42"/>
-          </p:nvPr>
+          <p:nvPr/>
         </p:nvSpPr>
         <p:spPr>
           <a:xfrm>
@@ -4508,7 +5963,7 @@
                   <a:srgbClr val="1F3A5F"/>
                 </a:solidFill>
               </a:rPr>
-              <a:t>Gram 17: FR Prometheus, Category 3, Hoth</a:t>
+              <a:t>Gram 35: FR Slave I, Category 3, Dagobah</a:t>
             </a:r>
           </a:p>
         </p:txBody>
@@ -4537,28 +5992,20 @@
           <a:p>
             <a:r>
               <a:rPr sz="800">
-                <a:hlinkClick r:id="rId43"/>
+                <a:hlinkClick r:id="rId49"/>
               </a:rPr>
               <a:t>Lofar 1</a:t>
             </a:r>
           </a:p>
-          <a:p>
-            <a:r>
-              <a:rPr sz="800">
-                <a:hlinkClick r:id="rId44"/>
-              </a:rPr>
-              <a:t>Lofar 2</a:t>
-            </a:r>
-          </a:p>
-        </p:txBody>
-      </p:sp>
-      <p:sp>
-        <p:nvSpPr>
-          <p:cNvPr id="31" name="Rounded Rectangle 30"/>
+        </p:txBody>
+      </p:sp>
+      <p:sp>
+        <p:nvSpPr>
+          <p:cNvPr id="31" name="Rounded Rectangle 30">
+            <a:hlinkClick r:id="rId50"/>
+          </p:cNvPr>
           <p:cNvSpPr/>
-          <p:nvPr>
-            <a:hlinkClick r:id="rId45"/>
-          </p:nvPr>
+          <p:nvPr/>
         </p:nvSpPr>
         <p:spPr>
           <a:xfrm>
@@ -4602,7 +6049,7 @@
                   <a:srgbClr val="1F3A5F"/>
                 </a:solidFill>
               </a:rPr>
-              <a:t>Gram 18: FR A-wing, Category 2, Hoth</a:t>
+              <a:t>Gram 36: FR Equinox, Category 2, Gandalf</a:t>
             </a:r>
           </a:p>
         </p:txBody>
@@ -4631,7 +6078,7 @@
           <a:p>
             <a:r>
               <a:rPr sz="800">
-                <a:hlinkClick r:id="rId46"/>
+                <a:hlinkClick r:id="rId51"/>
               </a:rPr>
               <a:t>Lofar 1</a:t>
             </a:r>
@@ -4639,1630 +6086,9 @@
           <a:p>
             <a:r>
               <a:rPr sz="800">
-                <a:hlinkClick r:id="rId47"/>
+                <a:hlinkClick r:id="rId52"/>
               </a:rPr>
               <a:t>Lofar 2</a:t>
-            </a:r>
-          </a:p>
-          <a:p>
-            <a:r>
-              <a:rPr sz="800">
-                <a:hlinkClick r:id="rId48"/>
-              </a:rPr>
-              <a:t>Lofar 3</a:t>
-            </a:r>
-          </a:p>
-        </p:txBody>
-      </p:sp>
-    </p:spTree>
-  </p:cSld>
-  <p:clrMapOvr>
-    <a:masterClrMapping/>
-  </p:clrMapOvr>
-</p:sld>
-</file>
-
-<file path=ppt/slides/slide3.xml><?xml version="1.0" encoding="utf-8"?>
-<p:sld xmlns:a="http://schemas.openxmlformats.org/drawingml/2006/main" xmlns:p="http://schemas.openxmlformats.org/presentationml/2006/main" xmlns:r="http://schemas.openxmlformats.org/officeDocument/2006/relationships">
-  <p:cSld>
-    <p:spTree>
-      <p:nvGrpSpPr>
-        <p:cNvPr id="1" name=""/>
-        <p:cNvGrpSpPr/>
-        <p:nvPr/>
-      </p:nvGrpSpPr>
-      <p:grpSpPr/>
-      <p:sp>
-        <p:nvSpPr>
-          <p:cNvPr id="2" name="Rectangle 1"/>
-          <p:cNvSpPr/>
-          <p:nvPr/>
-        </p:nvSpPr>
-        <p:spPr>
-          <a:xfrm>
-            <a:off x="0" y="0"/>
-            <a:ext cx="12188952" cy="548640"/>
-          </a:xfrm>
-          <a:prstGeom prst="rect">
-            <a:avLst/>
-          </a:prstGeom>
-          <a:solidFill>
-            <a:srgbClr val="1F3A5F"/>
-          </a:solidFill>
-          <a:ln>
-            <a:noFill/>
-          </a:ln>
-        </p:spPr>
-        <p:style>
-          <a:lnRef idx="1">
-            <a:schemeClr val="accent1"/>
-          </a:lnRef>
-          <a:fillRef idx="3">
-            <a:schemeClr val="accent1"/>
-          </a:fillRef>
-          <a:effectRef idx="2">
-            <a:schemeClr val="accent1"/>
-          </a:effectRef>
-          <a:fontRef idx="minor">
-            <a:schemeClr val="lt1"/>
-          </a:fontRef>
-        </p:style>
-        <p:txBody>
-          <a:bodyPr rtlCol="0" anchor="ctr" lIns="182880" rIns="182880"/>
-          <a:lstStyle/>
-          <a:p>
-            <a:pPr algn="ctr"/>
-            <a:r>
-              <a:rPr sz="2000" b="1">
-                <a:solidFill>
-                  <a:srgbClr val="FFFFFF"/>
-                </a:solidFill>
-              </a:rPr>
-              <a:t>Instructor Progress Test 4 Grams — Page 2 of 2</a:t>
-            </a:r>
-          </a:p>
-        </p:txBody>
-      </p:sp>
-      <p:sp>
-        <p:nvSpPr>
-          <p:cNvPr id="3" name="Rounded Rectangle 2"/>
-          <p:cNvSpPr/>
-          <p:nvPr>
-            <a:hlinkClick r:id="rId2"/>
-          </p:nvPr>
-        </p:nvSpPr>
-        <p:spPr>
-          <a:xfrm>
-            <a:off x="365760" y="731520"/>
-            <a:ext cx="2200046" cy="365760"/>
-          </a:xfrm>
-          <a:prstGeom prst="roundRect">
-            <a:avLst/>
-          </a:prstGeom>
-          <a:solidFill>
-            <a:srgbClr val="E8EEF7"/>
-          </a:solidFill>
-          <a:ln>
-            <a:solidFill>
-              <a:srgbClr val="1F3A5F"/>
-            </a:solidFill>
-          </a:ln>
-        </p:spPr>
-        <p:style>
-          <a:lnRef idx="1">
-            <a:schemeClr val="accent1"/>
-          </a:lnRef>
-          <a:fillRef idx="3">
-            <a:schemeClr val="accent1"/>
-          </a:fillRef>
-          <a:effectRef idx="2">
-            <a:schemeClr val="accent1"/>
-          </a:effectRef>
-          <a:fontRef idx="minor">
-            <a:schemeClr val="lt1"/>
-          </a:fontRef>
-        </p:style>
-        <p:txBody>
-          <a:bodyPr rtlCol="0" anchor="ctr" lIns="45720" rIns="45720"/>
-          <a:lstStyle/>
-          <a:p>
-            <a:pPr algn="ctr"/>
-            <a:r>
-              <a:rPr sz="900">
-                <a:solidFill>
-                  <a:srgbClr val="1F3A5F"/>
-                </a:solidFill>
-              </a:rPr>
-              <a:t>Gram 19: Acclamator-class contact bearing 019, codename Defiant</a:t>
-            </a:r>
-          </a:p>
-        </p:txBody>
-      </p:sp>
-      <p:sp>
-        <p:nvSpPr>
-          <p:cNvPr id="4" name="TextBox 3"/>
-          <p:cNvSpPr txBox="1"/>
-          <p:nvPr/>
-        </p:nvSpPr>
-        <p:spPr>
-          <a:xfrm>
-            <a:off x="365760" y="1115568"/>
-            <a:ext cx="2200046" cy="1447800"/>
-          </a:xfrm>
-          <a:prstGeom prst="rect">
-            <a:avLst/>
-          </a:prstGeom>
-          <a:noFill/>
-        </p:spPr>
-        <p:txBody>
-          <a:bodyPr wrap="square">
-            <a:spAutoFit/>
-          </a:bodyPr>
-          <a:lstStyle/>
-          <a:p>
-            <a:r>
-              <a:rPr sz="800">
-                <a:hlinkClick r:id="rId3"/>
-              </a:rPr>
-              <a:t>Lofar 1</a:t>
-            </a:r>
-          </a:p>
-          <a:p>
-            <a:r>
-              <a:rPr sz="800">
-                <a:hlinkClick r:id="rId4"/>
-              </a:rPr>
-              <a:t>Lofar 2</a:t>
-            </a:r>
-          </a:p>
-          <a:p>
-            <a:r>
-              <a:rPr sz="800">
-                <a:hlinkClick r:id="rId5"/>
-              </a:rPr>
-              <a:t>Lofar 3</a:t>
-            </a:r>
-          </a:p>
-        </p:txBody>
-      </p:sp>
-      <p:sp>
-        <p:nvSpPr>
-          <p:cNvPr id="5" name="Rounded Rectangle 4"/>
-          <p:cNvSpPr/>
-          <p:nvPr>
-            <a:hlinkClick r:id="rId6"/>
-          </p:nvPr>
-        </p:nvSpPr>
-        <p:spPr>
-          <a:xfrm>
-            <a:off x="2657246" y="731520"/>
-            <a:ext cx="2200046" cy="365760"/>
-          </a:xfrm>
-          <a:prstGeom prst="roundRect">
-            <a:avLst/>
-          </a:prstGeom>
-          <a:solidFill>
-            <a:srgbClr val="E8EEF7"/>
-          </a:solidFill>
-          <a:ln>
-            <a:solidFill>
-              <a:srgbClr val="1F3A5F"/>
-            </a:solidFill>
-          </a:ln>
-        </p:spPr>
-        <p:style>
-          <a:lnRef idx="1">
-            <a:schemeClr val="accent1"/>
-          </a:lnRef>
-          <a:fillRef idx="3">
-            <a:schemeClr val="accent1"/>
-          </a:fillRef>
-          <a:effectRef idx="2">
-            <a:schemeClr val="accent1"/>
-          </a:effectRef>
-          <a:fontRef idx="minor">
-            <a:schemeClr val="lt1"/>
-          </a:fontRef>
-        </p:style>
-        <p:txBody>
-          <a:bodyPr rtlCol="0" anchor="ctr" lIns="45720" rIns="45720"/>
-          <a:lstStyle/>
-          <a:p>
-            <a:pPr algn="ctr"/>
-            <a:r>
-              <a:rPr sz="900">
-                <a:solidFill>
-                  <a:srgbClr val="1F3A5F"/>
-                </a:solidFill>
-              </a:rPr>
-              <a:t>Gram 21: Akira-class contact bearing 296, codename Bespin</a:t>
-            </a:r>
-          </a:p>
-        </p:txBody>
-      </p:sp>
-      <p:sp>
-        <p:nvSpPr>
-          <p:cNvPr id="6" name="TextBox 5"/>
-          <p:cNvSpPr txBox="1"/>
-          <p:nvPr/>
-        </p:nvSpPr>
-        <p:spPr>
-          <a:xfrm>
-            <a:off x="2657246" y="1115568"/>
-            <a:ext cx="2200046" cy="1447800"/>
-          </a:xfrm>
-          <a:prstGeom prst="rect">
-            <a:avLst/>
-          </a:prstGeom>
-          <a:noFill/>
-        </p:spPr>
-        <p:txBody>
-          <a:bodyPr wrap="square">
-            <a:spAutoFit/>
-          </a:bodyPr>
-          <a:lstStyle/>
-          <a:p>
-            <a:r>
-              <a:rPr sz="800">
-                <a:hlinkClick r:id="rId7"/>
-              </a:rPr>
-              <a:t>Lofar 1</a:t>
-            </a:r>
-          </a:p>
-        </p:txBody>
-      </p:sp>
-      <p:sp>
-        <p:nvSpPr>
-          <p:cNvPr id="7" name="Rounded Rectangle 6"/>
-          <p:cNvSpPr/>
-          <p:nvPr>
-            <a:hlinkClick r:id="rId8"/>
-          </p:nvPr>
-        </p:nvSpPr>
-        <p:spPr>
-          <a:xfrm>
-            <a:off x="4948732" y="731520"/>
-            <a:ext cx="2200046" cy="365760"/>
-          </a:xfrm>
-          <a:prstGeom prst="roundRect">
-            <a:avLst/>
-          </a:prstGeom>
-          <a:solidFill>
-            <a:srgbClr val="E8EEF7"/>
-          </a:solidFill>
-          <a:ln>
-            <a:solidFill>
-              <a:srgbClr val="1F3A5F"/>
-            </a:solidFill>
-          </a:ln>
-        </p:spPr>
-        <p:style>
-          <a:lnRef idx="1">
-            <a:schemeClr val="accent1"/>
-          </a:lnRef>
-          <a:fillRef idx="3">
-            <a:schemeClr val="accent1"/>
-          </a:fillRef>
-          <a:effectRef idx="2">
-            <a:schemeClr val="accent1"/>
-          </a:effectRef>
-          <a:fontRef idx="minor">
-            <a:schemeClr val="lt1"/>
-          </a:fontRef>
-        </p:style>
-        <p:txBody>
-          <a:bodyPr rtlCol="0" anchor="ctr" lIns="45720" rIns="45720"/>
-          <a:lstStyle/>
-          <a:p>
-            <a:pPr algn="ctr"/>
-            <a:r>
-              <a:rPr sz="900">
-                <a:solidFill>
-                  <a:srgbClr val="1F3A5F"/>
-                </a:solidFill>
-              </a:rPr>
-              <a:t>Gram 23: FR Miranda-class, Category 3, Trill</a:t>
-            </a:r>
-          </a:p>
-        </p:txBody>
-      </p:sp>
-      <p:sp>
-        <p:nvSpPr>
-          <p:cNvPr id="8" name="TextBox 7"/>
-          <p:cNvSpPr txBox="1"/>
-          <p:nvPr/>
-        </p:nvSpPr>
-        <p:spPr>
-          <a:xfrm>
-            <a:off x="4948732" y="1115568"/>
-            <a:ext cx="2200046" cy="1447800"/>
-          </a:xfrm>
-          <a:prstGeom prst="rect">
-            <a:avLst/>
-          </a:prstGeom>
-          <a:noFill/>
-        </p:spPr>
-        <p:txBody>
-          <a:bodyPr wrap="square">
-            <a:spAutoFit/>
-          </a:bodyPr>
-          <a:lstStyle/>
-          <a:p>
-            <a:r>
-              <a:rPr sz="800">
-                <a:hlinkClick r:id="rId9"/>
-              </a:rPr>
-              <a:t>Lofar 1</a:t>
-            </a:r>
-          </a:p>
-        </p:txBody>
-      </p:sp>
-      <p:sp>
-        <p:nvSpPr>
-          <p:cNvPr id="9" name="Rounded Rectangle 8"/>
-          <p:cNvSpPr/>
-          <p:nvPr>
-            <a:hlinkClick r:id="rId10"/>
-          </p:nvPr>
-        </p:nvSpPr>
-        <p:spPr>
-          <a:xfrm>
-            <a:off x="7240219" y="731520"/>
-            <a:ext cx="2200046" cy="365760"/>
-          </a:xfrm>
-          <a:prstGeom prst="roundRect">
-            <a:avLst/>
-          </a:prstGeom>
-          <a:solidFill>
-            <a:srgbClr val="E8EEF7"/>
-          </a:solidFill>
-          <a:ln>
-            <a:solidFill>
-              <a:srgbClr val="1F3A5F"/>
-            </a:solidFill>
-          </a:ln>
-        </p:spPr>
-        <p:style>
-          <a:lnRef idx="1">
-            <a:schemeClr val="accent1"/>
-          </a:lnRef>
-          <a:fillRef idx="3">
-            <a:schemeClr val="accent1"/>
-          </a:fillRef>
-          <a:effectRef idx="2">
-            <a:schemeClr val="accent1"/>
-          </a:effectRef>
-          <a:fontRef idx="minor">
-            <a:schemeClr val="lt1"/>
-          </a:fontRef>
-        </p:style>
-        <p:txBody>
-          <a:bodyPr rtlCol="0" anchor="ctr" lIns="45720" rIns="45720"/>
-          <a:lstStyle/>
-          <a:p>
-            <a:pPr algn="ctr"/>
-            <a:r>
-              <a:rPr sz="900">
-                <a:solidFill>
-                  <a:srgbClr val="1F3A5F"/>
-                </a:solidFill>
-              </a:rPr>
-              <a:t>Gram 24: FR Nebula-class, Category 4, Coruscant</a:t>
-            </a:r>
-          </a:p>
-        </p:txBody>
-      </p:sp>
-      <p:sp>
-        <p:nvSpPr>
-          <p:cNvPr id="10" name="TextBox 9"/>
-          <p:cNvSpPr txBox="1"/>
-          <p:nvPr/>
-        </p:nvSpPr>
-        <p:spPr>
-          <a:xfrm>
-            <a:off x="7240219" y="1115568"/>
-            <a:ext cx="2200046" cy="1447800"/>
-          </a:xfrm>
-          <a:prstGeom prst="rect">
-            <a:avLst/>
-          </a:prstGeom>
-          <a:noFill/>
-        </p:spPr>
-        <p:txBody>
-          <a:bodyPr wrap="square">
-            <a:spAutoFit/>
-          </a:bodyPr>
-          <a:lstStyle/>
-          <a:p>
-            <a:r>
-              <a:rPr sz="800">
-                <a:hlinkClick r:id="rId11"/>
-              </a:rPr>
-              <a:t>Lofar 1</a:t>
-            </a:r>
-          </a:p>
-          <a:p>
-            <a:r>
-              <a:rPr sz="800">
-                <a:hlinkClick r:id="rId12"/>
-              </a:rPr>
-              <a:t>Lofar 2</a:t>
-            </a:r>
-          </a:p>
-          <a:p>
-            <a:r>
-              <a:rPr sz="800">
-                <a:hlinkClick r:id="rId13"/>
-              </a:rPr>
-              <a:t>Lofar 3</a:t>
-            </a:r>
-          </a:p>
-        </p:txBody>
-      </p:sp>
-      <p:sp>
-        <p:nvSpPr>
-          <p:cNvPr id="11" name="Rounded Rectangle 10"/>
-          <p:cNvSpPr/>
-          <p:nvPr>
-            <a:hlinkClick r:id="rId14"/>
-          </p:nvPr>
-        </p:nvSpPr>
-        <p:spPr>
-          <a:xfrm>
-            <a:off x="9531705" y="731520"/>
-            <a:ext cx="2200046" cy="365760"/>
-          </a:xfrm>
-          <a:prstGeom prst="roundRect">
-            <a:avLst/>
-          </a:prstGeom>
-          <a:solidFill>
-            <a:srgbClr val="E8EEF7"/>
-          </a:solidFill>
-          <a:ln>
-            <a:solidFill>
-              <a:srgbClr val="1F3A5F"/>
-            </a:solidFill>
-          </a:ln>
-        </p:spPr>
-        <p:style>
-          <a:lnRef idx="1">
-            <a:schemeClr val="accent1"/>
-          </a:lnRef>
-          <a:fillRef idx="3">
-            <a:schemeClr val="accent1"/>
-          </a:fillRef>
-          <a:effectRef idx="2">
-            <a:schemeClr val="accent1"/>
-          </a:effectRef>
-          <a:fontRef idx="minor">
-            <a:schemeClr val="lt1"/>
-          </a:fontRef>
-        </p:style>
-        <p:txBody>
-          <a:bodyPr rtlCol="0" anchor="ctr" lIns="45720" rIns="45720"/>
-          <a:lstStyle/>
-          <a:p>
-            <a:pPr algn="ctr"/>
-            <a:r>
-              <a:rPr sz="900">
-                <a:solidFill>
-                  <a:srgbClr val="1F3A5F"/>
-                </a:solidFill>
-              </a:rPr>
-              <a:t>Gram 25: FR Mon Calamari Cruiser, Category 1, Bespin</a:t>
-            </a:r>
-          </a:p>
-        </p:txBody>
-      </p:sp>
-      <p:sp>
-        <p:nvSpPr>
-          <p:cNvPr id="12" name="TextBox 11"/>
-          <p:cNvSpPr txBox="1"/>
-          <p:nvPr/>
-        </p:nvSpPr>
-        <p:spPr>
-          <a:xfrm>
-            <a:off x="9531705" y="1115568"/>
-            <a:ext cx="2200046" cy="1447800"/>
-          </a:xfrm>
-          <a:prstGeom prst="rect">
-            <a:avLst/>
-          </a:prstGeom>
-          <a:noFill/>
-        </p:spPr>
-        <p:txBody>
-          <a:bodyPr wrap="square">
-            <a:spAutoFit/>
-          </a:bodyPr>
-          <a:lstStyle/>
-          <a:p>
-            <a:r>
-              <a:rPr sz="800">
-                <a:hlinkClick r:id="rId15"/>
-              </a:rPr>
-              <a:t>Lofar 1</a:t>
-            </a:r>
-          </a:p>
-          <a:p>
-            <a:r>
-              <a:rPr sz="800">
-                <a:hlinkClick r:id="rId16"/>
-              </a:rPr>
-              <a:t>Lofar 2</a:t>
-            </a:r>
-          </a:p>
-        </p:txBody>
-      </p:sp>
-      <p:sp>
-        <p:nvSpPr>
-          <p:cNvPr id="13" name="Rounded Rectangle 12"/>
-          <p:cNvSpPr/>
-          <p:nvPr>
-            <a:hlinkClick r:id="rId17"/>
-          </p:nvPr>
-        </p:nvSpPr>
-        <p:spPr>
-          <a:xfrm>
-            <a:off x="365760" y="2682240"/>
-            <a:ext cx="2200046" cy="365760"/>
-          </a:xfrm>
-          <a:prstGeom prst="roundRect">
-            <a:avLst/>
-          </a:prstGeom>
-          <a:solidFill>
-            <a:srgbClr val="E8EEF7"/>
-          </a:solidFill>
-          <a:ln>
-            <a:solidFill>
-              <a:srgbClr val="1F3A5F"/>
-            </a:solidFill>
-          </a:ln>
-        </p:spPr>
-        <p:style>
-          <a:lnRef idx="1">
-            <a:schemeClr val="accent1"/>
-          </a:lnRef>
-          <a:fillRef idx="3">
-            <a:schemeClr val="accent1"/>
-          </a:fillRef>
-          <a:effectRef idx="2">
-            <a:schemeClr val="accent1"/>
-          </a:effectRef>
-          <a:fontRef idx="minor">
-            <a:schemeClr val="lt1"/>
-          </a:fontRef>
-        </p:style>
-        <p:txBody>
-          <a:bodyPr rtlCol="0" anchor="ctr" lIns="45720" rIns="45720"/>
-          <a:lstStyle/>
-          <a:p>
-            <a:pPr algn="ctr"/>
-            <a:r>
-              <a:rPr sz="900">
-                <a:solidFill>
-                  <a:srgbClr val="1F3A5F"/>
-                </a:solidFill>
-              </a:rPr>
-              <a:t>Gram 26: FR Enterprise, Category 3, Betazed</a:t>
-            </a:r>
-          </a:p>
-        </p:txBody>
-      </p:sp>
-      <p:sp>
-        <p:nvSpPr>
-          <p:cNvPr id="14" name="TextBox 13"/>
-          <p:cNvSpPr txBox="1"/>
-          <p:nvPr/>
-        </p:nvSpPr>
-        <p:spPr>
-          <a:xfrm>
-            <a:off x="365760" y="3066288"/>
-            <a:ext cx="2200046" cy="1447800"/>
-          </a:xfrm>
-          <a:prstGeom prst="rect">
-            <a:avLst/>
-          </a:prstGeom>
-          <a:noFill/>
-        </p:spPr>
-        <p:txBody>
-          <a:bodyPr wrap="square">
-            <a:spAutoFit/>
-          </a:bodyPr>
-          <a:lstStyle/>
-          <a:p>
-            <a:r>
-              <a:rPr sz="800">
-                <a:hlinkClick r:id="rId18"/>
-              </a:rPr>
-              <a:t>Lofar 1</a:t>
-            </a:r>
-          </a:p>
-          <a:p>
-            <a:r>
-              <a:rPr sz="800">
-                <a:hlinkClick r:id="rId19"/>
-              </a:rPr>
-              <a:t>Lofar 2</a:t>
-            </a:r>
-          </a:p>
-        </p:txBody>
-      </p:sp>
-      <p:sp>
-        <p:nvSpPr>
-          <p:cNvPr id="15" name="Rounded Rectangle 14"/>
-          <p:cNvSpPr/>
-          <p:nvPr>
-            <a:hlinkClick r:id="rId20"/>
-          </p:nvPr>
-        </p:nvSpPr>
-        <p:spPr>
-          <a:xfrm>
-            <a:off x="2657246" y="2682240"/>
-            <a:ext cx="2200046" cy="365760"/>
-          </a:xfrm>
-          <a:prstGeom prst="roundRect">
-            <a:avLst/>
-          </a:prstGeom>
-          <a:solidFill>
-            <a:srgbClr val="E8EEF7"/>
-          </a:solidFill>
-          <a:ln>
-            <a:solidFill>
-              <a:srgbClr val="1F3A5F"/>
-            </a:solidFill>
-          </a:ln>
-        </p:spPr>
-        <p:style>
-          <a:lnRef idx="1">
-            <a:schemeClr val="accent1"/>
-          </a:lnRef>
-          <a:fillRef idx="3">
-            <a:schemeClr val="accent1"/>
-          </a:fillRef>
-          <a:effectRef idx="2">
-            <a:schemeClr val="accent1"/>
-          </a:effectRef>
-          <a:fontRef idx="minor">
-            <a:schemeClr val="lt1"/>
-          </a:fontRef>
-        </p:style>
-        <p:txBody>
-          <a:bodyPr rtlCol="0" anchor="ctr" lIns="45720" rIns="45720"/>
-          <a:lstStyle/>
-          <a:p>
-            <a:pPr algn="ctr"/>
-            <a:r>
-              <a:rPr sz="900">
-                <a:solidFill>
-                  <a:srgbClr val="1F3A5F"/>
-                </a:solidFill>
-              </a:rPr>
-              <a:t>Gram 27: FR Excelsior, Category 1, Romulus</a:t>
-            </a:r>
-          </a:p>
-        </p:txBody>
-      </p:sp>
-      <p:sp>
-        <p:nvSpPr>
-          <p:cNvPr id="16" name="TextBox 15"/>
-          <p:cNvSpPr txBox="1"/>
-          <p:nvPr/>
-        </p:nvSpPr>
-        <p:spPr>
-          <a:xfrm>
-            <a:off x="2657246" y="3066288"/>
-            <a:ext cx="2200046" cy="1447800"/>
-          </a:xfrm>
-          <a:prstGeom prst="rect">
-            <a:avLst/>
-          </a:prstGeom>
-          <a:noFill/>
-        </p:spPr>
-        <p:txBody>
-          <a:bodyPr wrap="square">
-            <a:spAutoFit/>
-          </a:bodyPr>
-          <a:lstStyle/>
-          <a:p>
-            <a:r>
-              <a:rPr sz="800">
-                <a:hlinkClick r:id="rId21"/>
-              </a:rPr>
-              <a:t>Lofar 1</a:t>
-            </a:r>
-          </a:p>
-          <a:p>
-            <a:r>
-              <a:rPr sz="800">
-                <a:hlinkClick r:id="rId22"/>
-              </a:rPr>
-              <a:t>Lofar 2</a:t>
-            </a:r>
-          </a:p>
-          <a:p>
-            <a:r>
-              <a:rPr sz="800">
-                <a:hlinkClick r:id="rId23"/>
-              </a:rPr>
-              <a:t>Lofar 3</a:t>
-            </a:r>
-          </a:p>
-          <a:p>
-            <a:r>
-              <a:rPr sz="800">
-                <a:hlinkClick r:id="rId24"/>
-              </a:rPr>
-              <a:t>Lofar 4</a:t>
-            </a:r>
-          </a:p>
-        </p:txBody>
-      </p:sp>
-      <p:sp>
-        <p:nvSpPr>
-          <p:cNvPr id="17" name="Rounded Rectangle 16"/>
-          <p:cNvSpPr/>
-          <p:nvPr>
-            <a:hlinkClick r:id="rId25"/>
-          </p:nvPr>
-        </p:nvSpPr>
-        <p:spPr>
-          <a:xfrm>
-            <a:off x="4948732" y="2682240"/>
-            <a:ext cx="2200046" cy="365760"/>
-          </a:xfrm>
-          <a:prstGeom prst="roundRect">
-            <a:avLst/>
-          </a:prstGeom>
-          <a:solidFill>
-            <a:srgbClr val="E8EEF7"/>
-          </a:solidFill>
-          <a:ln>
-            <a:solidFill>
-              <a:srgbClr val="1F3A5F"/>
-            </a:solidFill>
-          </a:ln>
-        </p:spPr>
-        <p:style>
-          <a:lnRef idx="1">
-            <a:schemeClr val="accent1"/>
-          </a:lnRef>
-          <a:fillRef idx="3">
-            <a:schemeClr val="accent1"/>
-          </a:fillRef>
-          <a:effectRef idx="2">
-            <a:schemeClr val="accent1"/>
-          </a:effectRef>
-          <a:fontRef idx="minor">
-            <a:schemeClr val="lt1"/>
-          </a:fontRef>
-        </p:style>
-        <p:txBody>
-          <a:bodyPr rtlCol="0" anchor="ctr" lIns="45720" rIns="45720"/>
-          <a:lstStyle/>
-          <a:p>
-            <a:pPr algn="ctr"/>
-            <a:r>
-              <a:rPr sz="900">
-                <a:solidFill>
-                  <a:srgbClr val="1F3A5F"/>
-                </a:solidFill>
-              </a:rPr>
-              <a:t>Gram 28: FR Devastator, Category 4, Risa</a:t>
-            </a:r>
-          </a:p>
-        </p:txBody>
-      </p:sp>
-      <p:sp>
-        <p:nvSpPr>
-          <p:cNvPr id="18" name="TextBox 17"/>
-          <p:cNvSpPr txBox="1"/>
-          <p:nvPr/>
-        </p:nvSpPr>
-        <p:spPr>
-          <a:xfrm>
-            <a:off x="4948732" y="3066288"/>
-            <a:ext cx="2200046" cy="1447800"/>
-          </a:xfrm>
-          <a:prstGeom prst="rect">
-            <a:avLst/>
-          </a:prstGeom>
-          <a:noFill/>
-        </p:spPr>
-        <p:txBody>
-          <a:bodyPr wrap="square">
-            <a:spAutoFit/>
-          </a:bodyPr>
-          <a:lstStyle/>
-          <a:p>
-            <a:r>
-              <a:rPr sz="800">
-                <a:hlinkClick r:id="rId26"/>
-              </a:rPr>
-              <a:t>Lofar 1</a:t>
-            </a:r>
-          </a:p>
-          <a:p>
-            <a:r>
-              <a:rPr sz="800">
-                <a:hlinkClick r:id="rId27"/>
-              </a:rPr>
-              <a:t>Lofar 2</a:t>
-            </a:r>
-          </a:p>
-          <a:p>
-            <a:r>
-              <a:rPr sz="800">
-                <a:hlinkClick r:id="rId28"/>
-              </a:rPr>
-              <a:t>Lofar 3</a:t>
-            </a:r>
-          </a:p>
-          <a:p>
-            <a:r>
-              <a:rPr sz="800">
-                <a:hlinkClick r:id="rId29"/>
-              </a:rPr>
-              <a:t>Lofar 4</a:t>
-            </a:r>
-          </a:p>
-        </p:txBody>
-      </p:sp>
-      <p:sp>
-        <p:nvSpPr>
-          <p:cNvPr id="19" name="Rounded Rectangle 18"/>
-          <p:cNvSpPr/>
-          <p:nvPr>
-            <a:hlinkClick r:id="rId30"/>
-          </p:nvPr>
-        </p:nvSpPr>
-        <p:spPr>
-          <a:xfrm>
-            <a:off x="7240219" y="2682240"/>
-            <a:ext cx="2200046" cy="365760"/>
-          </a:xfrm>
-          <a:prstGeom prst="roundRect">
-            <a:avLst/>
-          </a:prstGeom>
-          <a:solidFill>
-            <a:srgbClr val="E8EEF7"/>
-          </a:solidFill>
-          <a:ln>
-            <a:solidFill>
-              <a:srgbClr val="1F3A5F"/>
-            </a:solidFill>
-          </a:ln>
-        </p:spPr>
-        <p:style>
-          <a:lnRef idx="1">
-            <a:schemeClr val="accent1"/>
-          </a:lnRef>
-          <a:fillRef idx="3">
-            <a:schemeClr val="accent1"/>
-          </a:fillRef>
-          <a:effectRef idx="2">
-            <a:schemeClr val="accent1"/>
-          </a:effectRef>
-          <a:fontRef idx="minor">
-            <a:schemeClr val="lt1"/>
-          </a:fontRef>
-        </p:style>
-        <p:txBody>
-          <a:bodyPr rtlCol="0" anchor="ctr" lIns="45720" rIns="45720"/>
-          <a:lstStyle/>
-          <a:p>
-            <a:pPr algn="ctr"/>
-            <a:r>
-              <a:rPr sz="900">
-                <a:solidFill>
-                  <a:srgbClr val="1F3A5F"/>
-                </a:solidFill>
-              </a:rPr>
-              <a:t>Gram 29: Prometheus contact bearing 178, codename Trill</a:t>
-            </a:r>
-          </a:p>
-        </p:txBody>
-      </p:sp>
-      <p:sp>
-        <p:nvSpPr>
-          <p:cNvPr id="20" name="TextBox 19"/>
-          <p:cNvSpPr txBox="1"/>
-          <p:nvPr/>
-        </p:nvSpPr>
-        <p:spPr>
-          <a:xfrm>
-            <a:off x="7240219" y="3066288"/>
-            <a:ext cx="2200046" cy="1447800"/>
-          </a:xfrm>
-          <a:prstGeom prst="rect">
-            <a:avLst/>
-          </a:prstGeom>
-          <a:noFill/>
-        </p:spPr>
-        <p:txBody>
-          <a:bodyPr wrap="square">
-            <a:spAutoFit/>
-          </a:bodyPr>
-          <a:lstStyle/>
-          <a:p>
-            <a:r>
-              <a:rPr sz="800">
-                <a:hlinkClick r:id="rId31"/>
-              </a:rPr>
-              <a:t>Lofar 1</a:t>
-            </a:r>
-          </a:p>
-          <a:p>
-            <a:r>
-              <a:rPr sz="800">
-                <a:hlinkClick r:id="rId32"/>
-              </a:rPr>
-              <a:t>Lofar 2</a:t>
-            </a:r>
-          </a:p>
-          <a:p>
-            <a:r>
-              <a:rPr sz="800">
-                <a:hlinkClick r:id="rId33"/>
-              </a:rPr>
-              <a:t>Lofar 3</a:t>
-            </a:r>
-          </a:p>
-        </p:txBody>
-      </p:sp>
-      <p:sp>
-        <p:nvSpPr>
-          <p:cNvPr id="21" name="Rounded Rectangle 20"/>
-          <p:cNvSpPr/>
-          <p:nvPr>
-            <a:hlinkClick r:id="rId34"/>
-          </p:nvPr>
-        </p:nvSpPr>
-        <p:spPr>
-          <a:xfrm>
-            <a:off x="9531705" y="2682240"/>
-            <a:ext cx="2200046" cy="365760"/>
-          </a:xfrm>
-          <a:prstGeom prst="roundRect">
-            <a:avLst/>
-          </a:prstGeom>
-          <a:solidFill>
-            <a:srgbClr val="E8EEF7"/>
-          </a:solidFill>
-          <a:ln>
-            <a:solidFill>
-              <a:srgbClr val="1F3A5F"/>
-            </a:solidFill>
-          </a:ln>
-        </p:spPr>
-        <p:style>
-          <a:lnRef idx="1">
-            <a:schemeClr val="accent1"/>
-          </a:lnRef>
-          <a:fillRef idx="3">
-            <a:schemeClr val="accent1"/>
-          </a:fillRef>
-          <a:effectRef idx="2">
-            <a:schemeClr val="accent1"/>
-          </a:effectRef>
-          <a:fontRef idx="minor">
-            <a:schemeClr val="lt1"/>
-          </a:fontRef>
-        </p:style>
-        <p:txBody>
-          <a:bodyPr rtlCol="0" anchor="ctr" lIns="45720" rIns="45720"/>
-          <a:lstStyle/>
-          <a:p>
-            <a:pPr algn="ctr"/>
-            <a:r>
-              <a:rPr sz="900">
-                <a:solidFill>
-                  <a:srgbClr val="1F3A5F"/>
-                </a:solidFill>
-              </a:rPr>
-              <a:t>Gram 30: FR Ghost, Category 2, Risa</a:t>
-            </a:r>
-          </a:p>
-        </p:txBody>
-      </p:sp>
-      <p:sp>
-        <p:nvSpPr>
-          <p:cNvPr id="22" name="TextBox 21"/>
-          <p:cNvSpPr txBox="1"/>
-          <p:nvPr/>
-        </p:nvSpPr>
-        <p:spPr>
-          <a:xfrm>
-            <a:off x="9531705" y="3066288"/>
-            <a:ext cx="2200046" cy="1447800"/>
-          </a:xfrm>
-          <a:prstGeom prst="rect">
-            <a:avLst/>
-          </a:prstGeom>
-          <a:noFill/>
-        </p:spPr>
-        <p:txBody>
-          <a:bodyPr wrap="square">
-            <a:spAutoFit/>
-          </a:bodyPr>
-          <a:lstStyle/>
-          <a:p>
-            <a:r>
-              <a:rPr sz="800">
-                <a:hlinkClick r:id="rId35"/>
-              </a:rPr>
-              <a:t>Lofar 1</a:t>
-            </a:r>
-          </a:p>
-        </p:txBody>
-      </p:sp>
-      <p:sp>
-        <p:nvSpPr>
-          <p:cNvPr id="23" name="Rounded Rectangle 22"/>
-          <p:cNvSpPr/>
-          <p:nvPr>
-            <a:hlinkClick r:id="rId36"/>
-          </p:nvPr>
-        </p:nvSpPr>
-        <p:spPr>
-          <a:xfrm>
-            <a:off x="365760" y="4632960"/>
-            <a:ext cx="2200046" cy="365760"/>
-          </a:xfrm>
-          <a:prstGeom prst="roundRect">
-            <a:avLst/>
-          </a:prstGeom>
-          <a:solidFill>
-            <a:srgbClr val="E8EEF7"/>
-          </a:solidFill>
-          <a:ln>
-            <a:solidFill>
-              <a:srgbClr val="1F3A5F"/>
-            </a:solidFill>
-          </a:ln>
-        </p:spPr>
-        <p:style>
-          <a:lnRef idx="1">
-            <a:schemeClr val="accent1"/>
-          </a:lnRef>
-          <a:fillRef idx="3">
-            <a:schemeClr val="accent1"/>
-          </a:fillRef>
-          <a:effectRef idx="2">
-            <a:schemeClr val="accent1"/>
-          </a:effectRef>
-          <a:fontRef idx="minor">
-            <a:schemeClr val="lt1"/>
-          </a:fontRef>
-        </p:style>
-        <p:txBody>
-          <a:bodyPr rtlCol="0" anchor="ctr" lIns="45720" rIns="45720"/>
-          <a:lstStyle/>
-          <a:p>
-            <a:pPr algn="ctr"/>
-            <a:r>
-              <a:rPr sz="900">
-                <a:solidFill>
-                  <a:srgbClr val="1F3A5F"/>
-                </a:solidFill>
-              </a:rPr>
-              <a:t>Gram 32: FR Defiant, Category 4, Kobol</a:t>
-            </a:r>
-          </a:p>
-        </p:txBody>
-      </p:sp>
-      <p:sp>
-        <p:nvSpPr>
-          <p:cNvPr id="24" name="TextBox 23"/>
-          <p:cNvSpPr txBox="1"/>
-          <p:nvPr/>
-        </p:nvSpPr>
-        <p:spPr>
-          <a:xfrm>
-            <a:off x="365760" y="5017008"/>
-            <a:ext cx="2200046" cy="1447800"/>
-          </a:xfrm>
-          <a:prstGeom prst="rect">
-            <a:avLst/>
-          </a:prstGeom>
-          <a:noFill/>
-        </p:spPr>
-        <p:txBody>
-          <a:bodyPr wrap="square">
-            <a:spAutoFit/>
-          </a:bodyPr>
-          <a:lstStyle/>
-          <a:p>
-            <a:r>
-              <a:rPr sz="800">
-                <a:hlinkClick r:id="rId37"/>
-              </a:rPr>
-              <a:t>Lofar 1</a:t>
-            </a:r>
-          </a:p>
-        </p:txBody>
-      </p:sp>
-      <p:sp>
-        <p:nvSpPr>
-          <p:cNvPr id="25" name="Rounded Rectangle 24"/>
-          <p:cNvSpPr/>
-          <p:nvPr>
-            <a:hlinkClick r:id="rId38"/>
-          </p:nvPr>
-        </p:nvSpPr>
-        <p:spPr>
-          <a:xfrm>
-            <a:off x="2657246" y="4632960"/>
-            <a:ext cx="2200046" cy="365760"/>
-          </a:xfrm>
-          <a:prstGeom prst="roundRect">
-            <a:avLst/>
-          </a:prstGeom>
-          <a:solidFill>
-            <a:srgbClr val="E8EEF7"/>
-          </a:solidFill>
-          <a:ln>
-            <a:solidFill>
-              <a:srgbClr val="1F3A5F"/>
-            </a:solidFill>
-          </a:ln>
-        </p:spPr>
-        <p:style>
-          <a:lnRef idx="1">
-            <a:schemeClr val="accent1"/>
-          </a:lnRef>
-          <a:fillRef idx="3">
-            <a:schemeClr val="accent1"/>
-          </a:fillRef>
-          <a:effectRef idx="2">
-            <a:schemeClr val="accent1"/>
-          </a:effectRef>
-          <a:fontRef idx="minor">
-            <a:schemeClr val="lt1"/>
-          </a:fontRef>
-        </p:style>
-        <p:txBody>
-          <a:bodyPr rtlCol="0" anchor="ctr" lIns="45720" rIns="45720"/>
-          <a:lstStyle/>
-          <a:p>
-            <a:pPr algn="ctr"/>
-            <a:r>
-              <a:rPr sz="900">
-                <a:solidFill>
-                  <a:srgbClr val="1F3A5F"/>
-                </a:solidFill>
-              </a:rPr>
-              <a:t>Gram 33: FR Ghost, Category 4, Risa</a:t>
-            </a:r>
-          </a:p>
-        </p:txBody>
-      </p:sp>
-      <p:sp>
-        <p:nvSpPr>
-          <p:cNvPr id="26" name="TextBox 25"/>
-          <p:cNvSpPr txBox="1"/>
-          <p:nvPr/>
-        </p:nvSpPr>
-        <p:spPr>
-          <a:xfrm>
-            <a:off x="2657246" y="5017008"/>
-            <a:ext cx="2200046" cy="1447800"/>
-          </a:xfrm>
-          <a:prstGeom prst="rect">
-            <a:avLst/>
-          </a:prstGeom>
-          <a:noFill/>
-        </p:spPr>
-        <p:txBody>
-          <a:bodyPr wrap="square">
-            <a:spAutoFit/>
-          </a:bodyPr>
-          <a:lstStyle/>
-          <a:p>
-            <a:r>
-              <a:rPr sz="800">
-                <a:hlinkClick r:id="rId39"/>
-              </a:rPr>
-              <a:t>Lofar 1</a:t>
-            </a:r>
-          </a:p>
-          <a:p>
-            <a:r>
-              <a:rPr sz="800">
-                <a:hlinkClick r:id="rId40"/>
-              </a:rPr>
-              <a:t>Lofar 2</a:t>
-            </a:r>
-          </a:p>
-          <a:p>
-            <a:r>
-              <a:rPr sz="800">
-                <a:hlinkClick r:id="rId41"/>
-              </a:rPr>
-              <a:t>Lofar 3</a:t>
-            </a:r>
-          </a:p>
-          <a:p>
-            <a:r>
-              <a:rPr sz="800">
-                <a:hlinkClick r:id="rId42"/>
-              </a:rPr>
-              <a:t>Lofar 4</a:t>
-            </a:r>
-          </a:p>
-        </p:txBody>
-      </p:sp>
-      <p:sp>
-        <p:nvSpPr>
-          <p:cNvPr id="27" name="Rounded Rectangle 26"/>
-          <p:cNvSpPr/>
-          <p:nvPr>
-            <a:hlinkClick r:id="rId43"/>
-          </p:nvPr>
-        </p:nvSpPr>
-        <p:spPr>
-          <a:xfrm>
-            <a:off x="4948732" y="4632960"/>
-            <a:ext cx="2200046" cy="365760"/>
-          </a:xfrm>
-          <a:prstGeom prst="roundRect">
-            <a:avLst/>
-          </a:prstGeom>
-          <a:solidFill>
-            <a:srgbClr val="E8EEF7"/>
-          </a:solidFill>
-          <a:ln>
-            <a:solidFill>
-              <a:srgbClr val="1F3A5F"/>
-            </a:solidFill>
-          </a:ln>
-        </p:spPr>
-        <p:style>
-          <a:lnRef idx="1">
-            <a:schemeClr val="accent1"/>
-          </a:lnRef>
-          <a:fillRef idx="3">
-            <a:schemeClr val="accent1"/>
-          </a:fillRef>
-          <a:effectRef idx="2">
-            <a:schemeClr val="accent1"/>
-          </a:effectRef>
-          <a:fontRef idx="minor">
-            <a:schemeClr val="lt1"/>
-          </a:fontRef>
-        </p:style>
-        <p:txBody>
-          <a:bodyPr rtlCol="0" anchor="ctr" lIns="45720" rIns="45720"/>
-          <a:lstStyle/>
-          <a:p>
-            <a:pPr algn="ctr"/>
-            <a:r>
-              <a:rPr sz="900">
-                <a:solidFill>
-                  <a:srgbClr val="1F3A5F"/>
-                </a:solidFill>
-              </a:rPr>
-              <a:t>Gram 34: FR Reliant, Category 3, Risa</a:t>
-            </a:r>
-          </a:p>
-        </p:txBody>
-      </p:sp>
-      <p:sp>
-        <p:nvSpPr>
-          <p:cNvPr id="28" name="TextBox 27"/>
-          <p:cNvSpPr txBox="1"/>
-          <p:nvPr/>
-        </p:nvSpPr>
-        <p:spPr>
-          <a:xfrm>
-            <a:off x="4948732" y="5017008"/>
-            <a:ext cx="2200046" cy="1447800"/>
-          </a:xfrm>
-          <a:prstGeom prst="rect">
-            <a:avLst/>
-          </a:prstGeom>
-          <a:noFill/>
-        </p:spPr>
-        <p:txBody>
-          <a:bodyPr wrap="square">
-            <a:spAutoFit/>
-          </a:bodyPr>
-          <a:lstStyle/>
-          <a:p>
-            <a:r>
-              <a:rPr sz="800">
-                <a:hlinkClick r:id="rId44"/>
-              </a:rPr>
-              <a:t>Lofar 1</a:t>
-            </a:r>
-          </a:p>
-          <a:p>
-            <a:r>
-              <a:rPr sz="800">
-                <a:hlinkClick r:id="rId45"/>
-              </a:rPr>
-              <a:t>Lofar 2</a:t>
-            </a:r>
-          </a:p>
-          <a:p>
-            <a:r>
-              <a:rPr sz="800">
-                <a:hlinkClick r:id="rId46"/>
-              </a:rPr>
-              <a:t>Lofar 3</a:t>
-            </a:r>
-          </a:p>
-          <a:p>
-            <a:r>
-              <a:rPr sz="800">
-                <a:hlinkClick r:id="rId47"/>
-              </a:rPr>
-              <a:t>Lofar 4</a:t>
-            </a:r>
-          </a:p>
-        </p:txBody>
-      </p:sp>
-      <p:sp>
-        <p:nvSpPr>
-          <p:cNvPr id="29" name="Rounded Rectangle 28"/>
-          <p:cNvSpPr/>
-          <p:nvPr>
-            <a:hlinkClick r:id="rId48"/>
-          </p:nvPr>
-        </p:nvSpPr>
-        <p:spPr>
-          <a:xfrm>
-            <a:off x="7240219" y="4632960"/>
-            <a:ext cx="2200046" cy="365760"/>
-          </a:xfrm>
-          <a:prstGeom prst="roundRect">
-            <a:avLst/>
-          </a:prstGeom>
-          <a:solidFill>
-            <a:srgbClr val="E8EEF7"/>
-          </a:solidFill>
-          <a:ln>
-            <a:solidFill>
-              <a:srgbClr val="1F3A5F"/>
-            </a:solidFill>
-          </a:ln>
-        </p:spPr>
-        <p:style>
-          <a:lnRef idx="1">
-            <a:schemeClr val="accent1"/>
-          </a:lnRef>
-          <a:fillRef idx="3">
-            <a:schemeClr val="accent1"/>
-          </a:fillRef>
-          <a:effectRef idx="2">
-            <a:schemeClr val="accent1"/>
-          </a:effectRef>
-          <a:fontRef idx="minor">
-            <a:schemeClr val="lt1"/>
-          </a:fontRef>
-        </p:style>
-        <p:txBody>
-          <a:bodyPr rtlCol="0" anchor="ctr" lIns="45720" rIns="45720"/>
-          <a:lstStyle/>
-          <a:p>
-            <a:pPr algn="ctr"/>
-            <a:r>
-              <a:rPr sz="900">
-                <a:solidFill>
-                  <a:srgbClr val="1F3A5F"/>
-                </a:solidFill>
-              </a:rPr>
-              <a:t>Gram 35: FR Slave I, Category 3, Dagobah</a:t>
-            </a:r>
-          </a:p>
-        </p:txBody>
-      </p:sp>
-      <p:sp>
-        <p:nvSpPr>
-          <p:cNvPr id="30" name="TextBox 29"/>
-          <p:cNvSpPr txBox="1"/>
-          <p:nvPr/>
-        </p:nvSpPr>
-        <p:spPr>
-          <a:xfrm>
-            <a:off x="7240219" y="5017008"/>
-            <a:ext cx="2200046" cy="1447800"/>
-          </a:xfrm>
-          <a:prstGeom prst="rect">
-            <a:avLst/>
-          </a:prstGeom>
-          <a:noFill/>
-        </p:spPr>
-        <p:txBody>
-          <a:bodyPr wrap="square">
-            <a:spAutoFit/>
-          </a:bodyPr>
-          <a:lstStyle/>
-          <a:p>
-            <a:r>
-              <a:rPr sz="800">
-                <a:hlinkClick r:id="rId49"/>
-              </a:rPr>
-              <a:t>Lofar 1</a:t>
-            </a:r>
-          </a:p>
-        </p:txBody>
-      </p:sp>
-      <p:sp>
-        <p:nvSpPr>
-          <p:cNvPr id="31" name="Rounded Rectangle 30"/>
-          <p:cNvSpPr/>
-          <p:nvPr>
-            <a:hlinkClick r:id="rId50"/>
-          </p:nvPr>
-        </p:nvSpPr>
-        <p:spPr>
-          <a:xfrm>
-            <a:off x="9531705" y="4632960"/>
-            <a:ext cx="2200046" cy="365760"/>
-          </a:xfrm>
-          <a:prstGeom prst="roundRect">
-            <a:avLst/>
-          </a:prstGeom>
-          <a:solidFill>
-            <a:srgbClr val="E8EEF7"/>
-          </a:solidFill>
-          <a:ln>
-            <a:solidFill>
-              <a:srgbClr val="1F3A5F"/>
-            </a:solidFill>
-          </a:ln>
-        </p:spPr>
-        <p:style>
-          <a:lnRef idx="1">
-            <a:schemeClr val="accent1"/>
-          </a:lnRef>
-          <a:fillRef idx="3">
-            <a:schemeClr val="accent1"/>
-          </a:fillRef>
-          <a:effectRef idx="2">
-            <a:schemeClr val="accent1"/>
-          </a:effectRef>
-          <a:fontRef idx="minor">
-            <a:schemeClr val="lt1"/>
-          </a:fontRef>
-        </p:style>
-        <p:txBody>
-          <a:bodyPr rtlCol="0" anchor="ctr" lIns="45720" rIns="45720"/>
-          <a:lstStyle/>
-          <a:p>
-            <a:pPr algn="ctr"/>
-            <a:r>
-              <a:rPr sz="900">
-                <a:solidFill>
-                  <a:srgbClr val="1F3A5F"/>
-                </a:solidFill>
-              </a:rPr>
-              <a:t>Gram 36: FR Equinox, Category 2, Gandalf</a:t>
-            </a:r>
-          </a:p>
-        </p:txBody>
-      </p:sp>
-      <p:sp>
-        <p:nvSpPr>
-          <p:cNvPr id="32" name="TextBox 31"/>
-          <p:cNvSpPr txBox="1"/>
-          <p:nvPr/>
-        </p:nvSpPr>
-        <p:spPr>
-          <a:xfrm>
-            <a:off x="9531705" y="5017008"/>
-            <a:ext cx="2200046" cy="1447800"/>
-          </a:xfrm>
-          <a:prstGeom prst="rect">
-            <a:avLst/>
-          </a:prstGeom>
-          <a:noFill/>
-        </p:spPr>
-        <p:txBody>
-          <a:bodyPr wrap="square">
-            <a:spAutoFit/>
-          </a:bodyPr>
-          <a:lstStyle/>
-          <a:p>
-            <a:r>
-              <a:rPr sz="800">
-                <a:hlinkClick r:id="rId51"/>
-              </a:rPr>
-              <a:t>Lofar 1</a:t>
-            </a:r>
-          </a:p>
-          <a:p>
-            <a:r>
-              <a:rPr sz="800">
-                <a:hlinkClick r:id="rId52"/>
-              </a:rPr>
-              <a:t>Lofar 2</a:t>
-            </a:r>
-          </a:p>
-        </p:txBody>
-      </p:sp>
-    </p:spTree>
-  </p:cSld>
-  <p:clrMapOvr>
-    <a:masterClrMapping/>
-  </p:clrMapOvr>
-</p:sld>
-</file>
-
-<file path=ppt/slides/slide4.xml><?xml version="1.0" encoding="utf-8"?>
-<p:sld xmlns:a="http://schemas.openxmlformats.org/drawingml/2006/main" xmlns:p="http://schemas.openxmlformats.org/presentationml/2006/main" xmlns:r="http://schemas.openxmlformats.org/officeDocument/2006/relationships">
-  <p:cSld>
-    <p:spTree>
-      <p:nvGrpSpPr>
-        <p:cNvPr id="1" name=""/>
-        <p:cNvGrpSpPr/>
-        <p:nvPr/>
-      </p:nvGrpSpPr>
-      <p:grpSpPr/>
-      <p:sp>
-        <p:nvSpPr>
-          <p:cNvPr id="2" name="TextBox 1"/>
-          <p:cNvSpPr txBox="1"/>
-          <p:nvPr/>
-        </p:nvSpPr>
-        <p:spPr>
-          <a:xfrm>
-            <a:off x="914400" y="2377440"/>
-            <a:ext cx="10360152" cy="1280160"/>
-          </a:xfrm>
-          <a:prstGeom prst="rect">
-            <a:avLst/>
-          </a:prstGeom>
-          <a:noFill/>
-        </p:spPr>
-        <p:txBody>
-          <a:bodyPr wrap="square">
-            <a:spAutoFit/>
-          </a:bodyPr>
-          <a:lstStyle/>
-          <a:p>
-            <a:pPr algn="ctr"/>
-            <a:r>
-              <a:rPr sz="4000" b="1">
-                <a:solidFill>
-                  <a:srgbClr val="1F3A5F"/>
-                </a:solidFill>
-              </a:rPr>
-              <a:t>End of Instructor Progress Test 4 Grams</a:t>
-            </a:r>
-          </a:p>
-        </p:txBody>
-      </p:sp>
-      <p:sp>
-        <p:nvSpPr>
-          <p:cNvPr id="3" name="TextBox 2"/>
-          <p:cNvSpPr txBox="1"/>
-          <p:nvPr/>
-        </p:nvSpPr>
-        <p:spPr>
-          <a:xfrm>
-            <a:off x="914400" y="3840480"/>
-            <a:ext cx="10360152" cy="731520"/>
-          </a:xfrm>
-          <a:prstGeom prst="rect">
-            <a:avLst/>
-          </a:prstGeom>
-          <a:noFill/>
-        </p:spPr>
-        <p:txBody>
-          <a:bodyPr wrap="none">
-            <a:spAutoFit/>
-          </a:bodyPr>
-          <a:lstStyle/>
-          <a:p>
-            <a:pPr algn="ctr"/>
-            <a:r>
-              <a:rPr sz="2400">
-                <a:solidFill>
-                  <a:srgbClr val="1F3A5F"/>
-                </a:solidFill>
-              </a:rPr>
-              <a:t>Instructor Version</a:t>
             </a:r>
           </a:p>
         </p:txBody>

--- a/source/Instructor Progress Test 4 Grams/Instructor Progress Test 4 Grams.pptx
+++ b/source/Instructor Progress Test 4 Grams/Instructor Progress Test 4 Grams.pptx
@@ -7,6 +7,8 @@
   <p:sldIdLst>
     <p:sldId id="256" r:id="rId7"/>
     <p:sldId id="257" r:id="rId8"/>
+    <p:sldId id="258" r:id="rId9"/>
+    <p:sldId id="259" r:id="rId10"/>
   </p:sldIdLst>
   <p:sldSz cx="12188952" cy="6858000" type="screen4x3"/>
   <p:notesSz cx="6858000" cy="9144000"/>
@@ -3091,120 +3093,48 @@
       <p:grpSpPr/>
       <p:sp>
         <p:nvSpPr>
-          <p:cNvPr id="2" name="Rectangle 1"/>
-          <p:cNvSpPr/>
+          <p:cNvPr id="2" name="TextBox 1"/>
+          <p:cNvSpPr txBox="1"/>
           <p:nvPr/>
         </p:nvSpPr>
         <p:spPr>
           <a:xfrm>
-            <a:off x="0" y="0"/>
-            <a:ext cx="12188952" cy="548640"/>
+            <a:off x="914400" y="2377440"/>
+            <a:ext cx="10360152" cy="1280160"/>
           </a:xfrm>
           <a:prstGeom prst="rect">
             <a:avLst/>
           </a:prstGeom>
-          <a:solidFill>
-            <a:srgbClr val="1F3A5F"/>
-          </a:solidFill>
-          <a:ln>
-            <a:noFill/>
-          </a:ln>
-        </p:spPr>
-        <p:style>
-          <a:lnRef idx="1">
-            <a:schemeClr val="accent1"/>
-          </a:lnRef>
-          <a:fillRef idx="3">
-            <a:schemeClr val="accent1"/>
-          </a:fillRef>
-          <a:effectRef idx="2">
-            <a:schemeClr val="accent1"/>
-          </a:effectRef>
-          <a:fontRef idx="minor">
-            <a:schemeClr val="lt1"/>
-          </a:fontRef>
-        </p:style>
-        <p:txBody>
-          <a:bodyPr rtlCol="0" anchor="ctr" lIns="182880" rIns="182880"/>
+          <a:noFill/>
+        </p:spPr>
+        <p:txBody>
+          <a:bodyPr wrap="square">
+            <a:spAutoFit/>
+          </a:bodyPr>
           <a:lstStyle/>
           <a:p>
             <a:pPr algn="ctr"/>
             <a:r>
-              <a:rPr sz="2000" b="1">
-                <a:solidFill>
-                  <a:srgbClr val="FFFFFF"/>
-                </a:solidFill>
-              </a:rPr>
-              <a:t>Instructor Progress Test 4 Grams — Page 1 of 2</a:t>
-            </a:r>
-          </a:p>
-        </p:txBody>
-      </p:sp>
-      <p:sp>
-        <p:nvSpPr>
-          <p:cNvPr id="3" name="Rounded Rectangle 2">
-            <a:hlinkClick r:id="rId2"/>
-          </p:cNvPr>
-          <p:cNvSpPr/>
-          <p:nvPr/>
-        </p:nvSpPr>
-        <p:spPr>
-          <a:xfrm>
-            <a:off x="365760" y="731520"/>
-            <a:ext cx="2200046" cy="365760"/>
-          </a:xfrm>
-          <a:prstGeom prst="roundRect">
-            <a:avLst/>
-          </a:prstGeom>
-          <a:solidFill>
-            <a:srgbClr val="E8EEF7"/>
-          </a:solidFill>
-          <a:ln>
-            <a:solidFill>
-              <a:srgbClr val="1F3A5F"/>
-            </a:solidFill>
-          </a:ln>
-        </p:spPr>
-        <p:style>
-          <a:lnRef idx="1">
-            <a:schemeClr val="accent1"/>
-          </a:lnRef>
-          <a:fillRef idx="3">
-            <a:schemeClr val="accent1"/>
-          </a:fillRef>
-          <a:effectRef idx="2">
-            <a:schemeClr val="accent1"/>
-          </a:effectRef>
-          <a:fontRef idx="minor">
-            <a:schemeClr val="lt1"/>
-          </a:fontRef>
-        </p:style>
-        <p:txBody>
-          <a:bodyPr rtlCol="0" anchor="ctr" lIns="45720" rIns="45720"/>
-          <a:lstStyle/>
-          <a:p>
-            <a:pPr algn="ctr"/>
-            <a:r>
-              <a:rPr sz="900">
+              <a:rPr sz="4000" b="1">
                 <a:solidFill>
                   <a:srgbClr val="1F3A5F"/>
                 </a:solidFill>
               </a:rPr>
-              <a:t>Gram 1: FR A-wing, Category 2, Bespin</a:t>
-            </a:r>
-          </a:p>
-        </p:txBody>
-      </p:sp>
-      <p:sp>
-        <p:nvSpPr>
-          <p:cNvPr id="4" name="TextBox 3"/>
+              <a:t>Welcome to Instructor Progress Test 4 Grams</a:t>
+            </a:r>
+          </a:p>
+        </p:txBody>
+      </p:sp>
+      <p:sp>
+        <p:nvSpPr>
+          <p:cNvPr id="3" name="TextBox 2"/>
           <p:cNvSpPr txBox="1"/>
           <p:nvPr/>
         </p:nvSpPr>
         <p:spPr>
           <a:xfrm>
-            <a:off x="365760" y="1115568"/>
-            <a:ext cx="2200046" cy="1447800"/>
+            <a:off x="914400" y="3840480"/>
+            <a:ext cx="10360152" cy="731520"/>
           </a:xfrm>
           <a:prstGeom prst="rect">
             <a:avLst/>
@@ -3212,1356 +3142,19 @@
           <a:noFill/>
         </p:spPr>
         <p:txBody>
-          <a:bodyPr wrap="square">
+          <a:bodyPr wrap="none">
             <a:spAutoFit/>
           </a:bodyPr>
           <a:lstStyle/>
           <a:p>
-            <a:r>
-              <a:rPr sz="800">
-                <a:hlinkClick r:id="rId3"/>
-              </a:rPr>
-              <a:t>Lofar 1</a:t>
-            </a:r>
-          </a:p>
-          <a:p>
-            <a:r>
-              <a:rPr sz="800">
-                <a:hlinkClick r:id="rId4"/>
-              </a:rPr>
-              <a:t>Lofar 2</a:t>
-            </a:r>
-          </a:p>
-          <a:p>
-            <a:r>
-              <a:rPr sz="800">
-                <a:hlinkClick r:id="rId5"/>
-              </a:rPr>
-              <a:t>Lofar 3</a:t>
-            </a:r>
-          </a:p>
-        </p:txBody>
-      </p:sp>
-      <p:sp>
-        <p:nvSpPr>
-          <p:cNvPr id="5" name="Rounded Rectangle 4">
-            <a:hlinkClick r:id="rId6"/>
-          </p:cNvPr>
-          <p:cNvSpPr/>
-          <p:nvPr/>
-        </p:nvSpPr>
-        <p:spPr>
-          <a:xfrm>
-            <a:off x="2657246" y="731520"/>
-            <a:ext cx="2200046" cy="365760"/>
-          </a:xfrm>
-          <a:prstGeom prst="roundRect">
-            <a:avLst/>
-          </a:prstGeom>
-          <a:solidFill>
-            <a:srgbClr val="E8EEF7"/>
-          </a:solidFill>
-          <a:ln>
-            <a:solidFill>
-              <a:srgbClr val="1F3A5F"/>
-            </a:solidFill>
-          </a:ln>
-        </p:spPr>
-        <p:style>
-          <a:lnRef idx="1">
-            <a:schemeClr val="accent1"/>
-          </a:lnRef>
-          <a:fillRef idx="3">
-            <a:schemeClr val="accent1"/>
-          </a:fillRef>
-          <a:effectRef idx="2">
-            <a:schemeClr val="accent1"/>
-          </a:effectRef>
-          <a:fontRef idx="minor">
-            <a:schemeClr val="lt1"/>
-          </a:fontRef>
-        </p:style>
-        <p:txBody>
-          <a:bodyPr rtlCol="0" anchor="ctr" lIns="45720" rIns="45720"/>
-          <a:lstStyle/>
-          <a:p>
             <a:pPr algn="ctr"/>
             <a:r>
-              <a:rPr sz="900">
+              <a:rPr sz="2400">
                 <a:solidFill>
                   <a:srgbClr val="1F3A5F"/>
                 </a:solidFill>
               </a:rPr>
-              <a:t>Gram 2: Lambda Shuttle contact bearing 219, codename Cardassia</a:t>
-            </a:r>
-          </a:p>
-        </p:txBody>
-      </p:sp>
-      <p:sp>
-        <p:nvSpPr>
-          <p:cNvPr id="6" name="TextBox 5"/>
-          <p:cNvSpPr txBox="1"/>
-          <p:nvPr/>
-        </p:nvSpPr>
-        <p:spPr>
-          <a:xfrm>
-            <a:off x="2657246" y="1115568"/>
-            <a:ext cx="2200046" cy="1447800"/>
-          </a:xfrm>
-          <a:prstGeom prst="rect">
-            <a:avLst/>
-          </a:prstGeom>
-          <a:noFill/>
-        </p:spPr>
-        <p:txBody>
-          <a:bodyPr wrap="square">
-            <a:spAutoFit/>
-          </a:bodyPr>
-          <a:lstStyle/>
-          <a:p>
-            <a:r>
-              <a:rPr sz="800">
-                <a:hlinkClick r:id="rId7"/>
-              </a:rPr>
-              <a:t>Lofar 1</a:t>
-            </a:r>
-          </a:p>
-        </p:txBody>
-      </p:sp>
-      <p:sp>
-        <p:nvSpPr>
-          <p:cNvPr id="7" name="Rounded Rectangle 6">
-            <a:hlinkClick r:id="rId8"/>
-          </p:cNvPr>
-          <p:cNvSpPr/>
-          <p:nvPr/>
-        </p:nvSpPr>
-        <p:spPr>
-          <a:xfrm>
-            <a:off x="4948732" y="731520"/>
-            <a:ext cx="2200046" cy="365760"/>
-          </a:xfrm>
-          <a:prstGeom prst="roundRect">
-            <a:avLst/>
-          </a:prstGeom>
-          <a:solidFill>
-            <a:srgbClr val="E8EEF7"/>
-          </a:solidFill>
-          <a:ln>
-            <a:solidFill>
-              <a:srgbClr val="1F3A5F"/>
-            </a:solidFill>
-          </a:ln>
-        </p:spPr>
-        <p:style>
-          <a:lnRef idx="1">
-            <a:schemeClr val="accent1"/>
-          </a:lnRef>
-          <a:fillRef idx="3">
-            <a:schemeClr val="accent1"/>
-          </a:fillRef>
-          <a:effectRef idx="2">
-            <a:schemeClr val="accent1"/>
-          </a:effectRef>
-          <a:fontRef idx="minor">
-            <a:schemeClr val="lt1"/>
-          </a:fontRef>
-        </p:style>
-        <p:txBody>
-          <a:bodyPr rtlCol="0" anchor="ctr" lIns="45720" rIns="45720"/>
-          <a:lstStyle/>
-          <a:p>
-            <a:pPr algn="ctr"/>
-            <a:r>
-              <a:rPr sz="900">
-                <a:solidFill>
-                  <a:srgbClr val="1F3A5F"/>
-                </a:solidFill>
-              </a:rPr>
-              <a:t>Gram 4: FR Acclamator-class, Category 1, Trill</a:t>
-            </a:r>
-          </a:p>
-        </p:txBody>
-      </p:sp>
-      <p:sp>
-        <p:nvSpPr>
-          <p:cNvPr id="8" name="TextBox 7"/>
-          <p:cNvSpPr txBox="1"/>
-          <p:nvPr/>
-        </p:nvSpPr>
-        <p:spPr>
-          <a:xfrm>
-            <a:off x="4948732" y="1115568"/>
-            <a:ext cx="2200046" cy="1447800"/>
-          </a:xfrm>
-          <a:prstGeom prst="rect">
-            <a:avLst/>
-          </a:prstGeom>
-          <a:noFill/>
-        </p:spPr>
-        <p:txBody>
-          <a:bodyPr wrap="square">
-            <a:spAutoFit/>
-          </a:bodyPr>
-          <a:lstStyle/>
-          <a:p>
-            <a:r>
-              <a:rPr sz="800">
-                <a:hlinkClick r:id="rId9"/>
-              </a:rPr>
-              <a:t>Lofar 1</a:t>
-            </a:r>
-          </a:p>
-          <a:p>
-            <a:r>
-              <a:rPr sz="800">
-                <a:hlinkClick r:id="rId10"/>
-              </a:rPr>
-              <a:t>Lofar 2</a:t>
-            </a:r>
-          </a:p>
-        </p:txBody>
-      </p:sp>
-      <p:sp>
-        <p:nvSpPr>
-          <p:cNvPr id="9" name="Rounded Rectangle 8">
-            <a:hlinkClick r:id="rId11"/>
-          </p:cNvPr>
-          <p:cNvSpPr/>
-          <p:nvPr/>
-        </p:nvSpPr>
-        <p:spPr>
-          <a:xfrm>
-            <a:off x="7240219" y="731520"/>
-            <a:ext cx="2200046" cy="365760"/>
-          </a:xfrm>
-          <a:prstGeom prst="roundRect">
-            <a:avLst/>
-          </a:prstGeom>
-          <a:solidFill>
-            <a:srgbClr val="E8EEF7"/>
-          </a:solidFill>
-          <a:ln>
-            <a:solidFill>
-              <a:srgbClr val="1F3A5F"/>
-            </a:solidFill>
-          </a:ln>
-        </p:spPr>
-        <p:style>
-          <a:lnRef idx="1">
-            <a:schemeClr val="accent1"/>
-          </a:lnRef>
-          <a:fillRef idx="3">
-            <a:schemeClr val="accent1"/>
-          </a:fillRef>
-          <a:effectRef idx="2">
-            <a:schemeClr val="accent1"/>
-          </a:effectRef>
-          <a:fontRef idx="minor">
-            <a:schemeClr val="lt1"/>
-          </a:fontRef>
-        </p:style>
-        <p:txBody>
-          <a:bodyPr rtlCol="0" anchor="ctr" lIns="45720" rIns="45720"/>
-          <a:lstStyle/>
-          <a:p>
-            <a:pPr algn="ctr"/>
-            <a:r>
-              <a:rPr sz="900">
-                <a:solidFill>
-                  <a:srgbClr val="1F3A5F"/>
-                </a:solidFill>
-              </a:rPr>
-              <a:t>Gram 5: Nebulon-B contact bearing 084, codename Risa</a:t>
-            </a:r>
-          </a:p>
-        </p:txBody>
-      </p:sp>
-      <p:sp>
-        <p:nvSpPr>
-          <p:cNvPr id="10" name="TextBox 9"/>
-          <p:cNvSpPr txBox="1"/>
-          <p:nvPr/>
-        </p:nvSpPr>
-        <p:spPr>
-          <a:xfrm>
-            <a:off x="7240219" y="1115568"/>
-            <a:ext cx="2200046" cy="1447800"/>
-          </a:xfrm>
-          <a:prstGeom prst="rect">
-            <a:avLst/>
-          </a:prstGeom>
-          <a:noFill/>
-        </p:spPr>
-        <p:txBody>
-          <a:bodyPr wrap="square">
-            <a:spAutoFit/>
-          </a:bodyPr>
-          <a:lstStyle/>
-          <a:p>
-            <a:r>
-              <a:rPr sz="800">
-                <a:hlinkClick r:id="rId12"/>
-              </a:rPr>
-              <a:t>Lofar 1</a:t>
-            </a:r>
-          </a:p>
-          <a:p>
-            <a:r>
-              <a:rPr sz="800">
-                <a:hlinkClick r:id="rId13"/>
-              </a:rPr>
-              <a:t>Lofar 2</a:t>
-            </a:r>
-          </a:p>
-          <a:p>
-            <a:r>
-              <a:rPr sz="800">
-                <a:hlinkClick r:id="rId14"/>
-              </a:rPr>
-              <a:t>Lofar 3</a:t>
-            </a:r>
-          </a:p>
-        </p:txBody>
-      </p:sp>
-      <p:sp>
-        <p:nvSpPr>
-          <p:cNvPr id="11" name="Rounded Rectangle 10">
-            <a:hlinkClick r:id="rId15"/>
-          </p:cNvPr>
-          <p:cNvSpPr/>
-          <p:nvPr/>
-        </p:nvSpPr>
-        <p:spPr>
-          <a:xfrm>
-            <a:off x="9531705" y="731520"/>
-            <a:ext cx="2200046" cy="365760"/>
-          </a:xfrm>
-          <a:prstGeom prst="roundRect">
-            <a:avLst/>
-          </a:prstGeom>
-          <a:solidFill>
-            <a:srgbClr val="E8EEF7"/>
-          </a:solidFill>
-          <a:ln>
-            <a:solidFill>
-              <a:srgbClr val="1F3A5F"/>
-            </a:solidFill>
-          </a:ln>
-        </p:spPr>
-        <p:style>
-          <a:lnRef idx="1">
-            <a:schemeClr val="accent1"/>
-          </a:lnRef>
-          <a:fillRef idx="3">
-            <a:schemeClr val="accent1"/>
-          </a:fillRef>
-          <a:effectRef idx="2">
-            <a:schemeClr val="accent1"/>
-          </a:effectRef>
-          <a:fontRef idx="minor">
-            <a:schemeClr val="lt1"/>
-          </a:fontRef>
-        </p:style>
-        <p:txBody>
-          <a:bodyPr rtlCol="0" anchor="ctr" lIns="45720" rIns="45720"/>
-          <a:lstStyle/>
-          <a:p>
-            <a:pPr algn="ctr"/>
-            <a:r>
-              <a:rPr sz="900">
-                <a:solidFill>
-                  <a:srgbClr val="1F3A5F"/>
-                </a:solidFill>
-              </a:rPr>
-              <a:t>Gram 6: Discovery contact bearing 136, codename Tantive</a:t>
-            </a:r>
-          </a:p>
-        </p:txBody>
-      </p:sp>
-      <p:sp>
-        <p:nvSpPr>
-          <p:cNvPr id="12" name="TextBox 11"/>
-          <p:cNvSpPr txBox="1"/>
-          <p:nvPr/>
-        </p:nvSpPr>
-        <p:spPr>
-          <a:xfrm>
-            <a:off x="9531705" y="1115568"/>
-            <a:ext cx="2200046" cy="1447800"/>
-          </a:xfrm>
-          <a:prstGeom prst="rect">
-            <a:avLst/>
-          </a:prstGeom>
-          <a:noFill/>
-        </p:spPr>
-        <p:txBody>
-          <a:bodyPr wrap="square">
-            <a:spAutoFit/>
-          </a:bodyPr>
-          <a:lstStyle/>
-          <a:p>
-            <a:r>
-              <a:rPr sz="800">
-                <a:hlinkClick r:id="rId16"/>
-              </a:rPr>
-              <a:t>Lofar 1</a:t>
-            </a:r>
-          </a:p>
-          <a:p>
-            <a:r>
-              <a:rPr sz="800">
-                <a:hlinkClick r:id="rId17"/>
-              </a:rPr>
-              <a:t>Lofar 2</a:t>
-            </a:r>
-          </a:p>
-        </p:txBody>
-      </p:sp>
-      <p:sp>
-        <p:nvSpPr>
-          <p:cNvPr id="13" name="Rounded Rectangle 12">
-            <a:hlinkClick r:id="rId18"/>
-          </p:cNvPr>
-          <p:cNvSpPr/>
-          <p:nvPr/>
-        </p:nvSpPr>
-        <p:spPr>
-          <a:xfrm>
-            <a:off x="365760" y="2682240"/>
-            <a:ext cx="2200046" cy="365760"/>
-          </a:xfrm>
-          <a:prstGeom prst="roundRect">
-            <a:avLst/>
-          </a:prstGeom>
-          <a:solidFill>
-            <a:srgbClr val="E8EEF7"/>
-          </a:solidFill>
-          <a:ln>
-            <a:solidFill>
-              <a:srgbClr val="1F3A5F"/>
-            </a:solidFill>
-          </a:ln>
-        </p:spPr>
-        <p:style>
-          <a:lnRef idx="1">
-            <a:schemeClr val="accent1"/>
-          </a:lnRef>
-          <a:fillRef idx="3">
-            <a:schemeClr val="accent1"/>
-          </a:fillRef>
-          <a:effectRef idx="2">
-            <a:schemeClr val="accent1"/>
-          </a:effectRef>
-          <a:fontRef idx="minor">
-            <a:schemeClr val="lt1"/>
-          </a:fontRef>
-        </p:style>
-        <p:txBody>
-          <a:bodyPr rtlCol="0" anchor="ctr" lIns="45720" rIns="45720"/>
-          <a:lstStyle/>
-          <a:p>
-            <a:pPr algn="ctr"/>
-            <a:r>
-              <a:rPr sz="900">
-                <a:solidFill>
-                  <a:srgbClr val="1F3A5F"/>
-                </a:solidFill>
-              </a:rPr>
-              <a:t>Gram 7: FR Tantive IV, Category 3, Vulcan</a:t>
-            </a:r>
-          </a:p>
-        </p:txBody>
-      </p:sp>
-      <p:sp>
-        <p:nvSpPr>
-          <p:cNvPr id="14" name="TextBox 13"/>
-          <p:cNvSpPr txBox="1"/>
-          <p:nvPr/>
-        </p:nvSpPr>
-        <p:spPr>
-          <a:xfrm>
-            <a:off x="365760" y="3066288"/>
-            <a:ext cx="2200046" cy="1447800"/>
-          </a:xfrm>
-          <a:prstGeom prst="rect">
-            <a:avLst/>
-          </a:prstGeom>
-          <a:noFill/>
-        </p:spPr>
-        <p:txBody>
-          <a:bodyPr wrap="square">
-            <a:spAutoFit/>
-          </a:bodyPr>
-          <a:lstStyle/>
-          <a:p>
-            <a:r>
-              <a:rPr sz="800">
-                <a:hlinkClick r:id="rId19"/>
-              </a:rPr>
-              <a:t>Lofar 1</a:t>
-            </a:r>
-          </a:p>
-          <a:p>
-            <a:r>
-              <a:rPr sz="800">
-                <a:hlinkClick r:id="rId20"/>
-              </a:rPr>
-              <a:t>Lofar 2</a:t>
-            </a:r>
-          </a:p>
-          <a:p>
-            <a:r>
-              <a:rPr sz="800">
-                <a:hlinkClick r:id="rId21"/>
-              </a:rPr>
-              <a:t>Lofar 3</a:t>
-            </a:r>
-          </a:p>
-        </p:txBody>
-      </p:sp>
-      <p:sp>
-        <p:nvSpPr>
-          <p:cNvPr id="15" name="Rounded Rectangle 14">
-            <a:hlinkClick r:id="rId22"/>
-          </p:cNvPr>
-          <p:cNvSpPr/>
-          <p:nvPr/>
-        </p:nvSpPr>
-        <p:spPr>
-          <a:xfrm>
-            <a:off x="2657246" y="2682240"/>
-            <a:ext cx="2200046" cy="365760"/>
-          </a:xfrm>
-          <a:prstGeom prst="roundRect">
-            <a:avLst/>
-          </a:prstGeom>
-          <a:solidFill>
-            <a:srgbClr val="E8EEF7"/>
-          </a:solidFill>
-          <a:ln>
-            <a:solidFill>
-              <a:srgbClr val="1F3A5F"/>
-            </a:solidFill>
-          </a:ln>
-        </p:spPr>
-        <p:style>
-          <a:lnRef idx="1">
-            <a:schemeClr val="accent1"/>
-          </a:lnRef>
-          <a:fillRef idx="3">
-            <a:schemeClr val="accent1"/>
-          </a:fillRef>
-          <a:effectRef idx="2">
-            <a:schemeClr val="accent1"/>
-          </a:effectRef>
-          <a:fontRef idx="minor">
-            <a:schemeClr val="lt1"/>
-          </a:fontRef>
-        </p:style>
-        <p:txBody>
-          <a:bodyPr rtlCol="0" anchor="ctr" lIns="45720" rIns="45720"/>
-          <a:lstStyle/>
-          <a:p>
-            <a:pPr algn="ctr"/>
-            <a:r>
-              <a:rPr sz="900">
-                <a:solidFill>
-                  <a:srgbClr val="1F3A5F"/>
-                </a:solidFill>
-              </a:rPr>
-              <a:t>Gram 8: FR Devastator, Category 3, Yavin</a:t>
-            </a:r>
-          </a:p>
-        </p:txBody>
-      </p:sp>
-      <p:sp>
-        <p:nvSpPr>
-          <p:cNvPr id="16" name="TextBox 15"/>
-          <p:cNvSpPr txBox="1"/>
-          <p:nvPr/>
-        </p:nvSpPr>
-        <p:spPr>
-          <a:xfrm>
-            <a:off x="2657246" y="3066288"/>
-            <a:ext cx="2200046" cy="1447800"/>
-          </a:xfrm>
-          <a:prstGeom prst="rect">
-            <a:avLst/>
-          </a:prstGeom>
-          <a:noFill/>
-        </p:spPr>
-        <p:txBody>
-          <a:bodyPr wrap="square">
-            <a:spAutoFit/>
-          </a:bodyPr>
-          <a:lstStyle/>
-          <a:p>
-            <a:r>
-              <a:rPr sz="800">
-                <a:hlinkClick r:id="rId23"/>
-              </a:rPr>
-              <a:t>Lofar 1</a:t>
-            </a:r>
-          </a:p>
-        </p:txBody>
-      </p:sp>
-      <p:sp>
-        <p:nvSpPr>
-          <p:cNvPr id="17" name="Rounded Rectangle 16">
-            <a:hlinkClick r:id="rId24"/>
-          </p:cNvPr>
-          <p:cNvSpPr/>
-          <p:nvPr/>
-        </p:nvSpPr>
-        <p:spPr>
-          <a:xfrm>
-            <a:off x="4948732" y="2682240"/>
-            <a:ext cx="2200046" cy="365760"/>
-          </a:xfrm>
-          <a:prstGeom prst="roundRect">
-            <a:avLst/>
-          </a:prstGeom>
-          <a:solidFill>
-            <a:srgbClr val="E8EEF7"/>
-          </a:solidFill>
-          <a:ln>
-            <a:solidFill>
-              <a:srgbClr val="1F3A5F"/>
-            </a:solidFill>
-          </a:ln>
-        </p:spPr>
-        <p:style>
-          <a:lnRef idx="1">
-            <a:schemeClr val="accent1"/>
-          </a:lnRef>
-          <a:fillRef idx="3">
-            <a:schemeClr val="accent1"/>
-          </a:fillRef>
-          <a:effectRef idx="2">
-            <a:schemeClr val="accent1"/>
-          </a:effectRef>
-          <a:fontRef idx="minor">
-            <a:schemeClr val="lt1"/>
-          </a:fontRef>
-        </p:style>
-        <p:txBody>
-          <a:bodyPr rtlCol="0" anchor="ctr" lIns="45720" rIns="45720"/>
-          <a:lstStyle/>
-          <a:p>
-            <a:pPr algn="ctr"/>
-            <a:r>
-              <a:rPr sz="900">
-                <a:solidFill>
-                  <a:srgbClr val="1F3A5F"/>
-                </a:solidFill>
-              </a:rPr>
-              <a:t>Gram 11: FR Enterprise, Category 2, Mustafar</a:t>
-            </a:r>
-          </a:p>
-        </p:txBody>
-      </p:sp>
-      <p:sp>
-        <p:nvSpPr>
-          <p:cNvPr id="18" name="TextBox 17"/>
-          <p:cNvSpPr txBox="1"/>
-          <p:nvPr/>
-        </p:nvSpPr>
-        <p:spPr>
-          <a:xfrm>
-            <a:off x="4948732" y="3066288"/>
-            <a:ext cx="2200046" cy="1447800"/>
-          </a:xfrm>
-          <a:prstGeom prst="rect">
-            <a:avLst/>
-          </a:prstGeom>
-          <a:noFill/>
-        </p:spPr>
-        <p:txBody>
-          <a:bodyPr wrap="square">
-            <a:spAutoFit/>
-          </a:bodyPr>
-          <a:lstStyle/>
-          <a:p>
-            <a:r>
-              <a:rPr sz="800">
-                <a:hlinkClick r:id="rId25"/>
-              </a:rPr>
-              <a:t>Lofar 1</a:t>
-            </a:r>
-          </a:p>
-        </p:txBody>
-      </p:sp>
-      <p:sp>
-        <p:nvSpPr>
-          <p:cNvPr id="19" name="Rounded Rectangle 18">
-            <a:hlinkClick r:id="rId26"/>
-          </p:cNvPr>
-          <p:cNvSpPr/>
-          <p:nvPr/>
-        </p:nvSpPr>
-        <p:spPr>
-          <a:xfrm>
-            <a:off x="7240219" y="2682240"/>
-            <a:ext cx="2200046" cy="365760"/>
-          </a:xfrm>
-          <a:prstGeom prst="roundRect">
-            <a:avLst/>
-          </a:prstGeom>
-          <a:solidFill>
-            <a:srgbClr val="E8EEF7"/>
-          </a:solidFill>
-          <a:ln>
-            <a:solidFill>
-              <a:srgbClr val="1F3A5F"/>
-            </a:solidFill>
-          </a:ln>
-        </p:spPr>
-        <p:style>
-          <a:lnRef idx="1">
-            <a:schemeClr val="accent1"/>
-          </a:lnRef>
-          <a:fillRef idx="3">
-            <a:schemeClr val="accent1"/>
-          </a:fillRef>
-          <a:effectRef idx="2">
-            <a:schemeClr val="accent1"/>
-          </a:effectRef>
-          <a:fontRef idx="minor">
-            <a:schemeClr val="lt1"/>
-          </a:fontRef>
-        </p:style>
-        <p:txBody>
-          <a:bodyPr rtlCol="0" anchor="ctr" lIns="45720" rIns="45720"/>
-          <a:lstStyle/>
-          <a:p>
-            <a:pPr algn="ctr"/>
-            <a:r>
-              <a:rPr sz="900">
-                <a:solidFill>
-                  <a:srgbClr val="1F3A5F"/>
-                </a:solidFill>
-              </a:rPr>
-              <a:t>Gram 12: FR Slave I, Category 4, Naboo</a:t>
-            </a:r>
-          </a:p>
-        </p:txBody>
-      </p:sp>
-      <p:sp>
-        <p:nvSpPr>
-          <p:cNvPr id="20" name="TextBox 19"/>
-          <p:cNvSpPr txBox="1"/>
-          <p:nvPr/>
-        </p:nvSpPr>
-        <p:spPr>
-          <a:xfrm>
-            <a:off x="7240219" y="3066288"/>
-            <a:ext cx="2200046" cy="1447800"/>
-          </a:xfrm>
-          <a:prstGeom prst="rect">
-            <a:avLst/>
-          </a:prstGeom>
-          <a:noFill/>
-        </p:spPr>
-        <p:txBody>
-          <a:bodyPr wrap="square">
-            <a:spAutoFit/>
-          </a:bodyPr>
-          <a:lstStyle/>
-          <a:p>
-            <a:r>
-              <a:rPr sz="800">
-                <a:hlinkClick r:id="rId27"/>
-              </a:rPr>
-              <a:t>Lofar 1</a:t>
-            </a:r>
-          </a:p>
-        </p:txBody>
-      </p:sp>
-      <p:sp>
-        <p:nvSpPr>
-          <p:cNvPr id="21" name="Rounded Rectangle 20">
-            <a:hlinkClick r:id="rId28"/>
-          </p:cNvPr>
-          <p:cNvSpPr/>
-          <p:nvPr/>
-        </p:nvSpPr>
-        <p:spPr>
-          <a:xfrm>
-            <a:off x="9531705" y="2682240"/>
-            <a:ext cx="2200046" cy="365760"/>
-          </a:xfrm>
-          <a:prstGeom prst="roundRect">
-            <a:avLst/>
-          </a:prstGeom>
-          <a:solidFill>
-            <a:srgbClr val="E8EEF7"/>
-          </a:solidFill>
-          <a:ln>
-            <a:solidFill>
-              <a:srgbClr val="1F3A5F"/>
-            </a:solidFill>
-          </a:ln>
-        </p:spPr>
-        <p:style>
-          <a:lnRef idx="1">
-            <a:schemeClr val="accent1"/>
-          </a:lnRef>
-          <a:fillRef idx="3">
-            <a:schemeClr val="accent1"/>
-          </a:fillRef>
-          <a:effectRef idx="2">
-            <a:schemeClr val="accent1"/>
-          </a:effectRef>
-          <a:fontRef idx="minor">
-            <a:schemeClr val="lt1"/>
-          </a:fontRef>
-        </p:style>
-        <p:txBody>
-          <a:bodyPr rtlCol="0" anchor="ctr" lIns="45720" rIns="45720"/>
-          <a:lstStyle/>
-          <a:p>
-            <a:pPr algn="ctr"/>
-            <a:r>
-              <a:rPr sz="900">
-                <a:solidFill>
-                  <a:srgbClr val="1F3A5F"/>
-                </a:solidFill>
-              </a:rPr>
-              <a:t>Gram 13: Slave I contact bearing 010, codename Naboo</a:t>
-            </a:r>
-          </a:p>
-        </p:txBody>
-      </p:sp>
-      <p:sp>
-        <p:nvSpPr>
-          <p:cNvPr id="22" name="TextBox 21"/>
-          <p:cNvSpPr txBox="1"/>
-          <p:nvPr/>
-        </p:nvSpPr>
-        <p:spPr>
-          <a:xfrm>
-            <a:off x="9531705" y="3066288"/>
-            <a:ext cx="2200046" cy="1447800"/>
-          </a:xfrm>
-          <a:prstGeom prst="rect">
-            <a:avLst/>
-          </a:prstGeom>
-          <a:noFill/>
-        </p:spPr>
-        <p:txBody>
-          <a:bodyPr wrap="square">
-            <a:spAutoFit/>
-          </a:bodyPr>
-          <a:lstStyle/>
-          <a:p>
-            <a:r>
-              <a:rPr sz="800">
-                <a:hlinkClick r:id="rId29"/>
-              </a:rPr>
-              <a:t>Lofar 1</a:t>
-            </a:r>
-          </a:p>
-          <a:p>
-            <a:r>
-              <a:rPr sz="800">
-                <a:hlinkClick r:id="rId30"/>
-              </a:rPr>
-              <a:t>Lofar 2</a:t>
-            </a:r>
-          </a:p>
-        </p:txBody>
-      </p:sp>
-      <p:sp>
-        <p:nvSpPr>
-          <p:cNvPr id="23" name="Rounded Rectangle 22">
-            <a:hlinkClick r:id="rId31"/>
-          </p:cNvPr>
-          <p:cNvSpPr/>
-          <p:nvPr/>
-        </p:nvSpPr>
-        <p:spPr>
-          <a:xfrm>
-            <a:off x="365760" y="4632960"/>
-            <a:ext cx="2200046" cy="365760"/>
-          </a:xfrm>
-          <a:prstGeom prst="roundRect">
-            <a:avLst/>
-          </a:prstGeom>
-          <a:solidFill>
-            <a:srgbClr val="E8EEF7"/>
-          </a:solidFill>
-          <a:ln>
-            <a:solidFill>
-              <a:srgbClr val="1F3A5F"/>
-            </a:solidFill>
-          </a:ln>
-        </p:spPr>
-        <p:style>
-          <a:lnRef idx="1">
-            <a:schemeClr val="accent1"/>
-          </a:lnRef>
-          <a:fillRef idx="3">
-            <a:schemeClr val="accent1"/>
-          </a:fillRef>
-          <a:effectRef idx="2">
-            <a:schemeClr val="accent1"/>
-          </a:effectRef>
-          <a:fontRef idx="minor">
-            <a:schemeClr val="lt1"/>
-          </a:fontRef>
-        </p:style>
-        <p:txBody>
-          <a:bodyPr rtlCol="0" anchor="ctr" lIns="45720" rIns="45720"/>
-          <a:lstStyle/>
-          <a:p>
-            <a:pPr algn="ctr"/>
-            <a:r>
-              <a:rPr sz="900">
-                <a:solidFill>
-                  <a:srgbClr val="1F3A5F"/>
-                </a:solidFill>
-              </a:rPr>
-              <a:t>Gram 14: FR Galaxy-class, Category 2, Risa</a:t>
-            </a:r>
-          </a:p>
-        </p:txBody>
-      </p:sp>
-      <p:sp>
-        <p:nvSpPr>
-          <p:cNvPr id="24" name="TextBox 23"/>
-          <p:cNvSpPr txBox="1"/>
-          <p:nvPr/>
-        </p:nvSpPr>
-        <p:spPr>
-          <a:xfrm>
-            <a:off x="365760" y="5017008"/>
-            <a:ext cx="2200046" cy="1447800"/>
-          </a:xfrm>
-          <a:prstGeom prst="rect">
-            <a:avLst/>
-          </a:prstGeom>
-          <a:noFill/>
-        </p:spPr>
-        <p:txBody>
-          <a:bodyPr wrap="square">
-            <a:spAutoFit/>
-          </a:bodyPr>
-          <a:lstStyle/>
-          <a:p>
-            <a:r>
-              <a:rPr sz="800">
-                <a:hlinkClick r:id="rId32"/>
-              </a:rPr>
-              <a:t>Lofar 1</a:t>
-            </a:r>
-          </a:p>
-        </p:txBody>
-      </p:sp>
-      <p:sp>
-        <p:nvSpPr>
-          <p:cNvPr id="25" name="Rounded Rectangle 24">
-            <a:hlinkClick r:id="rId33"/>
-          </p:cNvPr>
-          <p:cNvSpPr/>
-          <p:nvPr/>
-        </p:nvSpPr>
-        <p:spPr>
-          <a:xfrm>
-            <a:off x="2657246" y="4632960"/>
-            <a:ext cx="2200046" cy="365760"/>
-          </a:xfrm>
-          <a:prstGeom prst="roundRect">
-            <a:avLst/>
-          </a:prstGeom>
-          <a:solidFill>
-            <a:srgbClr val="E8EEF7"/>
-          </a:solidFill>
-          <a:ln>
-            <a:solidFill>
-              <a:srgbClr val="1F3A5F"/>
-            </a:solidFill>
-          </a:ln>
-        </p:spPr>
-        <p:style>
-          <a:lnRef idx="1">
-            <a:schemeClr val="accent1"/>
-          </a:lnRef>
-          <a:fillRef idx="3">
-            <a:schemeClr val="accent1"/>
-          </a:fillRef>
-          <a:effectRef idx="2">
-            <a:schemeClr val="accent1"/>
-          </a:effectRef>
-          <a:fontRef idx="minor">
-            <a:schemeClr val="lt1"/>
-          </a:fontRef>
-        </p:style>
-        <p:txBody>
-          <a:bodyPr rtlCol="0" anchor="ctr" lIns="45720" rIns="45720"/>
-          <a:lstStyle/>
-          <a:p>
-            <a:pPr algn="ctr"/>
-            <a:r>
-              <a:rPr sz="900">
-                <a:solidFill>
-                  <a:srgbClr val="1F3A5F"/>
-                </a:solidFill>
-              </a:rPr>
-              <a:t>Gram 15: FR Y-wing, Category 4, Vulcan</a:t>
-            </a:r>
-          </a:p>
-        </p:txBody>
-      </p:sp>
-      <p:sp>
-        <p:nvSpPr>
-          <p:cNvPr id="26" name="TextBox 25"/>
-          <p:cNvSpPr txBox="1"/>
-          <p:nvPr/>
-        </p:nvSpPr>
-        <p:spPr>
-          <a:xfrm>
-            <a:off x="2657246" y="5017008"/>
-            <a:ext cx="2200046" cy="1447800"/>
-          </a:xfrm>
-          <a:prstGeom prst="rect">
-            <a:avLst/>
-          </a:prstGeom>
-          <a:noFill/>
-        </p:spPr>
-        <p:txBody>
-          <a:bodyPr wrap="square">
-            <a:spAutoFit/>
-          </a:bodyPr>
-          <a:lstStyle/>
-          <a:p>
-            <a:r>
-              <a:rPr sz="800">
-                <a:hlinkClick r:id="rId34"/>
-              </a:rPr>
-              <a:t>Lofar 1</a:t>
-            </a:r>
-          </a:p>
-          <a:p>
-            <a:r>
-              <a:rPr sz="800">
-                <a:hlinkClick r:id="rId35"/>
-              </a:rPr>
-              <a:t>Lofar 2</a:t>
-            </a:r>
-          </a:p>
-          <a:p>
-            <a:r>
-              <a:rPr sz="800">
-                <a:hlinkClick r:id="rId36"/>
-              </a:rPr>
-              <a:t>Lofar 3</a:t>
-            </a:r>
-          </a:p>
-          <a:p>
-            <a:r>
-              <a:rPr sz="800">
-                <a:hlinkClick r:id="rId37"/>
-              </a:rPr>
-              <a:t>Lofar 4</a:t>
-            </a:r>
-          </a:p>
-        </p:txBody>
-      </p:sp>
-      <p:sp>
-        <p:nvSpPr>
-          <p:cNvPr id="27" name="Rounded Rectangle 26">
-            <a:hlinkClick r:id="rId38"/>
-          </p:cNvPr>
-          <p:cNvSpPr/>
-          <p:nvPr/>
-        </p:nvSpPr>
-        <p:spPr>
-          <a:xfrm>
-            <a:off x="4948732" y="4632960"/>
-            <a:ext cx="2200046" cy="365760"/>
-          </a:xfrm>
-          <a:prstGeom prst="roundRect">
-            <a:avLst/>
-          </a:prstGeom>
-          <a:solidFill>
-            <a:srgbClr val="E8EEF7"/>
-          </a:solidFill>
-          <a:ln>
-            <a:solidFill>
-              <a:srgbClr val="1F3A5F"/>
-            </a:solidFill>
-          </a:ln>
-        </p:spPr>
-        <p:style>
-          <a:lnRef idx="1">
-            <a:schemeClr val="accent1"/>
-          </a:lnRef>
-          <a:fillRef idx="3">
-            <a:schemeClr val="accent1"/>
-          </a:fillRef>
-          <a:effectRef idx="2">
-            <a:schemeClr val="accent1"/>
-          </a:effectRef>
-          <a:fontRef idx="minor">
-            <a:schemeClr val="lt1"/>
-          </a:fontRef>
-        </p:style>
-        <p:txBody>
-          <a:bodyPr rtlCol="0" anchor="ctr" lIns="45720" rIns="45720"/>
-          <a:lstStyle/>
-          <a:p>
-            <a:pPr algn="ctr"/>
-            <a:r>
-              <a:rPr sz="900">
-                <a:solidFill>
-                  <a:srgbClr val="1F3A5F"/>
-                </a:solidFill>
-              </a:rPr>
-              <a:t>Gram 16: FR Tantive IV, Category 2, Dagobah</a:t>
-            </a:r>
-          </a:p>
-        </p:txBody>
-      </p:sp>
-      <p:sp>
-        <p:nvSpPr>
-          <p:cNvPr id="28" name="TextBox 27"/>
-          <p:cNvSpPr txBox="1"/>
-          <p:nvPr/>
-        </p:nvSpPr>
-        <p:spPr>
-          <a:xfrm>
-            <a:off x="4948732" y="5017008"/>
-            <a:ext cx="2200046" cy="1447800"/>
-          </a:xfrm>
-          <a:prstGeom prst="rect">
-            <a:avLst/>
-          </a:prstGeom>
-          <a:noFill/>
-        </p:spPr>
-        <p:txBody>
-          <a:bodyPr wrap="square">
-            <a:spAutoFit/>
-          </a:bodyPr>
-          <a:lstStyle/>
-          <a:p>
-            <a:r>
-              <a:rPr sz="800">
-                <a:hlinkClick r:id="rId39"/>
-              </a:rPr>
-              <a:t>Lofar 1</a:t>
-            </a:r>
-          </a:p>
-          <a:p>
-            <a:r>
-              <a:rPr sz="800">
-                <a:hlinkClick r:id="rId40"/>
-              </a:rPr>
-              <a:t>Lofar 2</a:t>
-            </a:r>
-          </a:p>
-          <a:p>
-            <a:r>
-              <a:rPr sz="800">
-                <a:hlinkClick r:id="rId41"/>
-              </a:rPr>
-              <a:t>Lofar 3</a:t>
-            </a:r>
-          </a:p>
-        </p:txBody>
-      </p:sp>
-      <p:sp>
-        <p:nvSpPr>
-          <p:cNvPr id="29" name="Rounded Rectangle 28">
-            <a:hlinkClick r:id="rId42"/>
-          </p:cNvPr>
-          <p:cNvSpPr/>
-          <p:nvPr/>
-        </p:nvSpPr>
-        <p:spPr>
-          <a:xfrm>
-            <a:off x="7240219" y="4632960"/>
-            <a:ext cx="2200046" cy="365760"/>
-          </a:xfrm>
-          <a:prstGeom prst="roundRect">
-            <a:avLst/>
-          </a:prstGeom>
-          <a:solidFill>
-            <a:srgbClr val="E8EEF7"/>
-          </a:solidFill>
-          <a:ln>
-            <a:solidFill>
-              <a:srgbClr val="1F3A5F"/>
-            </a:solidFill>
-          </a:ln>
-        </p:spPr>
-        <p:style>
-          <a:lnRef idx="1">
-            <a:schemeClr val="accent1"/>
-          </a:lnRef>
-          <a:fillRef idx="3">
-            <a:schemeClr val="accent1"/>
-          </a:fillRef>
-          <a:effectRef idx="2">
-            <a:schemeClr val="accent1"/>
-          </a:effectRef>
-          <a:fontRef idx="minor">
-            <a:schemeClr val="lt1"/>
-          </a:fontRef>
-        </p:style>
-        <p:txBody>
-          <a:bodyPr rtlCol="0" anchor="ctr" lIns="45720" rIns="45720"/>
-          <a:lstStyle/>
-          <a:p>
-            <a:pPr algn="ctr"/>
-            <a:r>
-              <a:rPr sz="900">
-                <a:solidFill>
-                  <a:srgbClr val="1F3A5F"/>
-                </a:solidFill>
-              </a:rPr>
-              <a:t>Gram 17: FR Prometheus, Category 3, Hoth</a:t>
-            </a:r>
-          </a:p>
-        </p:txBody>
-      </p:sp>
-      <p:sp>
-        <p:nvSpPr>
-          <p:cNvPr id="30" name="TextBox 29"/>
-          <p:cNvSpPr txBox="1"/>
-          <p:nvPr/>
-        </p:nvSpPr>
-        <p:spPr>
-          <a:xfrm>
-            <a:off x="7240219" y="5017008"/>
-            <a:ext cx="2200046" cy="1447800"/>
-          </a:xfrm>
-          <a:prstGeom prst="rect">
-            <a:avLst/>
-          </a:prstGeom>
-          <a:noFill/>
-        </p:spPr>
-        <p:txBody>
-          <a:bodyPr wrap="square">
-            <a:spAutoFit/>
-          </a:bodyPr>
-          <a:lstStyle/>
-          <a:p>
-            <a:r>
-              <a:rPr sz="800">
-                <a:hlinkClick r:id="rId43"/>
-              </a:rPr>
-              <a:t>Lofar 1</a:t>
-            </a:r>
-          </a:p>
-          <a:p>
-            <a:r>
-              <a:rPr sz="800">
-                <a:hlinkClick r:id="rId44"/>
-              </a:rPr>
-              <a:t>Lofar 2</a:t>
-            </a:r>
-          </a:p>
-        </p:txBody>
-      </p:sp>
-      <p:sp>
-        <p:nvSpPr>
-          <p:cNvPr id="31" name="Rounded Rectangle 30">
-            <a:hlinkClick r:id="rId45"/>
-          </p:cNvPr>
-          <p:cNvSpPr/>
-          <p:nvPr/>
-        </p:nvSpPr>
-        <p:spPr>
-          <a:xfrm>
-            <a:off x="9531705" y="4632960"/>
-            <a:ext cx="2200046" cy="365760"/>
-          </a:xfrm>
-          <a:prstGeom prst="roundRect">
-            <a:avLst/>
-          </a:prstGeom>
-          <a:solidFill>
-            <a:srgbClr val="E8EEF7"/>
-          </a:solidFill>
-          <a:ln>
-            <a:solidFill>
-              <a:srgbClr val="1F3A5F"/>
-            </a:solidFill>
-          </a:ln>
-        </p:spPr>
-        <p:style>
-          <a:lnRef idx="1">
-            <a:schemeClr val="accent1"/>
-          </a:lnRef>
-          <a:fillRef idx="3">
-            <a:schemeClr val="accent1"/>
-          </a:fillRef>
-          <a:effectRef idx="2">
-            <a:schemeClr val="accent1"/>
-          </a:effectRef>
-          <a:fontRef idx="minor">
-            <a:schemeClr val="lt1"/>
-          </a:fontRef>
-        </p:style>
-        <p:txBody>
-          <a:bodyPr rtlCol="0" anchor="ctr" lIns="45720" rIns="45720"/>
-          <a:lstStyle/>
-          <a:p>
-            <a:pPr algn="ctr"/>
-            <a:r>
-              <a:rPr sz="900">
-                <a:solidFill>
-                  <a:srgbClr val="1F3A5F"/>
-                </a:solidFill>
-              </a:rPr>
-              <a:t>Gram 18: FR A-wing, Category 2, Hoth</a:t>
-            </a:r>
-          </a:p>
-        </p:txBody>
-      </p:sp>
-      <p:sp>
-        <p:nvSpPr>
-          <p:cNvPr id="32" name="TextBox 31"/>
-          <p:cNvSpPr txBox="1"/>
-          <p:nvPr/>
-        </p:nvSpPr>
-        <p:spPr>
-          <a:xfrm>
-            <a:off x="9531705" y="5017008"/>
-            <a:ext cx="2200046" cy="1447800"/>
-          </a:xfrm>
-          <a:prstGeom prst="rect">
-            <a:avLst/>
-          </a:prstGeom>
-          <a:noFill/>
-        </p:spPr>
-        <p:txBody>
-          <a:bodyPr wrap="square">
-            <a:spAutoFit/>
-          </a:bodyPr>
-          <a:lstStyle/>
-          <a:p>
-            <a:r>
-              <a:rPr sz="800">
-                <a:hlinkClick r:id="rId46"/>
-              </a:rPr>
-              <a:t>Lofar 1</a:t>
-            </a:r>
-          </a:p>
-          <a:p>
-            <a:r>
-              <a:rPr sz="800">
-                <a:hlinkClick r:id="rId47"/>
-              </a:rPr>
-              <a:t>Lofar 2</a:t>
-            </a:r>
-          </a:p>
-          <a:p>
-            <a:r>
-              <a:rPr sz="800">
-                <a:hlinkClick r:id="rId48"/>
-              </a:rPr>
-              <a:t>Lofar 3</a:t>
+              <a:t>Instructor Version</a:t>
             </a:r>
           </a:p>
         </p:txBody>
@@ -4630,7 +3223,7 @@
                   <a:srgbClr val="FFFFFF"/>
                 </a:solidFill>
               </a:rPr>
-              <a:t>Instructor Progress Test 4 Grams — Page 2 of 2</a:t>
+              <a:t>Instructor Progress Test 4 Grams — Page 1 of 2</a:t>
             </a:r>
           </a:p>
         </p:txBody>
@@ -4685,7 +3278,7 @@
                   <a:srgbClr val="1F3A5F"/>
                 </a:solidFill>
               </a:rPr>
-              <a:t>Gram 19: Acclamator-class contact bearing 019, codename Defiant</a:t>
+              <a:t>Gram 1: FR A-wing, Category 2, Bespin</a:t>
             </a:r>
           </a:p>
         </p:txBody>
@@ -4787,7 +3380,7 @@
                   <a:srgbClr val="1F3A5F"/>
                 </a:solidFill>
               </a:rPr>
-              <a:t>Gram 21: Akira-class contact bearing 296, codename Bespin</a:t>
+              <a:t>Gram 2: Lambda Shuttle contact bearing 219, codename Cardassia</a:t>
             </a:r>
           </a:p>
         </p:txBody>
@@ -4873,7 +3466,7 @@
                   <a:srgbClr val="1F3A5F"/>
                 </a:solidFill>
               </a:rPr>
-              <a:t>Gram 23: FR Miranda-class, Category 3, Trill</a:t>
+              <a:t>Gram 4: FR Acclamator-class, Category 1, Trill</a:t>
             </a:r>
           </a:p>
         </p:txBody>
@@ -4907,12 +3500,20 @@
               <a:t>Lofar 1</a:t>
             </a:r>
           </a:p>
+          <a:p>
+            <a:r>
+              <a:rPr sz="800">
+                <a:hlinkClick r:id="rId10"/>
+              </a:rPr>
+              <a:t>Lofar 2</a:t>
+            </a:r>
+          </a:p>
         </p:txBody>
       </p:sp>
       <p:sp>
         <p:nvSpPr>
           <p:cNvPr id="9" name="Rounded Rectangle 8">
-            <a:hlinkClick r:id="rId10"/>
+            <a:hlinkClick r:id="rId11"/>
           </p:cNvPr>
           <p:cNvSpPr/>
           <p:nvPr/>
@@ -4959,7 +3560,7 @@
                   <a:srgbClr val="1F3A5F"/>
                 </a:solidFill>
               </a:rPr>
-              <a:t>Gram 24: FR Nebula-class, Category 4, Coruscant</a:t>
+              <a:t>Gram 5: Nebulon-B contact bearing 084, codename Risa</a:t>
             </a:r>
           </a:p>
         </p:txBody>
@@ -4988,7 +3589,7 @@
           <a:p>
             <a:r>
               <a:rPr sz="800">
-                <a:hlinkClick r:id="rId11"/>
+                <a:hlinkClick r:id="rId12"/>
               </a:rPr>
               <a:t>Lofar 1</a:t>
             </a:r>
@@ -4996,7 +3597,7 @@
           <a:p>
             <a:r>
               <a:rPr sz="800">
-                <a:hlinkClick r:id="rId12"/>
+                <a:hlinkClick r:id="rId13"/>
               </a:rPr>
               <a:t>Lofar 2</a:t>
             </a:r>
@@ -5004,7 +3605,7 @@
           <a:p>
             <a:r>
               <a:rPr sz="800">
-                <a:hlinkClick r:id="rId13"/>
+                <a:hlinkClick r:id="rId14"/>
               </a:rPr>
               <a:t>Lofar 3</a:t>
             </a:r>
@@ -5014,7 +3615,7 @@
       <p:sp>
         <p:nvSpPr>
           <p:cNvPr id="11" name="Rounded Rectangle 10">
-            <a:hlinkClick r:id="rId14"/>
+            <a:hlinkClick r:id="rId15"/>
           </p:cNvPr>
           <p:cNvSpPr/>
           <p:nvPr/>
@@ -5061,7 +3662,7 @@
                   <a:srgbClr val="1F3A5F"/>
                 </a:solidFill>
               </a:rPr>
-              <a:t>Gram 25: FR Mon Calamari Cruiser, Category 1, Bespin</a:t>
+              <a:t>Gram 6: Discovery contact bearing 136, codename Tantive</a:t>
             </a:r>
           </a:p>
         </p:txBody>
@@ -5090,7 +3691,7 @@
           <a:p>
             <a:r>
               <a:rPr sz="800">
-                <a:hlinkClick r:id="rId15"/>
+                <a:hlinkClick r:id="rId16"/>
               </a:rPr>
               <a:t>Lofar 1</a:t>
             </a:r>
@@ -5098,7 +3699,7 @@
           <a:p>
             <a:r>
               <a:rPr sz="800">
-                <a:hlinkClick r:id="rId16"/>
+                <a:hlinkClick r:id="rId17"/>
               </a:rPr>
               <a:t>Lofar 2</a:t>
             </a:r>
@@ -5108,7 +3709,7 @@
       <p:sp>
         <p:nvSpPr>
           <p:cNvPr id="13" name="Rounded Rectangle 12">
-            <a:hlinkClick r:id="rId17"/>
+            <a:hlinkClick r:id="rId18"/>
           </p:cNvPr>
           <p:cNvSpPr/>
           <p:nvPr/>
@@ -5155,7 +3756,7 @@
                   <a:srgbClr val="1F3A5F"/>
                 </a:solidFill>
               </a:rPr>
-              <a:t>Gram 26: FR Enterprise, Category 3, Betazed</a:t>
+              <a:t>Gram 7: FR Tantive IV, Category 3, Vulcan</a:t>
             </a:r>
           </a:p>
         </p:txBody>
@@ -5184,7 +3785,7 @@
           <a:p>
             <a:r>
               <a:rPr sz="800">
-                <a:hlinkClick r:id="rId18"/>
+                <a:hlinkClick r:id="rId19"/>
               </a:rPr>
               <a:t>Lofar 1</a:t>
             </a:r>
@@ -5192,17 +3793,25 @@
           <a:p>
             <a:r>
               <a:rPr sz="800">
-                <a:hlinkClick r:id="rId19"/>
+                <a:hlinkClick r:id="rId20"/>
               </a:rPr>
               <a:t>Lofar 2</a:t>
             </a:r>
           </a:p>
+          <a:p>
+            <a:r>
+              <a:rPr sz="800">
+                <a:hlinkClick r:id="rId21"/>
+              </a:rPr>
+              <a:t>Lofar 3</a:t>
+            </a:r>
+          </a:p>
         </p:txBody>
       </p:sp>
       <p:sp>
         <p:nvSpPr>
           <p:cNvPr id="15" name="Rounded Rectangle 14">
-            <a:hlinkClick r:id="rId20"/>
+            <a:hlinkClick r:id="rId22"/>
           </p:cNvPr>
           <p:cNvSpPr/>
           <p:nvPr/>
@@ -5249,7 +3858,7 @@
                   <a:srgbClr val="1F3A5F"/>
                 </a:solidFill>
               </a:rPr>
-              <a:t>Gram 27: FR Excelsior, Category 1, Romulus</a:t>
+              <a:t>Gram 8: FR Devastator, Category 3, Yavin</a:t>
             </a:r>
           </a:p>
         </p:txBody>
@@ -5278,41 +3887,17 @@
           <a:p>
             <a:r>
               <a:rPr sz="800">
-                <a:hlinkClick r:id="rId21"/>
+                <a:hlinkClick r:id="rId23"/>
               </a:rPr>
               <a:t>Lofar 1</a:t>
             </a:r>
           </a:p>
-          <a:p>
-            <a:r>
-              <a:rPr sz="800">
-                <a:hlinkClick r:id="rId22"/>
-              </a:rPr>
-              <a:t>Lofar 2</a:t>
-            </a:r>
-          </a:p>
-          <a:p>
-            <a:r>
-              <a:rPr sz="800">
-                <a:hlinkClick r:id="rId23"/>
-              </a:rPr>
-              <a:t>Lofar 3</a:t>
-            </a:r>
-          </a:p>
-          <a:p>
-            <a:r>
-              <a:rPr sz="800">
-                <a:hlinkClick r:id="rId24"/>
-              </a:rPr>
-              <a:t>Lofar 4</a:t>
-            </a:r>
-          </a:p>
         </p:txBody>
       </p:sp>
       <p:sp>
         <p:nvSpPr>
           <p:cNvPr id="17" name="Rounded Rectangle 16">
-            <a:hlinkClick r:id="rId25"/>
+            <a:hlinkClick r:id="rId24"/>
           </p:cNvPr>
           <p:cNvSpPr/>
           <p:nvPr/>
@@ -5359,7 +3944,7 @@
                   <a:srgbClr val="1F3A5F"/>
                 </a:solidFill>
               </a:rPr>
-              <a:t>Gram 28: FR Devastator, Category 4, Risa</a:t>
+              <a:t>Gram 11: FR Enterprise, Category 2, Mustafar</a:t>
             </a:r>
           </a:p>
         </p:txBody>
@@ -5388,41 +3973,17 @@
           <a:p>
             <a:r>
               <a:rPr sz="800">
-                <a:hlinkClick r:id="rId26"/>
+                <a:hlinkClick r:id="rId25"/>
               </a:rPr>
               <a:t>Lofar 1</a:t>
             </a:r>
           </a:p>
-          <a:p>
-            <a:r>
-              <a:rPr sz="800">
-                <a:hlinkClick r:id="rId27"/>
-              </a:rPr>
-              <a:t>Lofar 2</a:t>
-            </a:r>
-          </a:p>
-          <a:p>
-            <a:r>
-              <a:rPr sz="800">
-                <a:hlinkClick r:id="rId28"/>
-              </a:rPr>
-              <a:t>Lofar 3</a:t>
-            </a:r>
-          </a:p>
-          <a:p>
-            <a:r>
-              <a:rPr sz="800">
-                <a:hlinkClick r:id="rId29"/>
-              </a:rPr>
-              <a:t>Lofar 4</a:t>
-            </a:r>
-          </a:p>
         </p:txBody>
       </p:sp>
       <p:sp>
         <p:nvSpPr>
           <p:cNvPr id="19" name="Rounded Rectangle 18">
-            <a:hlinkClick r:id="rId30"/>
+            <a:hlinkClick r:id="rId26"/>
           </p:cNvPr>
           <p:cNvSpPr/>
           <p:nvPr/>
@@ -5469,7 +4030,7 @@
                   <a:srgbClr val="1F3A5F"/>
                 </a:solidFill>
               </a:rPr>
-              <a:t>Gram 29: Prometheus contact bearing 178, codename Trill</a:t>
+              <a:t>Gram 12: FR Slave I, Category 4, Naboo</a:t>
             </a:r>
           </a:p>
         </p:txBody>
@@ -5498,33 +4059,17 @@
           <a:p>
             <a:r>
               <a:rPr sz="800">
-                <a:hlinkClick r:id="rId31"/>
+                <a:hlinkClick r:id="rId27"/>
               </a:rPr>
               <a:t>Lofar 1</a:t>
             </a:r>
           </a:p>
-          <a:p>
-            <a:r>
-              <a:rPr sz="800">
-                <a:hlinkClick r:id="rId32"/>
-              </a:rPr>
-              <a:t>Lofar 2</a:t>
-            </a:r>
-          </a:p>
-          <a:p>
-            <a:r>
-              <a:rPr sz="800">
-                <a:hlinkClick r:id="rId33"/>
-              </a:rPr>
-              <a:t>Lofar 3</a:t>
-            </a:r>
-          </a:p>
         </p:txBody>
       </p:sp>
       <p:sp>
         <p:nvSpPr>
           <p:cNvPr id="21" name="Rounded Rectangle 20">
-            <a:hlinkClick r:id="rId34"/>
+            <a:hlinkClick r:id="rId28"/>
           </p:cNvPr>
           <p:cNvSpPr/>
           <p:nvPr/>
@@ -5571,7 +4116,7 @@
                   <a:srgbClr val="1F3A5F"/>
                 </a:solidFill>
               </a:rPr>
-              <a:t>Gram 30: FR Ghost, Category 2, Risa</a:t>
+              <a:t>Gram 13: Slave I contact bearing 010, codename Naboo</a:t>
             </a:r>
           </a:p>
         </p:txBody>
@@ -5600,17 +4145,25 @@
           <a:p>
             <a:r>
               <a:rPr sz="800">
-                <a:hlinkClick r:id="rId35"/>
+                <a:hlinkClick r:id="rId29"/>
               </a:rPr>
               <a:t>Lofar 1</a:t>
             </a:r>
           </a:p>
+          <a:p>
+            <a:r>
+              <a:rPr sz="800">
+                <a:hlinkClick r:id="rId30"/>
+              </a:rPr>
+              <a:t>Lofar 2</a:t>
+            </a:r>
+          </a:p>
         </p:txBody>
       </p:sp>
       <p:sp>
         <p:nvSpPr>
           <p:cNvPr id="23" name="Rounded Rectangle 22">
-            <a:hlinkClick r:id="rId36"/>
+            <a:hlinkClick r:id="rId31"/>
           </p:cNvPr>
           <p:cNvSpPr/>
           <p:nvPr/>
@@ -5657,7 +4210,7 @@
                   <a:srgbClr val="1F3A5F"/>
                 </a:solidFill>
               </a:rPr>
-              <a:t>Gram 32: FR Defiant, Category 4, Kobol</a:t>
+              <a:t>Gram 14: FR Galaxy-class, Category 2, Risa</a:t>
             </a:r>
           </a:p>
         </p:txBody>
@@ -5686,7 +4239,7 @@
           <a:p>
             <a:r>
               <a:rPr sz="800">
-                <a:hlinkClick r:id="rId37"/>
+                <a:hlinkClick r:id="rId32"/>
               </a:rPr>
               <a:t>Lofar 1</a:t>
             </a:r>
@@ -5696,7 +4249,7 @@
       <p:sp>
         <p:nvSpPr>
           <p:cNvPr id="25" name="Rounded Rectangle 24">
-            <a:hlinkClick r:id="rId38"/>
+            <a:hlinkClick r:id="rId33"/>
           </p:cNvPr>
           <p:cNvSpPr/>
           <p:nvPr/>
@@ -5743,7 +4296,7 @@
                   <a:srgbClr val="1F3A5F"/>
                 </a:solidFill>
               </a:rPr>
-              <a:t>Gram 33: FR Ghost, Category 4, Risa</a:t>
+              <a:t>Gram 15: FR Y-wing, Category 4, Vulcan</a:t>
             </a:r>
           </a:p>
         </p:txBody>
@@ -5772,7 +4325,7 @@
           <a:p>
             <a:r>
               <a:rPr sz="800">
-                <a:hlinkClick r:id="rId39"/>
+                <a:hlinkClick r:id="rId34"/>
               </a:rPr>
               <a:t>Lofar 1</a:t>
             </a:r>
@@ -5780,7 +4333,7 @@
           <a:p>
             <a:r>
               <a:rPr sz="800">
-                <a:hlinkClick r:id="rId40"/>
+                <a:hlinkClick r:id="rId35"/>
               </a:rPr>
               <a:t>Lofar 2</a:t>
             </a:r>
@@ -5788,7 +4341,7 @@
           <a:p>
             <a:r>
               <a:rPr sz="800">
-                <a:hlinkClick r:id="rId41"/>
+                <a:hlinkClick r:id="rId36"/>
               </a:rPr>
               <a:t>Lofar 3</a:t>
             </a:r>
@@ -5796,7 +4349,7 @@
           <a:p>
             <a:r>
               <a:rPr sz="800">
-                <a:hlinkClick r:id="rId42"/>
+                <a:hlinkClick r:id="rId37"/>
               </a:rPr>
               <a:t>Lofar 4</a:t>
             </a:r>
@@ -5806,7 +4359,7 @@
       <p:sp>
         <p:nvSpPr>
           <p:cNvPr id="27" name="Rounded Rectangle 26">
-            <a:hlinkClick r:id="rId43"/>
+            <a:hlinkClick r:id="rId38"/>
           </p:cNvPr>
           <p:cNvSpPr/>
           <p:nvPr/>
@@ -5853,7 +4406,7 @@
                   <a:srgbClr val="1F3A5F"/>
                 </a:solidFill>
               </a:rPr>
-              <a:t>Gram 34: FR Reliant, Category 3, Risa</a:t>
+              <a:t>Gram 16: FR Tantive IV, Category 2, Dagobah</a:t>
             </a:r>
           </a:p>
         </p:txBody>
@@ -5882,7 +4435,7 @@
           <a:p>
             <a:r>
               <a:rPr sz="800">
-                <a:hlinkClick r:id="rId44"/>
+                <a:hlinkClick r:id="rId39"/>
               </a:rPr>
               <a:t>Lofar 1</a:t>
             </a:r>
@@ -5890,7 +4443,7 @@
           <a:p>
             <a:r>
               <a:rPr sz="800">
-                <a:hlinkClick r:id="rId45"/>
+                <a:hlinkClick r:id="rId40"/>
               </a:rPr>
               <a:t>Lofar 2</a:t>
             </a:r>
@@ -5898,25 +4451,17 @@
           <a:p>
             <a:r>
               <a:rPr sz="800">
-                <a:hlinkClick r:id="rId46"/>
+                <a:hlinkClick r:id="rId41"/>
               </a:rPr>
               <a:t>Lofar 3</a:t>
             </a:r>
           </a:p>
-          <a:p>
-            <a:r>
-              <a:rPr sz="800">
-                <a:hlinkClick r:id="rId47"/>
-              </a:rPr>
-              <a:t>Lofar 4</a:t>
-            </a:r>
-          </a:p>
         </p:txBody>
       </p:sp>
       <p:sp>
         <p:nvSpPr>
           <p:cNvPr id="29" name="Rounded Rectangle 28">
-            <a:hlinkClick r:id="rId48"/>
+            <a:hlinkClick r:id="rId42"/>
           </p:cNvPr>
           <p:cNvSpPr/>
           <p:nvPr/>
@@ -5963,7 +4508,7 @@
                   <a:srgbClr val="1F3A5F"/>
                 </a:solidFill>
               </a:rPr>
-              <a:t>Gram 35: FR Slave I, Category 3, Dagobah</a:t>
+              <a:t>Gram 17: FR Prometheus, Category 3, Hoth</a:t>
             </a:r>
           </a:p>
         </p:txBody>
@@ -5992,17 +4537,25 @@
           <a:p>
             <a:r>
               <a:rPr sz="800">
-                <a:hlinkClick r:id="rId49"/>
+                <a:hlinkClick r:id="rId43"/>
               </a:rPr>
               <a:t>Lofar 1</a:t>
             </a:r>
           </a:p>
+          <a:p>
+            <a:r>
+              <a:rPr sz="800">
+                <a:hlinkClick r:id="rId44"/>
+              </a:rPr>
+              <a:t>Lofar 2</a:t>
+            </a:r>
+          </a:p>
         </p:txBody>
       </p:sp>
       <p:sp>
         <p:nvSpPr>
           <p:cNvPr id="31" name="Rounded Rectangle 30">
-            <a:hlinkClick r:id="rId50"/>
+            <a:hlinkClick r:id="rId45"/>
           </p:cNvPr>
           <p:cNvSpPr/>
           <p:nvPr/>
@@ -6049,7 +4602,7 @@
                   <a:srgbClr val="1F3A5F"/>
                 </a:solidFill>
               </a:rPr>
-              <a:t>Gram 36: FR Equinox, Category 2, Gandalf</a:t>
+              <a:t>Gram 18: FR A-wing, Category 2, Hoth</a:t>
             </a:r>
           </a:p>
         </p:txBody>
@@ -6078,6 +4631,1541 @@
           <a:p>
             <a:r>
               <a:rPr sz="800">
+                <a:hlinkClick r:id="rId46"/>
+              </a:rPr>
+              <a:t>Lofar 1</a:t>
+            </a:r>
+          </a:p>
+          <a:p>
+            <a:r>
+              <a:rPr sz="800">
+                <a:hlinkClick r:id="rId47"/>
+              </a:rPr>
+              <a:t>Lofar 2</a:t>
+            </a:r>
+          </a:p>
+          <a:p>
+            <a:r>
+              <a:rPr sz="800">
+                <a:hlinkClick r:id="rId48"/>
+              </a:rPr>
+              <a:t>Lofar 3</a:t>
+            </a:r>
+          </a:p>
+        </p:txBody>
+      </p:sp>
+    </p:spTree>
+  </p:cSld>
+  <p:clrMapOvr>
+    <a:masterClrMapping/>
+  </p:clrMapOvr>
+</p:sld>
+</file>
+
+<file path=ppt/slides/slide3.xml><?xml version="1.0" encoding="utf-8"?>
+<p:sld xmlns:a="http://schemas.openxmlformats.org/drawingml/2006/main" xmlns:p="http://schemas.openxmlformats.org/presentationml/2006/main" xmlns:r="http://schemas.openxmlformats.org/officeDocument/2006/relationships">
+  <p:cSld>
+    <p:spTree>
+      <p:nvGrpSpPr>
+        <p:cNvPr id="1" name=""/>
+        <p:cNvGrpSpPr/>
+        <p:nvPr/>
+      </p:nvGrpSpPr>
+      <p:grpSpPr/>
+      <p:sp>
+        <p:nvSpPr>
+          <p:cNvPr id="2" name="Rectangle 1"/>
+          <p:cNvSpPr/>
+          <p:nvPr/>
+        </p:nvSpPr>
+        <p:spPr>
+          <a:xfrm>
+            <a:off x="0" y="0"/>
+            <a:ext cx="12188952" cy="548640"/>
+          </a:xfrm>
+          <a:prstGeom prst="rect">
+            <a:avLst/>
+          </a:prstGeom>
+          <a:solidFill>
+            <a:srgbClr val="1F3A5F"/>
+          </a:solidFill>
+          <a:ln>
+            <a:noFill/>
+          </a:ln>
+        </p:spPr>
+        <p:style>
+          <a:lnRef idx="1">
+            <a:schemeClr val="accent1"/>
+          </a:lnRef>
+          <a:fillRef idx="3">
+            <a:schemeClr val="accent1"/>
+          </a:fillRef>
+          <a:effectRef idx="2">
+            <a:schemeClr val="accent1"/>
+          </a:effectRef>
+          <a:fontRef idx="minor">
+            <a:schemeClr val="lt1"/>
+          </a:fontRef>
+        </p:style>
+        <p:txBody>
+          <a:bodyPr rtlCol="0" anchor="ctr" lIns="182880" rIns="182880"/>
+          <a:lstStyle/>
+          <a:p>
+            <a:pPr algn="ctr"/>
+            <a:r>
+              <a:rPr sz="2000" b="1">
+                <a:solidFill>
+                  <a:srgbClr val="FFFFFF"/>
+                </a:solidFill>
+              </a:rPr>
+              <a:t>Instructor Progress Test 4 Grams — Page 2 of 2</a:t>
+            </a:r>
+          </a:p>
+        </p:txBody>
+      </p:sp>
+      <p:sp>
+        <p:nvSpPr>
+          <p:cNvPr id="3" name="Rounded Rectangle 2">
+            <a:hlinkClick r:id="rId2"/>
+          </p:cNvPr>
+          <p:cNvSpPr/>
+          <p:nvPr/>
+        </p:nvSpPr>
+        <p:spPr>
+          <a:xfrm>
+            <a:off x="365760" y="731520"/>
+            <a:ext cx="2200046" cy="365760"/>
+          </a:xfrm>
+          <a:prstGeom prst="roundRect">
+            <a:avLst/>
+          </a:prstGeom>
+          <a:solidFill>
+            <a:srgbClr val="E8EEF7"/>
+          </a:solidFill>
+          <a:ln>
+            <a:solidFill>
+              <a:srgbClr val="1F3A5F"/>
+            </a:solidFill>
+          </a:ln>
+        </p:spPr>
+        <p:style>
+          <a:lnRef idx="1">
+            <a:schemeClr val="accent1"/>
+          </a:lnRef>
+          <a:fillRef idx="3">
+            <a:schemeClr val="accent1"/>
+          </a:fillRef>
+          <a:effectRef idx="2">
+            <a:schemeClr val="accent1"/>
+          </a:effectRef>
+          <a:fontRef idx="minor">
+            <a:schemeClr val="lt1"/>
+          </a:fontRef>
+        </p:style>
+        <p:txBody>
+          <a:bodyPr rtlCol="0" anchor="ctr" lIns="45720" rIns="45720"/>
+          <a:lstStyle/>
+          <a:p>
+            <a:pPr algn="ctr"/>
+            <a:r>
+              <a:rPr sz="900">
+                <a:solidFill>
+                  <a:srgbClr val="1F3A5F"/>
+                </a:solidFill>
+              </a:rPr>
+              <a:t>Gram 19: Acclamator-class contact bearing 019, codename Defiant</a:t>
+            </a:r>
+          </a:p>
+        </p:txBody>
+      </p:sp>
+      <p:sp>
+        <p:nvSpPr>
+          <p:cNvPr id="4" name="TextBox 3"/>
+          <p:cNvSpPr txBox="1"/>
+          <p:nvPr/>
+        </p:nvSpPr>
+        <p:spPr>
+          <a:xfrm>
+            <a:off x="365760" y="1115568"/>
+            <a:ext cx="2200046" cy="1447800"/>
+          </a:xfrm>
+          <a:prstGeom prst="rect">
+            <a:avLst/>
+          </a:prstGeom>
+          <a:noFill/>
+        </p:spPr>
+        <p:txBody>
+          <a:bodyPr wrap="square">
+            <a:spAutoFit/>
+          </a:bodyPr>
+          <a:lstStyle/>
+          <a:p>
+            <a:r>
+              <a:rPr sz="800">
+                <a:hlinkClick r:id="rId3"/>
+              </a:rPr>
+              <a:t>Lofar 1</a:t>
+            </a:r>
+          </a:p>
+          <a:p>
+            <a:r>
+              <a:rPr sz="800">
+                <a:hlinkClick r:id="rId4"/>
+              </a:rPr>
+              <a:t>Lofar 2</a:t>
+            </a:r>
+          </a:p>
+          <a:p>
+            <a:r>
+              <a:rPr sz="800">
+                <a:hlinkClick r:id="rId5"/>
+              </a:rPr>
+              <a:t>Lofar 3</a:t>
+            </a:r>
+          </a:p>
+        </p:txBody>
+      </p:sp>
+      <p:sp>
+        <p:nvSpPr>
+          <p:cNvPr id="5" name="Rounded Rectangle 4">
+            <a:hlinkClick r:id="rId6"/>
+          </p:cNvPr>
+          <p:cNvSpPr/>
+          <p:nvPr/>
+        </p:nvSpPr>
+        <p:spPr>
+          <a:xfrm>
+            <a:off x="2657246" y="731520"/>
+            <a:ext cx="2200046" cy="365760"/>
+          </a:xfrm>
+          <a:prstGeom prst="roundRect">
+            <a:avLst/>
+          </a:prstGeom>
+          <a:solidFill>
+            <a:srgbClr val="E8EEF7"/>
+          </a:solidFill>
+          <a:ln>
+            <a:solidFill>
+              <a:srgbClr val="1F3A5F"/>
+            </a:solidFill>
+          </a:ln>
+        </p:spPr>
+        <p:style>
+          <a:lnRef idx="1">
+            <a:schemeClr val="accent1"/>
+          </a:lnRef>
+          <a:fillRef idx="3">
+            <a:schemeClr val="accent1"/>
+          </a:fillRef>
+          <a:effectRef idx="2">
+            <a:schemeClr val="accent1"/>
+          </a:effectRef>
+          <a:fontRef idx="minor">
+            <a:schemeClr val="lt1"/>
+          </a:fontRef>
+        </p:style>
+        <p:txBody>
+          <a:bodyPr rtlCol="0" anchor="ctr" lIns="45720" rIns="45720"/>
+          <a:lstStyle/>
+          <a:p>
+            <a:pPr algn="ctr"/>
+            <a:r>
+              <a:rPr sz="900">
+                <a:solidFill>
+                  <a:srgbClr val="1F3A5F"/>
+                </a:solidFill>
+              </a:rPr>
+              <a:t>Gram 21: Akira-class contact bearing 296, codename Bespin</a:t>
+            </a:r>
+          </a:p>
+        </p:txBody>
+      </p:sp>
+      <p:sp>
+        <p:nvSpPr>
+          <p:cNvPr id="6" name="TextBox 5"/>
+          <p:cNvSpPr txBox="1"/>
+          <p:nvPr/>
+        </p:nvSpPr>
+        <p:spPr>
+          <a:xfrm>
+            <a:off x="2657246" y="1115568"/>
+            <a:ext cx="2200046" cy="1447800"/>
+          </a:xfrm>
+          <a:prstGeom prst="rect">
+            <a:avLst/>
+          </a:prstGeom>
+          <a:noFill/>
+        </p:spPr>
+        <p:txBody>
+          <a:bodyPr wrap="square">
+            <a:spAutoFit/>
+          </a:bodyPr>
+          <a:lstStyle/>
+          <a:p>
+            <a:r>
+              <a:rPr sz="800">
+                <a:hlinkClick r:id="rId7"/>
+              </a:rPr>
+              <a:t>Lofar 1</a:t>
+            </a:r>
+          </a:p>
+        </p:txBody>
+      </p:sp>
+      <p:sp>
+        <p:nvSpPr>
+          <p:cNvPr id="7" name="Rounded Rectangle 6">
+            <a:hlinkClick r:id="rId8"/>
+          </p:cNvPr>
+          <p:cNvSpPr/>
+          <p:nvPr/>
+        </p:nvSpPr>
+        <p:spPr>
+          <a:xfrm>
+            <a:off x="4948732" y="731520"/>
+            <a:ext cx="2200046" cy="365760"/>
+          </a:xfrm>
+          <a:prstGeom prst="roundRect">
+            <a:avLst/>
+          </a:prstGeom>
+          <a:solidFill>
+            <a:srgbClr val="E8EEF7"/>
+          </a:solidFill>
+          <a:ln>
+            <a:solidFill>
+              <a:srgbClr val="1F3A5F"/>
+            </a:solidFill>
+          </a:ln>
+        </p:spPr>
+        <p:style>
+          <a:lnRef idx="1">
+            <a:schemeClr val="accent1"/>
+          </a:lnRef>
+          <a:fillRef idx="3">
+            <a:schemeClr val="accent1"/>
+          </a:fillRef>
+          <a:effectRef idx="2">
+            <a:schemeClr val="accent1"/>
+          </a:effectRef>
+          <a:fontRef idx="minor">
+            <a:schemeClr val="lt1"/>
+          </a:fontRef>
+        </p:style>
+        <p:txBody>
+          <a:bodyPr rtlCol="0" anchor="ctr" lIns="45720" rIns="45720"/>
+          <a:lstStyle/>
+          <a:p>
+            <a:pPr algn="ctr"/>
+            <a:r>
+              <a:rPr sz="900">
+                <a:solidFill>
+                  <a:srgbClr val="1F3A5F"/>
+                </a:solidFill>
+              </a:rPr>
+              <a:t>Gram 23: FR Miranda-class, Category 3, Trill</a:t>
+            </a:r>
+          </a:p>
+        </p:txBody>
+      </p:sp>
+      <p:sp>
+        <p:nvSpPr>
+          <p:cNvPr id="8" name="TextBox 7"/>
+          <p:cNvSpPr txBox="1"/>
+          <p:nvPr/>
+        </p:nvSpPr>
+        <p:spPr>
+          <a:xfrm>
+            <a:off x="4948732" y="1115568"/>
+            <a:ext cx="2200046" cy="1447800"/>
+          </a:xfrm>
+          <a:prstGeom prst="rect">
+            <a:avLst/>
+          </a:prstGeom>
+          <a:noFill/>
+        </p:spPr>
+        <p:txBody>
+          <a:bodyPr wrap="square">
+            <a:spAutoFit/>
+          </a:bodyPr>
+          <a:lstStyle/>
+          <a:p>
+            <a:r>
+              <a:rPr sz="800">
+                <a:hlinkClick r:id="rId9"/>
+              </a:rPr>
+              <a:t>Lofar 1</a:t>
+            </a:r>
+          </a:p>
+        </p:txBody>
+      </p:sp>
+      <p:sp>
+        <p:nvSpPr>
+          <p:cNvPr id="9" name="Rounded Rectangle 8">
+            <a:hlinkClick r:id="rId10"/>
+          </p:cNvPr>
+          <p:cNvSpPr/>
+          <p:nvPr/>
+        </p:nvSpPr>
+        <p:spPr>
+          <a:xfrm>
+            <a:off x="7240219" y="731520"/>
+            <a:ext cx="2200046" cy="365760"/>
+          </a:xfrm>
+          <a:prstGeom prst="roundRect">
+            <a:avLst/>
+          </a:prstGeom>
+          <a:solidFill>
+            <a:srgbClr val="E8EEF7"/>
+          </a:solidFill>
+          <a:ln>
+            <a:solidFill>
+              <a:srgbClr val="1F3A5F"/>
+            </a:solidFill>
+          </a:ln>
+        </p:spPr>
+        <p:style>
+          <a:lnRef idx="1">
+            <a:schemeClr val="accent1"/>
+          </a:lnRef>
+          <a:fillRef idx="3">
+            <a:schemeClr val="accent1"/>
+          </a:fillRef>
+          <a:effectRef idx="2">
+            <a:schemeClr val="accent1"/>
+          </a:effectRef>
+          <a:fontRef idx="minor">
+            <a:schemeClr val="lt1"/>
+          </a:fontRef>
+        </p:style>
+        <p:txBody>
+          <a:bodyPr rtlCol="0" anchor="ctr" lIns="45720" rIns="45720"/>
+          <a:lstStyle/>
+          <a:p>
+            <a:pPr algn="ctr"/>
+            <a:r>
+              <a:rPr sz="900">
+                <a:solidFill>
+                  <a:srgbClr val="1F3A5F"/>
+                </a:solidFill>
+              </a:rPr>
+              <a:t>Gram 24: FR Nebula-class, Category 4, Coruscant</a:t>
+            </a:r>
+          </a:p>
+        </p:txBody>
+      </p:sp>
+      <p:sp>
+        <p:nvSpPr>
+          <p:cNvPr id="10" name="TextBox 9"/>
+          <p:cNvSpPr txBox="1"/>
+          <p:nvPr/>
+        </p:nvSpPr>
+        <p:spPr>
+          <a:xfrm>
+            <a:off x="7240219" y="1115568"/>
+            <a:ext cx="2200046" cy="1447800"/>
+          </a:xfrm>
+          <a:prstGeom prst="rect">
+            <a:avLst/>
+          </a:prstGeom>
+          <a:noFill/>
+        </p:spPr>
+        <p:txBody>
+          <a:bodyPr wrap="square">
+            <a:spAutoFit/>
+          </a:bodyPr>
+          <a:lstStyle/>
+          <a:p>
+            <a:r>
+              <a:rPr sz="800">
+                <a:hlinkClick r:id="rId11"/>
+              </a:rPr>
+              <a:t>Lofar 1</a:t>
+            </a:r>
+          </a:p>
+          <a:p>
+            <a:r>
+              <a:rPr sz="800">
+                <a:hlinkClick r:id="rId12"/>
+              </a:rPr>
+              <a:t>Lofar 2</a:t>
+            </a:r>
+          </a:p>
+          <a:p>
+            <a:r>
+              <a:rPr sz="800">
+                <a:hlinkClick r:id="rId13"/>
+              </a:rPr>
+              <a:t>Lofar 3</a:t>
+            </a:r>
+          </a:p>
+        </p:txBody>
+      </p:sp>
+      <p:sp>
+        <p:nvSpPr>
+          <p:cNvPr id="11" name="Rounded Rectangle 10">
+            <a:hlinkClick r:id="rId14"/>
+          </p:cNvPr>
+          <p:cNvSpPr/>
+          <p:nvPr/>
+        </p:nvSpPr>
+        <p:spPr>
+          <a:xfrm>
+            <a:off x="9531705" y="731520"/>
+            <a:ext cx="2200046" cy="365760"/>
+          </a:xfrm>
+          <a:prstGeom prst="roundRect">
+            <a:avLst/>
+          </a:prstGeom>
+          <a:solidFill>
+            <a:srgbClr val="E8EEF7"/>
+          </a:solidFill>
+          <a:ln>
+            <a:solidFill>
+              <a:srgbClr val="1F3A5F"/>
+            </a:solidFill>
+          </a:ln>
+        </p:spPr>
+        <p:style>
+          <a:lnRef idx="1">
+            <a:schemeClr val="accent1"/>
+          </a:lnRef>
+          <a:fillRef idx="3">
+            <a:schemeClr val="accent1"/>
+          </a:fillRef>
+          <a:effectRef idx="2">
+            <a:schemeClr val="accent1"/>
+          </a:effectRef>
+          <a:fontRef idx="minor">
+            <a:schemeClr val="lt1"/>
+          </a:fontRef>
+        </p:style>
+        <p:txBody>
+          <a:bodyPr rtlCol="0" anchor="ctr" lIns="45720" rIns="45720"/>
+          <a:lstStyle/>
+          <a:p>
+            <a:pPr algn="ctr"/>
+            <a:r>
+              <a:rPr sz="900">
+                <a:solidFill>
+                  <a:srgbClr val="1F3A5F"/>
+                </a:solidFill>
+              </a:rPr>
+              <a:t>Gram 25: FR Mon Calamari Cruiser, Category 1, Bespin</a:t>
+            </a:r>
+          </a:p>
+        </p:txBody>
+      </p:sp>
+      <p:sp>
+        <p:nvSpPr>
+          <p:cNvPr id="12" name="TextBox 11"/>
+          <p:cNvSpPr txBox="1"/>
+          <p:nvPr/>
+        </p:nvSpPr>
+        <p:spPr>
+          <a:xfrm>
+            <a:off x="9531705" y="1115568"/>
+            <a:ext cx="2200046" cy="1447800"/>
+          </a:xfrm>
+          <a:prstGeom prst="rect">
+            <a:avLst/>
+          </a:prstGeom>
+          <a:noFill/>
+        </p:spPr>
+        <p:txBody>
+          <a:bodyPr wrap="square">
+            <a:spAutoFit/>
+          </a:bodyPr>
+          <a:lstStyle/>
+          <a:p>
+            <a:r>
+              <a:rPr sz="800">
+                <a:hlinkClick r:id="rId15"/>
+              </a:rPr>
+              <a:t>Lofar 1</a:t>
+            </a:r>
+          </a:p>
+          <a:p>
+            <a:r>
+              <a:rPr sz="800">
+                <a:hlinkClick r:id="rId16"/>
+              </a:rPr>
+              <a:t>Lofar 2</a:t>
+            </a:r>
+          </a:p>
+        </p:txBody>
+      </p:sp>
+      <p:sp>
+        <p:nvSpPr>
+          <p:cNvPr id="13" name="Rounded Rectangle 12">
+            <a:hlinkClick r:id="rId17"/>
+          </p:cNvPr>
+          <p:cNvSpPr/>
+          <p:nvPr/>
+        </p:nvSpPr>
+        <p:spPr>
+          <a:xfrm>
+            <a:off x="365760" y="2682240"/>
+            <a:ext cx="2200046" cy="365760"/>
+          </a:xfrm>
+          <a:prstGeom prst="roundRect">
+            <a:avLst/>
+          </a:prstGeom>
+          <a:solidFill>
+            <a:srgbClr val="E8EEF7"/>
+          </a:solidFill>
+          <a:ln>
+            <a:solidFill>
+              <a:srgbClr val="1F3A5F"/>
+            </a:solidFill>
+          </a:ln>
+        </p:spPr>
+        <p:style>
+          <a:lnRef idx="1">
+            <a:schemeClr val="accent1"/>
+          </a:lnRef>
+          <a:fillRef idx="3">
+            <a:schemeClr val="accent1"/>
+          </a:fillRef>
+          <a:effectRef idx="2">
+            <a:schemeClr val="accent1"/>
+          </a:effectRef>
+          <a:fontRef idx="minor">
+            <a:schemeClr val="lt1"/>
+          </a:fontRef>
+        </p:style>
+        <p:txBody>
+          <a:bodyPr rtlCol="0" anchor="ctr" lIns="45720" rIns="45720"/>
+          <a:lstStyle/>
+          <a:p>
+            <a:pPr algn="ctr"/>
+            <a:r>
+              <a:rPr sz="900">
+                <a:solidFill>
+                  <a:srgbClr val="1F3A5F"/>
+                </a:solidFill>
+              </a:rPr>
+              <a:t>Gram 26: FR Enterprise, Category 3, Betazed</a:t>
+            </a:r>
+          </a:p>
+        </p:txBody>
+      </p:sp>
+      <p:sp>
+        <p:nvSpPr>
+          <p:cNvPr id="14" name="TextBox 13"/>
+          <p:cNvSpPr txBox="1"/>
+          <p:nvPr/>
+        </p:nvSpPr>
+        <p:spPr>
+          <a:xfrm>
+            <a:off x="365760" y="3066288"/>
+            <a:ext cx="2200046" cy="1447800"/>
+          </a:xfrm>
+          <a:prstGeom prst="rect">
+            <a:avLst/>
+          </a:prstGeom>
+          <a:noFill/>
+        </p:spPr>
+        <p:txBody>
+          <a:bodyPr wrap="square">
+            <a:spAutoFit/>
+          </a:bodyPr>
+          <a:lstStyle/>
+          <a:p>
+            <a:r>
+              <a:rPr sz="800">
+                <a:hlinkClick r:id="rId18"/>
+              </a:rPr>
+              <a:t>Lofar 1</a:t>
+            </a:r>
+          </a:p>
+          <a:p>
+            <a:r>
+              <a:rPr sz="800">
+                <a:hlinkClick r:id="rId19"/>
+              </a:rPr>
+              <a:t>Lofar 2</a:t>
+            </a:r>
+          </a:p>
+        </p:txBody>
+      </p:sp>
+      <p:sp>
+        <p:nvSpPr>
+          <p:cNvPr id="15" name="Rounded Rectangle 14">
+            <a:hlinkClick r:id="rId20"/>
+          </p:cNvPr>
+          <p:cNvSpPr/>
+          <p:nvPr/>
+        </p:nvSpPr>
+        <p:spPr>
+          <a:xfrm>
+            <a:off x="2657246" y="2682240"/>
+            <a:ext cx="2200046" cy="365760"/>
+          </a:xfrm>
+          <a:prstGeom prst="roundRect">
+            <a:avLst/>
+          </a:prstGeom>
+          <a:solidFill>
+            <a:srgbClr val="E8EEF7"/>
+          </a:solidFill>
+          <a:ln>
+            <a:solidFill>
+              <a:srgbClr val="1F3A5F"/>
+            </a:solidFill>
+          </a:ln>
+        </p:spPr>
+        <p:style>
+          <a:lnRef idx="1">
+            <a:schemeClr val="accent1"/>
+          </a:lnRef>
+          <a:fillRef idx="3">
+            <a:schemeClr val="accent1"/>
+          </a:fillRef>
+          <a:effectRef idx="2">
+            <a:schemeClr val="accent1"/>
+          </a:effectRef>
+          <a:fontRef idx="minor">
+            <a:schemeClr val="lt1"/>
+          </a:fontRef>
+        </p:style>
+        <p:txBody>
+          <a:bodyPr rtlCol="0" anchor="ctr" lIns="45720" rIns="45720"/>
+          <a:lstStyle/>
+          <a:p>
+            <a:pPr algn="ctr"/>
+            <a:r>
+              <a:rPr sz="900">
+                <a:solidFill>
+                  <a:srgbClr val="1F3A5F"/>
+                </a:solidFill>
+              </a:rPr>
+              <a:t>Gram 27: FR Excelsior, Category 1, Romulus</a:t>
+            </a:r>
+          </a:p>
+        </p:txBody>
+      </p:sp>
+      <p:sp>
+        <p:nvSpPr>
+          <p:cNvPr id="16" name="TextBox 15"/>
+          <p:cNvSpPr txBox="1"/>
+          <p:nvPr/>
+        </p:nvSpPr>
+        <p:spPr>
+          <a:xfrm>
+            <a:off x="2657246" y="3066288"/>
+            <a:ext cx="2200046" cy="1447800"/>
+          </a:xfrm>
+          <a:prstGeom prst="rect">
+            <a:avLst/>
+          </a:prstGeom>
+          <a:noFill/>
+        </p:spPr>
+        <p:txBody>
+          <a:bodyPr wrap="square">
+            <a:spAutoFit/>
+          </a:bodyPr>
+          <a:lstStyle/>
+          <a:p>
+            <a:r>
+              <a:rPr sz="800">
+                <a:hlinkClick r:id="rId21"/>
+              </a:rPr>
+              <a:t>Lofar 1</a:t>
+            </a:r>
+          </a:p>
+          <a:p>
+            <a:r>
+              <a:rPr sz="800">
+                <a:hlinkClick r:id="rId22"/>
+              </a:rPr>
+              <a:t>Lofar 2</a:t>
+            </a:r>
+          </a:p>
+          <a:p>
+            <a:r>
+              <a:rPr sz="800">
+                <a:hlinkClick r:id="rId23"/>
+              </a:rPr>
+              <a:t>Lofar 3</a:t>
+            </a:r>
+          </a:p>
+          <a:p>
+            <a:r>
+              <a:rPr sz="800">
+                <a:hlinkClick r:id="rId24"/>
+              </a:rPr>
+              <a:t>Lofar 4</a:t>
+            </a:r>
+          </a:p>
+        </p:txBody>
+      </p:sp>
+      <p:sp>
+        <p:nvSpPr>
+          <p:cNvPr id="17" name="Rounded Rectangle 16">
+            <a:hlinkClick r:id="rId25"/>
+          </p:cNvPr>
+          <p:cNvSpPr/>
+          <p:nvPr/>
+        </p:nvSpPr>
+        <p:spPr>
+          <a:xfrm>
+            <a:off x="4948732" y="2682240"/>
+            <a:ext cx="2200046" cy="365760"/>
+          </a:xfrm>
+          <a:prstGeom prst="roundRect">
+            <a:avLst/>
+          </a:prstGeom>
+          <a:solidFill>
+            <a:srgbClr val="E8EEF7"/>
+          </a:solidFill>
+          <a:ln>
+            <a:solidFill>
+              <a:srgbClr val="1F3A5F"/>
+            </a:solidFill>
+          </a:ln>
+        </p:spPr>
+        <p:style>
+          <a:lnRef idx="1">
+            <a:schemeClr val="accent1"/>
+          </a:lnRef>
+          <a:fillRef idx="3">
+            <a:schemeClr val="accent1"/>
+          </a:fillRef>
+          <a:effectRef idx="2">
+            <a:schemeClr val="accent1"/>
+          </a:effectRef>
+          <a:fontRef idx="minor">
+            <a:schemeClr val="lt1"/>
+          </a:fontRef>
+        </p:style>
+        <p:txBody>
+          <a:bodyPr rtlCol="0" anchor="ctr" lIns="45720" rIns="45720"/>
+          <a:lstStyle/>
+          <a:p>
+            <a:pPr algn="ctr"/>
+            <a:r>
+              <a:rPr sz="900">
+                <a:solidFill>
+                  <a:srgbClr val="1F3A5F"/>
+                </a:solidFill>
+              </a:rPr>
+              <a:t>Gram 28: FR Devastator, Category 4, Risa</a:t>
+            </a:r>
+          </a:p>
+        </p:txBody>
+      </p:sp>
+      <p:sp>
+        <p:nvSpPr>
+          <p:cNvPr id="18" name="TextBox 17"/>
+          <p:cNvSpPr txBox="1"/>
+          <p:nvPr/>
+        </p:nvSpPr>
+        <p:spPr>
+          <a:xfrm>
+            <a:off x="4948732" y="3066288"/>
+            <a:ext cx="2200046" cy="1447800"/>
+          </a:xfrm>
+          <a:prstGeom prst="rect">
+            <a:avLst/>
+          </a:prstGeom>
+          <a:noFill/>
+        </p:spPr>
+        <p:txBody>
+          <a:bodyPr wrap="square">
+            <a:spAutoFit/>
+          </a:bodyPr>
+          <a:lstStyle/>
+          <a:p>
+            <a:r>
+              <a:rPr sz="800">
+                <a:hlinkClick r:id="rId26"/>
+              </a:rPr>
+              <a:t>Lofar 1</a:t>
+            </a:r>
+          </a:p>
+          <a:p>
+            <a:r>
+              <a:rPr sz="800">
+                <a:hlinkClick r:id="rId27"/>
+              </a:rPr>
+              <a:t>Lofar 2</a:t>
+            </a:r>
+          </a:p>
+          <a:p>
+            <a:r>
+              <a:rPr sz="800">
+                <a:hlinkClick r:id="rId28"/>
+              </a:rPr>
+              <a:t>Lofar 3</a:t>
+            </a:r>
+          </a:p>
+          <a:p>
+            <a:r>
+              <a:rPr sz="800">
+                <a:hlinkClick r:id="rId29"/>
+              </a:rPr>
+              <a:t>Lofar 4</a:t>
+            </a:r>
+          </a:p>
+        </p:txBody>
+      </p:sp>
+      <p:sp>
+        <p:nvSpPr>
+          <p:cNvPr id="19" name="Rounded Rectangle 18">
+            <a:hlinkClick r:id="rId30"/>
+          </p:cNvPr>
+          <p:cNvSpPr/>
+          <p:nvPr/>
+        </p:nvSpPr>
+        <p:spPr>
+          <a:xfrm>
+            <a:off x="7240219" y="2682240"/>
+            <a:ext cx="2200046" cy="365760"/>
+          </a:xfrm>
+          <a:prstGeom prst="roundRect">
+            <a:avLst/>
+          </a:prstGeom>
+          <a:solidFill>
+            <a:srgbClr val="E8EEF7"/>
+          </a:solidFill>
+          <a:ln>
+            <a:solidFill>
+              <a:srgbClr val="1F3A5F"/>
+            </a:solidFill>
+          </a:ln>
+        </p:spPr>
+        <p:style>
+          <a:lnRef idx="1">
+            <a:schemeClr val="accent1"/>
+          </a:lnRef>
+          <a:fillRef idx="3">
+            <a:schemeClr val="accent1"/>
+          </a:fillRef>
+          <a:effectRef idx="2">
+            <a:schemeClr val="accent1"/>
+          </a:effectRef>
+          <a:fontRef idx="minor">
+            <a:schemeClr val="lt1"/>
+          </a:fontRef>
+        </p:style>
+        <p:txBody>
+          <a:bodyPr rtlCol="0" anchor="ctr" lIns="45720" rIns="45720"/>
+          <a:lstStyle/>
+          <a:p>
+            <a:pPr algn="ctr"/>
+            <a:r>
+              <a:rPr sz="900">
+                <a:solidFill>
+                  <a:srgbClr val="1F3A5F"/>
+                </a:solidFill>
+              </a:rPr>
+              <a:t>Gram 29: Prometheus contact bearing 178, codename Trill</a:t>
+            </a:r>
+          </a:p>
+        </p:txBody>
+      </p:sp>
+      <p:sp>
+        <p:nvSpPr>
+          <p:cNvPr id="20" name="TextBox 19"/>
+          <p:cNvSpPr txBox="1"/>
+          <p:nvPr/>
+        </p:nvSpPr>
+        <p:spPr>
+          <a:xfrm>
+            <a:off x="7240219" y="3066288"/>
+            <a:ext cx="2200046" cy="1447800"/>
+          </a:xfrm>
+          <a:prstGeom prst="rect">
+            <a:avLst/>
+          </a:prstGeom>
+          <a:noFill/>
+        </p:spPr>
+        <p:txBody>
+          <a:bodyPr wrap="square">
+            <a:spAutoFit/>
+          </a:bodyPr>
+          <a:lstStyle/>
+          <a:p>
+            <a:r>
+              <a:rPr sz="800">
+                <a:hlinkClick r:id="rId31"/>
+              </a:rPr>
+              <a:t>Lofar 1</a:t>
+            </a:r>
+          </a:p>
+          <a:p>
+            <a:r>
+              <a:rPr sz="800">
+                <a:hlinkClick r:id="rId32"/>
+              </a:rPr>
+              <a:t>Lofar 2</a:t>
+            </a:r>
+          </a:p>
+          <a:p>
+            <a:r>
+              <a:rPr sz="800">
+                <a:hlinkClick r:id="rId33"/>
+              </a:rPr>
+              <a:t>Lofar 3</a:t>
+            </a:r>
+          </a:p>
+        </p:txBody>
+      </p:sp>
+      <p:sp>
+        <p:nvSpPr>
+          <p:cNvPr id="21" name="Rounded Rectangle 20">
+            <a:hlinkClick r:id="rId34"/>
+          </p:cNvPr>
+          <p:cNvSpPr/>
+          <p:nvPr/>
+        </p:nvSpPr>
+        <p:spPr>
+          <a:xfrm>
+            <a:off x="9531705" y="2682240"/>
+            <a:ext cx="2200046" cy="365760"/>
+          </a:xfrm>
+          <a:prstGeom prst="roundRect">
+            <a:avLst/>
+          </a:prstGeom>
+          <a:solidFill>
+            <a:srgbClr val="E8EEF7"/>
+          </a:solidFill>
+          <a:ln>
+            <a:solidFill>
+              <a:srgbClr val="1F3A5F"/>
+            </a:solidFill>
+          </a:ln>
+        </p:spPr>
+        <p:style>
+          <a:lnRef idx="1">
+            <a:schemeClr val="accent1"/>
+          </a:lnRef>
+          <a:fillRef idx="3">
+            <a:schemeClr val="accent1"/>
+          </a:fillRef>
+          <a:effectRef idx="2">
+            <a:schemeClr val="accent1"/>
+          </a:effectRef>
+          <a:fontRef idx="minor">
+            <a:schemeClr val="lt1"/>
+          </a:fontRef>
+        </p:style>
+        <p:txBody>
+          <a:bodyPr rtlCol="0" anchor="ctr" lIns="45720" rIns="45720"/>
+          <a:lstStyle/>
+          <a:p>
+            <a:pPr algn="ctr"/>
+            <a:r>
+              <a:rPr sz="900">
+                <a:solidFill>
+                  <a:srgbClr val="1F3A5F"/>
+                </a:solidFill>
+              </a:rPr>
+              <a:t>Gram 30: FR Ghost, Category 2, Risa</a:t>
+            </a:r>
+          </a:p>
+        </p:txBody>
+      </p:sp>
+      <p:sp>
+        <p:nvSpPr>
+          <p:cNvPr id="22" name="TextBox 21"/>
+          <p:cNvSpPr txBox="1"/>
+          <p:nvPr/>
+        </p:nvSpPr>
+        <p:spPr>
+          <a:xfrm>
+            <a:off x="9531705" y="3066288"/>
+            <a:ext cx="2200046" cy="1447800"/>
+          </a:xfrm>
+          <a:prstGeom prst="rect">
+            <a:avLst/>
+          </a:prstGeom>
+          <a:noFill/>
+        </p:spPr>
+        <p:txBody>
+          <a:bodyPr wrap="square">
+            <a:spAutoFit/>
+          </a:bodyPr>
+          <a:lstStyle/>
+          <a:p>
+            <a:r>
+              <a:rPr sz="800">
+                <a:hlinkClick r:id="rId35"/>
+              </a:rPr>
+              <a:t>Lofar 1</a:t>
+            </a:r>
+          </a:p>
+        </p:txBody>
+      </p:sp>
+      <p:sp>
+        <p:nvSpPr>
+          <p:cNvPr id="23" name="Rounded Rectangle 22">
+            <a:hlinkClick r:id="rId36"/>
+          </p:cNvPr>
+          <p:cNvSpPr/>
+          <p:nvPr/>
+        </p:nvSpPr>
+        <p:spPr>
+          <a:xfrm>
+            <a:off x="365760" y="4632960"/>
+            <a:ext cx="2200046" cy="365760"/>
+          </a:xfrm>
+          <a:prstGeom prst="roundRect">
+            <a:avLst/>
+          </a:prstGeom>
+          <a:solidFill>
+            <a:srgbClr val="E8EEF7"/>
+          </a:solidFill>
+          <a:ln>
+            <a:solidFill>
+              <a:srgbClr val="1F3A5F"/>
+            </a:solidFill>
+          </a:ln>
+        </p:spPr>
+        <p:style>
+          <a:lnRef idx="1">
+            <a:schemeClr val="accent1"/>
+          </a:lnRef>
+          <a:fillRef idx="3">
+            <a:schemeClr val="accent1"/>
+          </a:fillRef>
+          <a:effectRef idx="2">
+            <a:schemeClr val="accent1"/>
+          </a:effectRef>
+          <a:fontRef idx="minor">
+            <a:schemeClr val="lt1"/>
+          </a:fontRef>
+        </p:style>
+        <p:txBody>
+          <a:bodyPr rtlCol="0" anchor="ctr" lIns="45720" rIns="45720"/>
+          <a:lstStyle/>
+          <a:p>
+            <a:pPr algn="ctr"/>
+            <a:r>
+              <a:rPr sz="900">
+                <a:solidFill>
+                  <a:srgbClr val="1F3A5F"/>
+                </a:solidFill>
+              </a:rPr>
+              <a:t>Gram 32: FR Defiant, Category 4, Kobol</a:t>
+            </a:r>
+          </a:p>
+        </p:txBody>
+      </p:sp>
+      <p:sp>
+        <p:nvSpPr>
+          <p:cNvPr id="24" name="TextBox 23"/>
+          <p:cNvSpPr txBox="1"/>
+          <p:nvPr/>
+        </p:nvSpPr>
+        <p:spPr>
+          <a:xfrm>
+            <a:off x="365760" y="5017008"/>
+            <a:ext cx="2200046" cy="1447800"/>
+          </a:xfrm>
+          <a:prstGeom prst="rect">
+            <a:avLst/>
+          </a:prstGeom>
+          <a:noFill/>
+        </p:spPr>
+        <p:txBody>
+          <a:bodyPr wrap="square">
+            <a:spAutoFit/>
+          </a:bodyPr>
+          <a:lstStyle/>
+          <a:p>
+            <a:r>
+              <a:rPr sz="800">
+                <a:hlinkClick r:id="rId37"/>
+              </a:rPr>
+              <a:t>Lofar 1</a:t>
+            </a:r>
+          </a:p>
+        </p:txBody>
+      </p:sp>
+      <p:sp>
+        <p:nvSpPr>
+          <p:cNvPr id="25" name="Rounded Rectangle 24">
+            <a:hlinkClick r:id="rId38"/>
+          </p:cNvPr>
+          <p:cNvSpPr/>
+          <p:nvPr/>
+        </p:nvSpPr>
+        <p:spPr>
+          <a:xfrm>
+            <a:off x="2657246" y="4632960"/>
+            <a:ext cx="2200046" cy="365760"/>
+          </a:xfrm>
+          <a:prstGeom prst="roundRect">
+            <a:avLst/>
+          </a:prstGeom>
+          <a:solidFill>
+            <a:srgbClr val="E8EEF7"/>
+          </a:solidFill>
+          <a:ln>
+            <a:solidFill>
+              <a:srgbClr val="1F3A5F"/>
+            </a:solidFill>
+          </a:ln>
+        </p:spPr>
+        <p:style>
+          <a:lnRef idx="1">
+            <a:schemeClr val="accent1"/>
+          </a:lnRef>
+          <a:fillRef idx="3">
+            <a:schemeClr val="accent1"/>
+          </a:fillRef>
+          <a:effectRef idx="2">
+            <a:schemeClr val="accent1"/>
+          </a:effectRef>
+          <a:fontRef idx="minor">
+            <a:schemeClr val="lt1"/>
+          </a:fontRef>
+        </p:style>
+        <p:txBody>
+          <a:bodyPr rtlCol="0" anchor="ctr" lIns="45720" rIns="45720"/>
+          <a:lstStyle/>
+          <a:p>
+            <a:pPr algn="ctr"/>
+            <a:r>
+              <a:rPr sz="900">
+                <a:solidFill>
+                  <a:srgbClr val="1F3A5F"/>
+                </a:solidFill>
+              </a:rPr>
+              <a:t>Gram 33: FR Ghost, Category 4, Risa</a:t>
+            </a:r>
+          </a:p>
+        </p:txBody>
+      </p:sp>
+      <p:sp>
+        <p:nvSpPr>
+          <p:cNvPr id="26" name="TextBox 25"/>
+          <p:cNvSpPr txBox="1"/>
+          <p:nvPr/>
+        </p:nvSpPr>
+        <p:spPr>
+          <a:xfrm>
+            <a:off x="2657246" y="5017008"/>
+            <a:ext cx="2200046" cy="1447800"/>
+          </a:xfrm>
+          <a:prstGeom prst="rect">
+            <a:avLst/>
+          </a:prstGeom>
+          <a:noFill/>
+        </p:spPr>
+        <p:txBody>
+          <a:bodyPr wrap="square">
+            <a:spAutoFit/>
+          </a:bodyPr>
+          <a:lstStyle/>
+          <a:p>
+            <a:r>
+              <a:rPr sz="800">
+                <a:hlinkClick r:id="rId39"/>
+              </a:rPr>
+              <a:t>Lofar 1</a:t>
+            </a:r>
+          </a:p>
+          <a:p>
+            <a:r>
+              <a:rPr sz="800">
+                <a:hlinkClick r:id="rId40"/>
+              </a:rPr>
+              <a:t>Lofar 2</a:t>
+            </a:r>
+          </a:p>
+          <a:p>
+            <a:r>
+              <a:rPr sz="800">
+                <a:hlinkClick r:id="rId41"/>
+              </a:rPr>
+              <a:t>Lofar 3</a:t>
+            </a:r>
+          </a:p>
+          <a:p>
+            <a:r>
+              <a:rPr sz="800">
+                <a:hlinkClick r:id="rId42"/>
+              </a:rPr>
+              <a:t>Lofar 4</a:t>
+            </a:r>
+          </a:p>
+        </p:txBody>
+      </p:sp>
+      <p:sp>
+        <p:nvSpPr>
+          <p:cNvPr id="27" name="Rounded Rectangle 26">
+            <a:hlinkClick r:id="rId43"/>
+          </p:cNvPr>
+          <p:cNvSpPr/>
+          <p:nvPr/>
+        </p:nvSpPr>
+        <p:spPr>
+          <a:xfrm>
+            <a:off x="4948732" y="4632960"/>
+            <a:ext cx="2200046" cy="365760"/>
+          </a:xfrm>
+          <a:prstGeom prst="roundRect">
+            <a:avLst/>
+          </a:prstGeom>
+          <a:solidFill>
+            <a:srgbClr val="E8EEF7"/>
+          </a:solidFill>
+          <a:ln>
+            <a:solidFill>
+              <a:srgbClr val="1F3A5F"/>
+            </a:solidFill>
+          </a:ln>
+        </p:spPr>
+        <p:style>
+          <a:lnRef idx="1">
+            <a:schemeClr val="accent1"/>
+          </a:lnRef>
+          <a:fillRef idx="3">
+            <a:schemeClr val="accent1"/>
+          </a:fillRef>
+          <a:effectRef idx="2">
+            <a:schemeClr val="accent1"/>
+          </a:effectRef>
+          <a:fontRef idx="minor">
+            <a:schemeClr val="lt1"/>
+          </a:fontRef>
+        </p:style>
+        <p:txBody>
+          <a:bodyPr rtlCol="0" anchor="ctr" lIns="45720" rIns="45720"/>
+          <a:lstStyle/>
+          <a:p>
+            <a:pPr algn="ctr"/>
+            <a:r>
+              <a:rPr sz="900">
+                <a:solidFill>
+                  <a:srgbClr val="1F3A5F"/>
+                </a:solidFill>
+              </a:rPr>
+              <a:t>Gram 34: FR Reliant, Category 3, Risa</a:t>
+            </a:r>
+          </a:p>
+        </p:txBody>
+      </p:sp>
+      <p:sp>
+        <p:nvSpPr>
+          <p:cNvPr id="28" name="TextBox 27"/>
+          <p:cNvSpPr txBox="1"/>
+          <p:nvPr/>
+        </p:nvSpPr>
+        <p:spPr>
+          <a:xfrm>
+            <a:off x="4948732" y="5017008"/>
+            <a:ext cx="2200046" cy="1447800"/>
+          </a:xfrm>
+          <a:prstGeom prst="rect">
+            <a:avLst/>
+          </a:prstGeom>
+          <a:noFill/>
+        </p:spPr>
+        <p:txBody>
+          <a:bodyPr wrap="square">
+            <a:spAutoFit/>
+          </a:bodyPr>
+          <a:lstStyle/>
+          <a:p>
+            <a:r>
+              <a:rPr sz="800">
+                <a:hlinkClick r:id="rId44"/>
+              </a:rPr>
+              <a:t>Lofar 1</a:t>
+            </a:r>
+          </a:p>
+          <a:p>
+            <a:r>
+              <a:rPr sz="800">
+                <a:hlinkClick r:id="rId45"/>
+              </a:rPr>
+              <a:t>Lofar 2</a:t>
+            </a:r>
+          </a:p>
+          <a:p>
+            <a:r>
+              <a:rPr sz="800">
+                <a:hlinkClick r:id="rId46"/>
+              </a:rPr>
+              <a:t>Lofar 3</a:t>
+            </a:r>
+          </a:p>
+          <a:p>
+            <a:r>
+              <a:rPr sz="800">
+                <a:hlinkClick r:id="rId47"/>
+              </a:rPr>
+              <a:t>Lofar 4</a:t>
+            </a:r>
+          </a:p>
+        </p:txBody>
+      </p:sp>
+      <p:sp>
+        <p:nvSpPr>
+          <p:cNvPr id="29" name="Rounded Rectangle 28">
+            <a:hlinkClick r:id="rId48"/>
+          </p:cNvPr>
+          <p:cNvSpPr/>
+          <p:nvPr/>
+        </p:nvSpPr>
+        <p:spPr>
+          <a:xfrm>
+            <a:off x="7240219" y="4632960"/>
+            <a:ext cx="2200046" cy="365760"/>
+          </a:xfrm>
+          <a:prstGeom prst="roundRect">
+            <a:avLst/>
+          </a:prstGeom>
+          <a:solidFill>
+            <a:srgbClr val="E8EEF7"/>
+          </a:solidFill>
+          <a:ln>
+            <a:solidFill>
+              <a:srgbClr val="1F3A5F"/>
+            </a:solidFill>
+          </a:ln>
+        </p:spPr>
+        <p:style>
+          <a:lnRef idx="1">
+            <a:schemeClr val="accent1"/>
+          </a:lnRef>
+          <a:fillRef idx="3">
+            <a:schemeClr val="accent1"/>
+          </a:fillRef>
+          <a:effectRef idx="2">
+            <a:schemeClr val="accent1"/>
+          </a:effectRef>
+          <a:fontRef idx="minor">
+            <a:schemeClr val="lt1"/>
+          </a:fontRef>
+        </p:style>
+        <p:txBody>
+          <a:bodyPr rtlCol="0" anchor="ctr" lIns="45720" rIns="45720"/>
+          <a:lstStyle/>
+          <a:p>
+            <a:pPr algn="ctr"/>
+            <a:r>
+              <a:rPr sz="900">
+                <a:solidFill>
+                  <a:srgbClr val="1F3A5F"/>
+                </a:solidFill>
+              </a:rPr>
+              <a:t>Gram 35: FR Slave I, Category 3, Dagobah</a:t>
+            </a:r>
+          </a:p>
+        </p:txBody>
+      </p:sp>
+      <p:sp>
+        <p:nvSpPr>
+          <p:cNvPr id="30" name="TextBox 29"/>
+          <p:cNvSpPr txBox="1"/>
+          <p:nvPr/>
+        </p:nvSpPr>
+        <p:spPr>
+          <a:xfrm>
+            <a:off x="7240219" y="5017008"/>
+            <a:ext cx="2200046" cy="1447800"/>
+          </a:xfrm>
+          <a:prstGeom prst="rect">
+            <a:avLst/>
+          </a:prstGeom>
+          <a:noFill/>
+        </p:spPr>
+        <p:txBody>
+          <a:bodyPr wrap="square">
+            <a:spAutoFit/>
+          </a:bodyPr>
+          <a:lstStyle/>
+          <a:p>
+            <a:r>
+              <a:rPr sz="800">
+                <a:hlinkClick r:id="rId49"/>
+              </a:rPr>
+              <a:t>Lofar 1</a:t>
+            </a:r>
+          </a:p>
+        </p:txBody>
+      </p:sp>
+      <p:sp>
+        <p:nvSpPr>
+          <p:cNvPr id="31" name="Rounded Rectangle 30">
+            <a:hlinkClick r:id="rId50"/>
+          </p:cNvPr>
+          <p:cNvSpPr/>
+          <p:nvPr/>
+        </p:nvSpPr>
+        <p:spPr>
+          <a:xfrm>
+            <a:off x="9531705" y="4632960"/>
+            <a:ext cx="2200046" cy="365760"/>
+          </a:xfrm>
+          <a:prstGeom prst="roundRect">
+            <a:avLst/>
+          </a:prstGeom>
+          <a:solidFill>
+            <a:srgbClr val="E8EEF7"/>
+          </a:solidFill>
+          <a:ln>
+            <a:solidFill>
+              <a:srgbClr val="1F3A5F"/>
+            </a:solidFill>
+          </a:ln>
+        </p:spPr>
+        <p:style>
+          <a:lnRef idx="1">
+            <a:schemeClr val="accent1"/>
+          </a:lnRef>
+          <a:fillRef idx="3">
+            <a:schemeClr val="accent1"/>
+          </a:fillRef>
+          <a:effectRef idx="2">
+            <a:schemeClr val="accent1"/>
+          </a:effectRef>
+          <a:fontRef idx="minor">
+            <a:schemeClr val="lt1"/>
+          </a:fontRef>
+        </p:style>
+        <p:txBody>
+          <a:bodyPr rtlCol="0" anchor="ctr" lIns="45720" rIns="45720"/>
+          <a:lstStyle/>
+          <a:p>
+            <a:pPr algn="ctr"/>
+            <a:r>
+              <a:rPr sz="900">
+                <a:solidFill>
+                  <a:srgbClr val="1F3A5F"/>
+                </a:solidFill>
+              </a:rPr>
+              <a:t>Gram 36: FR Equinox, Category 2, Gandalf</a:t>
+            </a:r>
+          </a:p>
+        </p:txBody>
+      </p:sp>
+      <p:sp>
+        <p:nvSpPr>
+          <p:cNvPr id="32" name="TextBox 31"/>
+          <p:cNvSpPr txBox="1"/>
+          <p:nvPr/>
+        </p:nvSpPr>
+        <p:spPr>
+          <a:xfrm>
+            <a:off x="9531705" y="5017008"/>
+            <a:ext cx="2200046" cy="1447800"/>
+          </a:xfrm>
+          <a:prstGeom prst="rect">
+            <a:avLst/>
+          </a:prstGeom>
+          <a:noFill/>
+        </p:spPr>
+        <p:txBody>
+          <a:bodyPr wrap="square">
+            <a:spAutoFit/>
+          </a:bodyPr>
+          <a:lstStyle/>
+          <a:p>
+            <a:r>
+              <a:rPr sz="800">
                 <a:hlinkClick r:id="rId51"/>
               </a:rPr>
               <a:t>Lofar 1</a:t>
@@ -6089,6 +6177,92 @@
                 <a:hlinkClick r:id="rId52"/>
               </a:rPr>
               <a:t>Lofar 2</a:t>
+            </a:r>
+          </a:p>
+        </p:txBody>
+      </p:sp>
+    </p:spTree>
+  </p:cSld>
+  <p:clrMapOvr>
+    <a:masterClrMapping/>
+  </p:clrMapOvr>
+</p:sld>
+</file>
+
+<file path=ppt/slides/slide4.xml><?xml version="1.0" encoding="utf-8"?>
+<p:sld xmlns:a="http://schemas.openxmlformats.org/drawingml/2006/main" xmlns:p="http://schemas.openxmlformats.org/presentationml/2006/main" xmlns:r="http://schemas.openxmlformats.org/officeDocument/2006/relationships">
+  <p:cSld>
+    <p:spTree>
+      <p:nvGrpSpPr>
+        <p:cNvPr id="1" name=""/>
+        <p:cNvGrpSpPr/>
+        <p:nvPr/>
+      </p:nvGrpSpPr>
+      <p:grpSpPr/>
+      <p:sp>
+        <p:nvSpPr>
+          <p:cNvPr id="2" name="TextBox 1"/>
+          <p:cNvSpPr txBox="1"/>
+          <p:nvPr/>
+        </p:nvSpPr>
+        <p:spPr>
+          <a:xfrm>
+            <a:off x="914400" y="2377440"/>
+            <a:ext cx="10360152" cy="1280160"/>
+          </a:xfrm>
+          <a:prstGeom prst="rect">
+            <a:avLst/>
+          </a:prstGeom>
+          <a:noFill/>
+        </p:spPr>
+        <p:txBody>
+          <a:bodyPr wrap="square">
+            <a:spAutoFit/>
+          </a:bodyPr>
+          <a:lstStyle/>
+          <a:p>
+            <a:pPr algn="ctr"/>
+            <a:r>
+              <a:rPr sz="4000" b="1">
+                <a:solidFill>
+                  <a:srgbClr val="1F3A5F"/>
+                </a:solidFill>
+              </a:rPr>
+              <a:t>End of Instructor Progress Test 4 Grams</a:t>
+            </a:r>
+          </a:p>
+        </p:txBody>
+      </p:sp>
+      <p:sp>
+        <p:nvSpPr>
+          <p:cNvPr id="3" name="TextBox 2"/>
+          <p:cNvSpPr txBox="1"/>
+          <p:nvPr/>
+        </p:nvSpPr>
+        <p:spPr>
+          <a:xfrm>
+            <a:off x="914400" y="3840480"/>
+            <a:ext cx="10360152" cy="731520"/>
+          </a:xfrm>
+          <a:prstGeom prst="rect">
+            <a:avLst/>
+          </a:prstGeom>
+          <a:noFill/>
+        </p:spPr>
+        <p:txBody>
+          <a:bodyPr wrap="none">
+            <a:spAutoFit/>
+          </a:bodyPr>
+          <a:lstStyle/>
+          <a:p>
+            <a:pPr algn="ctr"/>
+            <a:r>
+              <a:rPr sz="2400">
+                <a:solidFill>
+                  <a:srgbClr val="1F3A5F"/>
+                </a:solidFill>
+              </a:rPr>
+              <a:t>Instructor Version</a:t>
             </a:r>
           </a:p>
         </p:txBody>
